--- a/MAJOR_PPT.pptx
+++ b/MAJOR_PPT.pptx
@@ -5,22 +5,23 @@
     <p:sldMasterId id="2147483648" r:id="rId1"/>
   </p:sldMasterIdLst>
   <p:notesMasterIdLst>
-    <p:notesMasterId r:id="rId15"/>
+    <p:notesMasterId r:id="rId16"/>
   </p:notesMasterIdLst>
   <p:sldIdLst>
     <p:sldId id="256" r:id="rId2"/>
-    <p:sldId id="257" r:id="rId3"/>
-    <p:sldId id="258" r:id="rId4"/>
-    <p:sldId id="259" r:id="rId5"/>
-    <p:sldId id="260" r:id="rId6"/>
-    <p:sldId id="261" r:id="rId7"/>
-    <p:sldId id="272" r:id="rId8"/>
-    <p:sldId id="271" r:id="rId9"/>
+    <p:sldId id="275" r:id="rId3"/>
+    <p:sldId id="276" r:id="rId4"/>
+    <p:sldId id="273" r:id="rId5"/>
+    <p:sldId id="277" r:id="rId6"/>
+    <p:sldId id="279" r:id="rId7"/>
+    <p:sldId id="261" r:id="rId8"/>
+    <p:sldId id="274" r:id="rId9"/>
     <p:sldId id="263" r:id="rId10"/>
-    <p:sldId id="268" r:id="rId11"/>
-    <p:sldId id="270" r:id="rId12"/>
-    <p:sldId id="266" r:id="rId13"/>
-    <p:sldId id="267" r:id="rId14"/>
+    <p:sldId id="281" r:id="rId11"/>
+    <p:sldId id="280" r:id="rId12"/>
+    <p:sldId id="268" r:id="rId13"/>
+    <p:sldId id="266" r:id="rId14"/>
+    <p:sldId id="278" r:id="rId15"/>
   </p:sldIdLst>
   <p:sldSz cx="12192000" cy="6858000"/>
   <p:notesSz cx="6858000" cy="9144000"/>
@@ -626,7 +627,7 @@
           <a:p>
             <a:fld id="{D5A8B32A-C204-4155-87D1-F780C816471E}" type="datetimeFigureOut">
               <a:rPr lang="en-IN" smtClean="0"/>
-              <a:t>08-04-2026</a:t>
+              <a:t>22-05-2026</a:t>
             </a:fld>
             <a:endParaRPr lang="en-IN"/>
           </a:p>
@@ -894,90 +895,6 @@
 </p:notesMaster>
 </file>
 
-<file path=ppt/notesSlides/notesSlide1.xml><?xml version="1.0" encoding="utf-8"?>
-<p:notes xmlns:a="http://schemas.openxmlformats.org/drawingml/2006/main" xmlns:r="http://schemas.openxmlformats.org/officeDocument/2006/relationships" xmlns:p="http://schemas.openxmlformats.org/presentationml/2006/main">
-  <p:cSld>
-    <p:spTree>
-      <p:nvGrpSpPr>
-        <p:cNvPr id="1" name=""/>
-        <p:cNvGrpSpPr/>
-        <p:nvPr/>
-      </p:nvGrpSpPr>
-      <p:grpSpPr>
-        <a:xfrm>
-          <a:off x="0" y="0"/>
-          <a:ext cx="0" cy="0"/>
-          <a:chOff x="0" y="0"/>
-          <a:chExt cx="0" cy="0"/>
-        </a:xfrm>
-      </p:grpSpPr>
-      <p:sp>
-        <p:nvSpPr>
-          <p:cNvPr id="2" name="Slide Image Placeholder 1"/>
-          <p:cNvSpPr>
-            <a:spLocks noGrp="1" noRot="1" noChangeAspect="1"/>
-          </p:cNvSpPr>
-          <p:nvPr>
-            <p:ph type="sldImg"/>
-          </p:nvPr>
-        </p:nvSpPr>
-        <p:spPr/>
-      </p:sp>
-      <p:sp>
-        <p:nvSpPr>
-          <p:cNvPr id="3" name="Notes Placeholder 2"/>
-          <p:cNvSpPr>
-            <a:spLocks noGrp="1"/>
-          </p:cNvSpPr>
-          <p:nvPr>
-            <p:ph type="body" idx="1"/>
-          </p:nvPr>
-        </p:nvSpPr>
-        <p:spPr/>
-        <p:txBody>
-          <a:bodyPr/>
-          <a:lstStyle/>
-          <a:p>
-            <a:endParaRPr lang="en-IN" dirty="0"/>
-          </a:p>
-        </p:txBody>
-      </p:sp>
-      <p:sp>
-        <p:nvSpPr>
-          <p:cNvPr id="4" name="Slide Number Placeholder 3"/>
-          <p:cNvSpPr>
-            <a:spLocks noGrp="1"/>
-          </p:cNvSpPr>
-          <p:nvPr>
-            <p:ph type="sldNum" sz="quarter" idx="5"/>
-          </p:nvPr>
-        </p:nvSpPr>
-        <p:spPr/>
-        <p:txBody>
-          <a:bodyPr/>
-          <a:lstStyle/>
-          <a:p>
-            <a:fld id="{93FD3054-30D0-464D-A8E7-0B639282CC1F}" type="slidenum">
-              <a:rPr lang="en-IN" smtClean="0"/>
-              <a:t>4</a:t>
-            </a:fld>
-            <a:endParaRPr lang="en-IN"/>
-          </a:p>
-        </p:txBody>
-      </p:sp>
-    </p:spTree>
-    <p:extLst>
-      <p:ext uri="{BB962C8B-B14F-4D97-AF65-F5344CB8AC3E}">
-        <p14:creationId xmlns:p14="http://schemas.microsoft.com/office/powerpoint/2010/main" val="499655391"/>
-      </p:ext>
-    </p:extLst>
-  </p:cSld>
-  <p:clrMapOvr>
-    <a:masterClrMapping/>
-  </p:clrMapOvr>
-</p:notes>
-</file>
-
 <file path=ppt/slideLayouts/slideLayout1.xml><?xml version="1.0" encoding="utf-8"?>
 <p:sldLayout xmlns:a="http://schemas.openxmlformats.org/drawingml/2006/main" xmlns:r="http://schemas.openxmlformats.org/officeDocument/2006/relationships" xmlns:p="http://schemas.openxmlformats.org/presentationml/2006/main" type="title" preserve="1">
   <p:cSld name="Title Slide">
@@ -1127,7 +1044,7 @@
           <a:p>
             <a:fld id="{9FBA706A-4970-46A9-8230-217D2B167950}" type="datetime1">
               <a:rPr lang="en-IN" smtClean="0"/>
-              <a:t>08-04-2026</a:t>
+              <a:t>22-05-2026</a:t>
             </a:fld>
             <a:endParaRPr lang="en-IN"/>
           </a:p>
@@ -1327,7 +1244,7 @@
           <a:p>
             <a:fld id="{65D7199A-CA6E-48D6-854C-0B60D52382EE}" type="datetime1">
               <a:rPr lang="en-IN" smtClean="0"/>
-              <a:t>08-04-2026</a:t>
+              <a:t>22-05-2026</a:t>
             </a:fld>
             <a:endParaRPr lang="en-IN"/>
           </a:p>
@@ -1537,7 +1454,7 @@
           <a:p>
             <a:fld id="{12CCFBE7-A2D3-4A15-ACB3-BB18784A462E}" type="datetime1">
               <a:rPr lang="en-IN" smtClean="0"/>
-              <a:t>08-04-2026</a:t>
+              <a:t>22-05-2026</a:t>
             </a:fld>
             <a:endParaRPr lang="en-IN"/>
           </a:p>
@@ -1737,7 +1654,7 @@
           <a:p>
             <a:fld id="{FCF1BDDD-C11B-4760-A959-E38AC8FF4A87}" type="datetime1">
               <a:rPr lang="en-IN" smtClean="0"/>
-              <a:t>08-04-2026</a:t>
+              <a:t>22-05-2026</a:t>
             </a:fld>
             <a:endParaRPr lang="en-IN"/>
           </a:p>
@@ -2013,7 +1930,7 @@
           <a:p>
             <a:fld id="{7E5B0083-D500-4167-A3CE-3E4E67E11D63}" type="datetime1">
               <a:rPr lang="en-IN" smtClean="0"/>
-              <a:t>08-04-2026</a:t>
+              <a:t>22-05-2026</a:t>
             </a:fld>
             <a:endParaRPr lang="en-IN"/>
           </a:p>
@@ -2281,7 +2198,7 @@
           <a:p>
             <a:fld id="{1F3ECF11-DD5E-46A5-80E9-D907DFA7689B}" type="datetime1">
               <a:rPr lang="en-IN" smtClean="0"/>
-              <a:t>08-04-2026</a:t>
+              <a:t>22-05-2026</a:t>
             </a:fld>
             <a:endParaRPr lang="en-IN"/>
           </a:p>
@@ -2696,7 +2613,7 @@
           <a:p>
             <a:fld id="{7F794336-5512-4C0E-B59E-032A5D3BCCB7}" type="datetime1">
               <a:rPr lang="en-IN" smtClean="0"/>
-              <a:t>08-04-2026</a:t>
+              <a:t>22-05-2026</a:t>
             </a:fld>
             <a:endParaRPr lang="en-IN"/>
           </a:p>
@@ -2838,7 +2755,7 @@
           <a:p>
             <a:fld id="{B17334D2-3977-4B75-B5A2-8BBAE777DFB3}" type="datetime1">
               <a:rPr lang="en-IN" smtClean="0"/>
-              <a:t>08-04-2026</a:t>
+              <a:t>22-05-2026</a:t>
             </a:fld>
             <a:endParaRPr lang="en-IN"/>
           </a:p>
@@ -2951,7 +2868,7 @@
           <a:p>
             <a:fld id="{49003B17-2EB1-409D-961F-20BA31FEE401}" type="datetime1">
               <a:rPr lang="en-IN" smtClean="0"/>
-              <a:t>08-04-2026</a:t>
+              <a:t>22-05-2026</a:t>
             </a:fld>
             <a:endParaRPr lang="en-IN"/>
           </a:p>
@@ -3264,7 +3181,7 @@
           <a:p>
             <a:fld id="{2979D2F5-1867-493A-978E-A1A79E8961D0}" type="datetime1">
               <a:rPr lang="en-IN" smtClean="0"/>
-              <a:t>08-04-2026</a:t>
+              <a:t>22-05-2026</a:t>
             </a:fld>
             <a:endParaRPr lang="en-IN"/>
           </a:p>
@@ -3553,7 +3470,7 @@
           <a:p>
             <a:fld id="{C0BF676E-1596-4415-9E2C-BA5F7C360A02}" type="datetime1">
               <a:rPr lang="en-IN" smtClean="0"/>
-              <a:t>08-04-2026</a:t>
+              <a:t>22-05-2026</a:t>
             </a:fld>
             <a:endParaRPr lang="en-IN"/>
           </a:p>
@@ -3796,7 +3713,7 @@
           <a:p>
             <a:fld id="{1C99412F-DCA8-4FF3-96AE-80F8917A34EA}" type="datetime1">
               <a:rPr lang="en-IN" smtClean="0"/>
-              <a:t>08-04-2026</a:t>
+              <a:t>22-05-2026</a:t>
             </a:fld>
             <a:endParaRPr lang="en-IN"/>
           </a:p>
@@ -4228,8 +4145,8 @@
         </p:nvSpPr>
         <p:spPr>
           <a:xfrm>
-            <a:off x="702733" y="584200"/>
-            <a:ext cx="8915400" cy="1490152"/>
+            <a:off x="1716441" y="389169"/>
+            <a:ext cx="8915400" cy="1015663"/>
           </a:xfrm>
           <a:prstGeom prst="rect">
             <a:avLst/>
@@ -4251,140 +4168,126 @@
               </a:spcBef>
             </a:pPr>
             <a:r>
-              <a:rPr lang="en-US" sz="2400" b="1" spc="-50" dirty="0">
-                <a:latin typeface="Times New Roman"/>
+              <a:rPr lang="en-US" sz="2000" b="1" spc="-50" dirty="0">
+                <a:latin typeface="Georgia" panose="02040502050405020303" pitchFamily="18" charset="0"/>
                 <a:cs typeface="Times New Roman"/>
               </a:rPr>
               <a:t>Dr.</a:t>
             </a:r>
             <a:r>
-              <a:rPr lang="en-US" sz="2400" b="1" spc="-65" dirty="0">
-                <a:latin typeface="Times New Roman"/>
+              <a:rPr lang="en-US" sz="2000" b="1" spc="-65" dirty="0">
+                <a:latin typeface="Georgia" panose="02040502050405020303" pitchFamily="18" charset="0"/>
                 <a:cs typeface="Times New Roman"/>
               </a:rPr>
               <a:t> </a:t>
             </a:r>
             <a:r>
-              <a:rPr lang="en-US" sz="2400" b="1" dirty="0">
-                <a:latin typeface="Times New Roman"/>
+              <a:rPr lang="en-US" sz="2000" b="1" dirty="0">
+                <a:latin typeface="Georgia" panose="02040502050405020303" pitchFamily="18" charset="0"/>
                 <a:cs typeface="Times New Roman"/>
               </a:rPr>
               <a:t>B.</a:t>
             </a:r>
             <a:r>
-              <a:rPr lang="en-US" sz="2400" b="1" spc="-45" dirty="0">
-                <a:latin typeface="Times New Roman"/>
+              <a:rPr lang="en-US" sz="2000" b="1" spc="-45" dirty="0">
+                <a:latin typeface="Georgia" panose="02040502050405020303" pitchFamily="18" charset="0"/>
                 <a:cs typeface="Times New Roman"/>
               </a:rPr>
               <a:t> </a:t>
             </a:r>
             <a:r>
-              <a:rPr lang="en-US" sz="2400" b="1" spc="-10" dirty="0">
-                <a:latin typeface="Times New Roman"/>
+              <a:rPr lang="en-US" sz="2000" b="1" spc="-10" dirty="0">
+                <a:latin typeface="Georgia" panose="02040502050405020303" pitchFamily="18" charset="0"/>
                 <a:cs typeface="Times New Roman"/>
               </a:rPr>
               <a:t>R.</a:t>
             </a:r>
             <a:r>
-              <a:rPr lang="en-US" sz="2400" b="1" spc="-140" dirty="0">
-                <a:latin typeface="Times New Roman"/>
+              <a:rPr lang="en-US" sz="2000" b="1" spc="-140" dirty="0">
+                <a:latin typeface="Georgia" panose="02040502050405020303" pitchFamily="18" charset="0"/>
                 <a:cs typeface="Times New Roman"/>
               </a:rPr>
               <a:t> </a:t>
             </a:r>
             <a:r>
-              <a:rPr lang="en-US" sz="2400" b="1" dirty="0">
-                <a:latin typeface="Times New Roman"/>
+              <a:rPr lang="en-US" sz="2000" b="1" dirty="0">
+                <a:latin typeface="Georgia" panose="02040502050405020303" pitchFamily="18" charset="0"/>
                 <a:cs typeface="Times New Roman"/>
               </a:rPr>
               <a:t>Ambedkar</a:t>
             </a:r>
             <a:r>
-              <a:rPr lang="en-US" sz="2400" b="1" spc="-95" dirty="0">
-                <a:latin typeface="Times New Roman"/>
+              <a:rPr lang="en-US" sz="2000" b="1" spc="-95" dirty="0">
+                <a:latin typeface="Georgia" panose="02040502050405020303" pitchFamily="18" charset="0"/>
                 <a:cs typeface="Times New Roman"/>
               </a:rPr>
               <a:t> </a:t>
             </a:r>
             <a:r>
-              <a:rPr lang="en-US" sz="2400" b="1" dirty="0">
-                <a:latin typeface="Times New Roman"/>
+              <a:rPr lang="en-US" sz="2000" b="1" dirty="0">
+                <a:latin typeface="Georgia" panose="02040502050405020303" pitchFamily="18" charset="0"/>
                 <a:cs typeface="Times New Roman"/>
               </a:rPr>
               <a:t>National</a:t>
             </a:r>
             <a:r>
-              <a:rPr lang="en-US" sz="2400" b="1" spc="-45" dirty="0">
-                <a:latin typeface="Times New Roman"/>
+              <a:rPr lang="en-US" sz="2000" b="1" spc="-45" dirty="0">
+                <a:latin typeface="Georgia" panose="02040502050405020303" pitchFamily="18" charset="0"/>
                 <a:cs typeface="Times New Roman"/>
               </a:rPr>
               <a:t> </a:t>
             </a:r>
             <a:r>
-              <a:rPr lang="en-US" sz="2400" b="1" dirty="0">
-                <a:latin typeface="Times New Roman"/>
+              <a:rPr lang="en-US" sz="2000" b="1" dirty="0">
+                <a:latin typeface="Georgia" panose="02040502050405020303" pitchFamily="18" charset="0"/>
                 <a:cs typeface="Times New Roman"/>
               </a:rPr>
               <a:t>Institute</a:t>
             </a:r>
             <a:r>
-              <a:rPr lang="en-US" sz="2400" b="1" spc="-55" dirty="0">
-                <a:latin typeface="Times New Roman"/>
+              <a:rPr lang="en-US" sz="2000" b="1" spc="-55" dirty="0">
+                <a:latin typeface="Georgia" panose="02040502050405020303" pitchFamily="18" charset="0"/>
                 <a:cs typeface="Times New Roman"/>
               </a:rPr>
               <a:t> </a:t>
             </a:r>
             <a:r>
-              <a:rPr lang="en-US" sz="2400" b="1" dirty="0">
-                <a:latin typeface="Times New Roman"/>
+              <a:rPr lang="en-US" sz="2000" b="1" dirty="0">
+                <a:latin typeface="Georgia" panose="02040502050405020303" pitchFamily="18" charset="0"/>
                 <a:cs typeface="Times New Roman"/>
               </a:rPr>
               <a:t>Of</a:t>
             </a:r>
             <a:r>
-              <a:rPr lang="en-US" sz="2400" b="1" spc="-95" dirty="0">
-                <a:latin typeface="Times New Roman"/>
+              <a:rPr lang="en-US" sz="2000" b="1" spc="-95" dirty="0">
+                <a:latin typeface="Georgia" panose="02040502050405020303" pitchFamily="18" charset="0"/>
                 <a:cs typeface="Times New Roman"/>
               </a:rPr>
               <a:t> </a:t>
             </a:r>
             <a:r>
-              <a:rPr lang="en-US" sz="2400" b="1" spc="-30" dirty="0">
-                <a:latin typeface="Times New Roman"/>
+              <a:rPr lang="en-US" sz="2000" b="1" spc="-30" dirty="0">
+                <a:latin typeface="Georgia" panose="02040502050405020303" pitchFamily="18" charset="0"/>
                 <a:cs typeface="Times New Roman"/>
               </a:rPr>
               <a:t>Technology,</a:t>
             </a:r>
             <a:r>
-              <a:rPr lang="en-US" sz="2400" b="1" spc="-45" dirty="0">
-                <a:latin typeface="Times New Roman"/>
+              <a:rPr lang="en-US" sz="2000" b="1" spc="-45" dirty="0">
+                <a:latin typeface="Georgia" panose="02040502050405020303" pitchFamily="18" charset="0"/>
                 <a:cs typeface="Times New Roman"/>
               </a:rPr>
               <a:t> </a:t>
             </a:r>
             <a:r>
-              <a:rPr lang="en-US" sz="2400" b="1" spc="-10" dirty="0">
-                <a:latin typeface="Times New Roman"/>
+              <a:rPr lang="en-US" sz="2000" b="1" spc="-10" dirty="0">
+                <a:latin typeface="Georgia" panose="02040502050405020303" pitchFamily="18" charset="0"/>
                 <a:cs typeface="Times New Roman"/>
               </a:rPr>
               <a:t>Jalandhar</a:t>
             </a:r>
-            <a:endParaRPr lang="en-US" sz="2400" dirty="0">
-              <a:latin typeface="Times New Roman"/>
-              <a:cs typeface="Times New Roman"/>
-            </a:endParaRPr>
-          </a:p>
-          <a:p>
-            <a:pPr>
-              <a:lnSpc>
-                <a:spcPct val="100000"/>
-              </a:lnSpc>
-              <a:spcBef>
-                <a:spcPts val="120"/>
-              </a:spcBef>
-            </a:pPr>
-            <a:endParaRPr lang="en-US" sz="2400" dirty="0">
-              <a:latin typeface="Times New Roman"/>
+            <a:endParaRPr lang="en-US" sz="2000" dirty="0">
+              <a:latin typeface="Georgia" panose="02040502050405020303" pitchFamily="18" charset="0"/>
               <a:cs typeface="Times New Roman"/>
             </a:endParaRPr>
           </a:p>
@@ -4398,89 +4301,91 @@
               </a:spcBef>
             </a:pPr>
             <a:r>
-              <a:rPr lang="en-US" sz="2400" b="1" dirty="0">
-                <a:latin typeface="Times New Roman"/>
+              <a:rPr lang="en-US" sz="2000" b="1" dirty="0">
+                <a:latin typeface="Georgia" panose="02040502050405020303" pitchFamily="18" charset="0"/>
                 <a:cs typeface="Times New Roman"/>
               </a:rPr>
               <a:t>Department</a:t>
             </a:r>
             <a:r>
-              <a:rPr lang="en-US" sz="2400" b="1" spc="-60" dirty="0">
-                <a:latin typeface="Times New Roman"/>
+              <a:rPr lang="en-US" sz="2000" b="1" spc="-60" dirty="0">
+                <a:latin typeface="Georgia" panose="02040502050405020303" pitchFamily="18" charset="0"/>
                 <a:cs typeface="Times New Roman"/>
               </a:rPr>
               <a:t> </a:t>
             </a:r>
             <a:r>
-              <a:rPr lang="en-US" sz="2400" b="1" dirty="0">
-                <a:latin typeface="Times New Roman"/>
+              <a:rPr lang="en-US" sz="2000" b="1" dirty="0">
+                <a:latin typeface="Georgia" panose="02040502050405020303" pitchFamily="18" charset="0"/>
                 <a:cs typeface="Times New Roman"/>
               </a:rPr>
               <a:t>of</a:t>
             </a:r>
             <a:r>
-              <a:rPr lang="en-US" sz="2400" b="1" spc="-60" dirty="0">
-                <a:latin typeface="Times New Roman"/>
+              <a:rPr lang="en-US" sz="2000" b="1" spc="-60" dirty="0">
+                <a:latin typeface="Georgia" panose="02040502050405020303" pitchFamily="18" charset="0"/>
                 <a:cs typeface="Times New Roman"/>
               </a:rPr>
               <a:t> </a:t>
             </a:r>
             <a:r>
-              <a:rPr lang="en-US" sz="2400" b="1" dirty="0">
-                <a:latin typeface="Times New Roman"/>
+              <a:rPr lang="en-US" sz="2000" b="1" dirty="0">
+                <a:latin typeface="Georgia" panose="02040502050405020303" pitchFamily="18" charset="0"/>
                 <a:cs typeface="Times New Roman"/>
               </a:rPr>
               <a:t>Computer</a:t>
             </a:r>
             <a:r>
-              <a:rPr lang="en-US" sz="2400" b="1" spc="-85" dirty="0">
-                <a:latin typeface="Times New Roman"/>
+              <a:rPr lang="en-US" sz="2000" b="1" spc="-85" dirty="0">
+                <a:latin typeface="Georgia" panose="02040502050405020303" pitchFamily="18" charset="0"/>
                 <a:cs typeface="Times New Roman"/>
               </a:rPr>
               <a:t> </a:t>
             </a:r>
             <a:r>
-              <a:rPr lang="en-US" sz="2400" b="1" dirty="0">
-                <a:latin typeface="Times New Roman"/>
+              <a:rPr lang="en-US" sz="2000" b="1" dirty="0">
+                <a:latin typeface="Georgia" panose="02040502050405020303" pitchFamily="18" charset="0"/>
                 <a:cs typeface="Times New Roman"/>
               </a:rPr>
               <a:t>Science</a:t>
             </a:r>
             <a:r>
-              <a:rPr lang="en-US" sz="2400" b="1" spc="-80" dirty="0">
-                <a:latin typeface="Times New Roman"/>
+              <a:rPr lang="en-US" sz="2000" b="1" spc="-80" dirty="0">
+                <a:latin typeface="Georgia" panose="02040502050405020303" pitchFamily="18" charset="0"/>
                 <a:cs typeface="Times New Roman"/>
               </a:rPr>
               <a:t> </a:t>
             </a:r>
             <a:r>
-              <a:rPr lang="en-US" sz="2400" b="1" dirty="0">
-                <a:latin typeface="Times New Roman"/>
+              <a:rPr lang="en-US" sz="2000" b="1" dirty="0">
+                <a:latin typeface="Georgia" panose="02040502050405020303" pitchFamily="18" charset="0"/>
                 <a:cs typeface="Times New Roman"/>
               </a:rPr>
               <a:t>and</a:t>
             </a:r>
             <a:r>
-              <a:rPr lang="en-US" sz="2400" b="1" spc="-45" dirty="0">
-                <a:latin typeface="Times New Roman"/>
+              <a:rPr lang="en-US" sz="2000" b="1" spc="-45" dirty="0">
+                <a:latin typeface="Georgia" panose="02040502050405020303" pitchFamily="18" charset="0"/>
                 <a:cs typeface="Times New Roman"/>
               </a:rPr>
               <a:t> </a:t>
             </a:r>
             <a:r>
-              <a:rPr lang="en-US" sz="2400" b="1" spc="-10" dirty="0">
-                <a:latin typeface="Times New Roman"/>
+              <a:rPr lang="en-US" sz="2000" b="1" spc="-10" dirty="0">
+                <a:latin typeface="Georgia" panose="02040502050405020303" pitchFamily="18" charset="0"/>
                 <a:cs typeface="Times New Roman"/>
               </a:rPr>
               <a:t>Engineering</a:t>
             </a:r>
-            <a:endParaRPr lang="en-US" sz="2400" dirty="0">
-              <a:latin typeface="Times New Roman"/>
+            <a:endParaRPr lang="en-US" sz="2000" dirty="0">
+              <a:latin typeface="Georgia" panose="02040502050405020303" pitchFamily="18" charset="0"/>
               <a:cs typeface="Times New Roman"/>
             </a:endParaRPr>
           </a:p>
           <a:p>
-            <a:endParaRPr lang="en-IN" dirty="0"/>
+            <a:endParaRPr lang="en-IN" sz="2000" dirty="0">
+              <a:latin typeface="Georgia" panose="02040502050405020303" pitchFamily="18" charset="0"/>
+            </a:endParaRPr>
           </a:p>
         </p:txBody>
       </p:sp>
@@ -4504,7 +4409,7 @@
         </p:blipFill>
         <p:spPr>
           <a:xfrm>
-            <a:off x="10203026" y="584200"/>
+            <a:off x="5477673" y="2730246"/>
             <a:ext cx="1392936" cy="1397508"/>
           </a:xfrm>
           <a:prstGeom prst="rect">
@@ -4526,8 +4431,8 @@
         </p:nvSpPr>
         <p:spPr>
           <a:xfrm>
-            <a:off x="932801" y="2630278"/>
-            <a:ext cx="8455263" cy="1292662"/>
+            <a:off x="1946510" y="1513541"/>
+            <a:ext cx="8455263" cy="1200329"/>
           </a:xfrm>
           <a:prstGeom prst="rect">
             <a:avLst/>
@@ -4542,8 +4447,8 @@
           <a:p>
             <a:pPr algn="ctr"/>
             <a:r>
-              <a:rPr lang="en-US" sz="2000" b="1" dirty="0">
-                <a:latin typeface="Times New Roman" panose="02020603050405020304" pitchFamily="18" charset="0"/>
+              <a:rPr lang="en-US" b="1" dirty="0">
+                <a:latin typeface="Georgia" panose="02040502050405020303" pitchFamily="18" charset="0"/>
                 <a:cs typeface="Times New Roman" panose="02020603050405020304" pitchFamily="18" charset="0"/>
               </a:rPr>
               <a:t>MAJOR PROJECT PRESENTATION </a:t>
@@ -4552,26 +4457,28 @@
           <a:p>
             <a:pPr algn="ctr"/>
             <a:r>
-              <a:rPr lang="en-US" sz="2000" b="1" dirty="0">
-                <a:latin typeface="Times New Roman" panose="02020603050405020304" pitchFamily="18" charset="0"/>
+              <a:rPr lang="en-US" b="1" dirty="0">
+                <a:latin typeface="Georgia" panose="02040502050405020303" pitchFamily="18" charset="0"/>
                 <a:cs typeface="Times New Roman" panose="02020603050405020304" pitchFamily="18" charset="0"/>
               </a:rPr>
-              <a:t>TOPIC: COMPUTER VISION</a:t>
+              <a:t>ON</a:t>
             </a:r>
           </a:p>
           <a:p>
             <a:pPr algn="ctr"/>
             <a:r>
-              <a:rPr lang="en-US" sz="2000" b="1" dirty="0">
-                <a:latin typeface="Times New Roman" panose="02020603050405020304" pitchFamily="18" charset="0"/>
+              <a:rPr lang="en-US" b="1" dirty="0">
+                <a:latin typeface="Georgia" panose="02040502050405020303" pitchFamily="18" charset="0"/>
                 <a:cs typeface="Times New Roman" panose="02020603050405020304" pitchFamily="18" charset="0"/>
               </a:rPr>
-              <a:t>TITLE: AUTOMATIC LICENSE PLATE RECOGNITION SYSTEM</a:t>
+              <a:t>AUTOMATIC NUMBER PLATE RECOGNITION SYSTEM</a:t>
             </a:r>
           </a:p>
           <a:p>
             <a:pPr algn="ctr"/>
-            <a:endParaRPr lang="en-IN" dirty="0"/>
+            <a:endParaRPr lang="en-IN" sz="1600" dirty="0">
+              <a:latin typeface="Georgia" panose="02040502050405020303" pitchFamily="18" charset="0"/>
+            </a:endParaRPr>
           </a:p>
         </p:txBody>
       </p:sp>
@@ -4589,8 +4496,8 @@
         </p:nvSpPr>
         <p:spPr>
           <a:xfrm>
-            <a:off x="932801" y="4262482"/>
-            <a:ext cx="4457699" cy="2585323"/>
+            <a:off x="1088572" y="4272677"/>
+            <a:ext cx="4457699" cy="2339102"/>
           </a:xfrm>
           <a:prstGeom prst="rect">
             <a:avLst/>
@@ -4604,75 +4511,161 @@
           <a:lstStyle/>
           <a:p>
             <a:r>
-              <a:rPr lang="en-US" b="1" dirty="0">
+              <a:rPr lang="en-US" sz="1600" b="1" dirty="0">
+                <a:latin typeface="Georgia" panose="02040502050405020303" pitchFamily="18" charset="0"/>
+                <a:cs typeface="Times New Roman" panose="02020603050405020304" pitchFamily="18" charset="0"/>
+              </a:rPr>
+              <a:t>PRESENTED BY:</a:t>
+            </a:r>
+          </a:p>
+          <a:p>
+            <a:endParaRPr lang="en-US" sz="1600" b="1" dirty="0">
+              <a:latin typeface="Georgia" panose="02040502050405020303" pitchFamily="18" charset="0"/>
+              <a:cs typeface="Times New Roman" panose="02020603050405020304" pitchFamily="18" charset="0"/>
+            </a:endParaRPr>
+          </a:p>
+          <a:p>
+            <a:r>
+              <a:rPr lang="en-US" sz="1600" b="1" dirty="0">
+                <a:latin typeface="Georgia" panose="02040502050405020303" pitchFamily="18" charset="0"/>
+                <a:cs typeface="Times New Roman" panose="02020603050405020304" pitchFamily="18" charset="0"/>
+              </a:rPr>
+              <a:t>ARYAN                                  (</a:t>
+            </a:r>
+            <a:r>
+              <a:rPr lang="en-US" sz="1600" b="1" dirty="0">
                 <a:latin typeface="Times New Roman" panose="02020603050405020304" pitchFamily="18" charset="0"/>
                 <a:cs typeface="Times New Roman" panose="02020603050405020304" pitchFamily="18" charset="0"/>
               </a:rPr>
-              <a:t>PRESENTATION BY:</a:t>
-            </a:r>
-          </a:p>
-          <a:p>
-            <a:endParaRPr lang="en-US" b="1" dirty="0">
-              <a:latin typeface="Times New Roman" panose="02020603050405020304" pitchFamily="18" charset="0"/>
-              <a:cs typeface="Times New Roman" panose="02020603050405020304" pitchFamily="18" charset="0"/>
-            </a:endParaRPr>
-          </a:p>
-          <a:p>
-            <a:r>
-              <a:rPr lang="en-US" b="1" dirty="0">
+              <a:t>22103031</a:t>
+            </a:r>
+            <a:r>
+              <a:rPr lang="en-US" sz="1600" b="1" dirty="0">
+                <a:latin typeface="Georgia" panose="02040502050405020303" pitchFamily="18" charset="0"/>
+                <a:cs typeface="Times New Roman" panose="02020603050405020304" pitchFamily="18" charset="0"/>
+              </a:rPr>
+              <a:t>)</a:t>
+            </a:r>
+          </a:p>
+          <a:p>
+            <a:r>
+              <a:rPr lang="en-US" sz="1600" b="1" dirty="0">
+                <a:latin typeface="Georgia" panose="02040502050405020303" pitchFamily="18" charset="0"/>
+                <a:cs typeface="Times New Roman" panose="02020603050405020304" pitchFamily="18" charset="0"/>
+              </a:rPr>
+              <a:t>GANDLA SAI SHIVANI   (</a:t>
+            </a:r>
+            <a:r>
+              <a:rPr lang="en-US" sz="1600" b="1" dirty="0">
                 <a:latin typeface="Times New Roman" panose="02020603050405020304" pitchFamily="18" charset="0"/>
                 <a:cs typeface="Times New Roman" panose="02020603050405020304" pitchFamily="18" charset="0"/>
               </a:rPr>
-              <a:t>ARYAN                                (22103031)</a:t>
-            </a:r>
-          </a:p>
-          <a:p>
-            <a:r>
-              <a:rPr lang="en-US" b="1" dirty="0">
+              <a:t>22103054</a:t>
+            </a:r>
+            <a:r>
+              <a:rPr lang="en-US" sz="1600" b="1" dirty="0">
+                <a:latin typeface="Georgia" panose="02040502050405020303" pitchFamily="18" charset="0"/>
+                <a:cs typeface="Times New Roman" panose="02020603050405020304" pitchFamily="18" charset="0"/>
+              </a:rPr>
+              <a:t>)</a:t>
+            </a:r>
+          </a:p>
+          <a:p>
+            <a:r>
+              <a:rPr lang="en-US" sz="1600" b="1" dirty="0">
+                <a:latin typeface="Georgia" panose="02040502050405020303" pitchFamily="18" charset="0"/>
+                <a:cs typeface="Times New Roman" panose="02020603050405020304" pitchFamily="18" charset="0"/>
+              </a:rPr>
+              <a:t>UJALA GUPTA                   (</a:t>
+            </a:r>
+            <a:r>
+              <a:rPr lang="en-US" sz="1600" b="1" dirty="0">
                 <a:latin typeface="Times New Roman" panose="02020603050405020304" pitchFamily="18" charset="0"/>
                 <a:cs typeface="Times New Roman" panose="02020603050405020304" pitchFamily="18" charset="0"/>
               </a:rPr>
-              <a:t>GANDLA SAI SHIVANI   (22103054)</a:t>
-            </a:r>
-          </a:p>
-          <a:p>
-            <a:r>
-              <a:rPr lang="en-US" b="1" dirty="0">
+              <a:t>22103155</a:t>
+            </a:r>
+            <a:r>
+              <a:rPr lang="en-US" sz="1600" b="1" dirty="0">
+                <a:latin typeface="Georgia" panose="02040502050405020303" pitchFamily="18" charset="0"/>
+                <a:cs typeface="Times New Roman" panose="02020603050405020304" pitchFamily="18" charset="0"/>
+              </a:rPr>
+              <a:t>)</a:t>
+            </a:r>
+          </a:p>
+          <a:p>
+            <a:r>
+              <a:rPr lang="en-US" sz="1600" b="1" dirty="0">
+                <a:latin typeface="Georgia" panose="02040502050405020303" pitchFamily="18" charset="0"/>
+                <a:cs typeface="Times New Roman" panose="02020603050405020304" pitchFamily="18" charset="0"/>
+              </a:rPr>
+              <a:t>AYUSH RAJ                         (</a:t>
+            </a:r>
+            <a:r>
+              <a:rPr lang="en-US" sz="1600" b="1" dirty="0">
                 <a:latin typeface="Times New Roman" panose="02020603050405020304" pitchFamily="18" charset="0"/>
                 <a:cs typeface="Times New Roman" panose="02020603050405020304" pitchFamily="18" charset="0"/>
               </a:rPr>
-              <a:t>UJALA GUPTA                  (22103155)</a:t>
-            </a:r>
-          </a:p>
-          <a:p>
-            <a:r>
-              <a:rPr lang="en-US" b="1" dirty="0">
+              <a:t>22103035</a:t>
+            </a:r>
+            <a:r>
+              <a:rPr lang="en-US" sz="1600" b="1" dirty="0">
+                <a:latin typeface="Georgia" panose="02040502050405020303" pitchFamily="18" charset="0"/>
+                <a:cs typeface="Times New Roman" panose="02020603050405020304" pitchFamily="18" charset="0"/>
+              </a:rPr>
+              <a:t>)</a:t>
+            </a:r>
+          </a:p>
+          <a:p>
+            <a:r>
+              <a:rPr lang="en-US" sz="1600" b="1" dirty="0">
+                <a:latin typeface="Georgia" panose="02040502050405020303" pitchFamily="18" charset="0"/>
+                <a:cs typeface="Times New Roman" panose="02020603050405020304" pitchFamily="18" charset="0"/>
+              </a:rPr>
+              <a:t>YUVRAJ SINGH	              (</a:t>
+            </a:r>
+            <a:r>
+              <a:rPr lang="en-US" sz="1600" b="1" dirty="0">
                 <a:latin typeface="Times New Roman" panose="02020603050405020304" pitchFamily="18" charset="0"/>
                 <a:cs typeface="Times New Roman" panose="02020603050405020304" pitchFamily="18" charset="0"/>
               </a:rPr>
-              <a:t>AYUSH RAJ                       (22103035)</a:t>
-            </a:r>
-          </a:p>
-          <a:p>
-            <a:r>
-              <a:rPr lang="en-US" b="1" dirty="0">
+              <a:t>22103166</a:t>
+            </a:r>
+            <a:r>
+              <a:rPr lang="en-US" sz="1600" b="1" dirty="0">
+                <a:latin typeface="Georgia" panose="02040502050405020303" pitchFamily="18" charset="0"/>
+                <a:cs typeface="Times New Roman" panose="02020603050405020304" pitchFamily="18" charset="0"/>
+              </a:rPr>
+              <a:t>)</a:t>
+            </a:r>
+          </a:p>
+          <a:p>
+            <a:r>
+              <a:rPr lang="en-US" sz="1600" b="1" dirty="0">
+                <a:latin typeface="Georgia" panose="02040502050405020303" pitchFamily="18" charset="0"/>
+                <a:cs typeface="Times New Roman" panose="02020603050405020304" pitchFamily="18" charset="0"/>
+              </a:rPr>
+              <a:t>ARSHIT		              (</a:t>
+            </a:r>
+            <a:r>
+              <a:rPr lang="en-US" sz="1600" b="1" dirty="0">
                 <a:latin typeface="Times New Roman" panose="02020603050405020304" pitchFamily="18" charset="0"/>
                 <a:cs typeface="Times New Roman" panose="02020603050405020304" pitchFamily="18" charset="0"/>
               </a:rPr>
-              <a:t>YUVRAJ SINGH	             (22103166)</a:t>
-            </a:r>
-          </a:p>
-          <a:p>
-            <a:r>
-              <a:rPr lang="en-US" b="1" dirty="0">
-                <a:latin typeface="Times New Roman" panose="02020603050405020304" pitchFamily="18" charset="0"/>
+              <a:t>22103028</a:t>
+            </a:r>
+            <a:r>
+              <a:rPr lang="en-US" sz="1600" b="1" dirty="0">
+                <a:latin typeface="Georgia" panose="02040502050405020303" pitchFamily="18" charset="0"/>
                 <a:cs typeface="Times New Roman" panose="02020603050405020304" pitchFamily="18" charset="0"/>
               </a:rPr>
-              <a:t>ARSHIT		             (22103028)</a:t>
-            </a:r>
-          </a:p>
-          <a:p>
-            <a:endParaRPr lang="en-IN" dirty="0"/>
+              <a:t>)</a:t>
+            </a:r>
+          </a:p>
+          <a:p>
+            <a:endParaRPr lang="en-IN" sz="1600" dirty="0">
+              <a:latin typeface="Georgia" panose="02040502050405020303" pitchFamily="18" charset="0"/>
+            </a:endParaRPr>
           </a:p>
         </p:txBody>
       </p:sp>
@@ -4690,8 +4683,8 @@
         </p:nvSpPr>
         <p:spPr>
           <a:xfrm>
-            <a:off x="6468532" y="4216315"/>
-            <a:ext cx="3513668" cy="1200329"/>
+            <a:off x="7336279" y="4272677"/>
+            <a:ext cx="3767149" cy="1323439"/>
           </a:xfrm>
           <a:prstGeom prst="rect">
             <a:avLst/>
@@ -4705,34 +4698,45 @@
           <a:lstStyle/>
           <a:p>
             <a:r>
-              <a:rPr lang="en-US" b="1" dirty="0">
-                <a:latin typeface="Times New Roman" panose="02020603050405020304" pitchFamily="18" charset="0"/>
+              <a:rPr lang="en-US" sz="1600" b="1" dirty="0">
+                <a:latin typeface="Georgia" panose="02040502050405020303" pitchFamily="18" charset="0"/>
                 <a:cs typeface="Times New Roman" panose="02020603050405020304" pitchFamily="18" charset="0"/>
               </a:rPr>
-              <a:t>UNDER THE GUIDANCE OF:</a:t>
+              <a:t>UNDER THE SUPERVISION OF:</a:t>
             </a:r>
           </a:p>
           <a:p>
             <a:br>
-              <a:rPr lang="en-US" b="1" dirty="0">
-                <a:latin typeface="Times New Roman" panose="02020603050405020304" pitchFamily="18" charset="0"/>
+              <a:rPr lang="en-US" sz="1600" b="1" dirty="0">
+                <a:latin typeface="Georgia" panose="02040502050405020303" pitchFamily="18" charset="0"/>
                 <a:cs typeface="Times New Roman" panose="02020603050405020304" pitchFamily="18" charset="0"/>
               </a:rPr>
             </a:br>
             <a:r>
-              <a:rPr lang="en-US" b="1" dirty="0">
-                <a:latin typeface="Times New Roman" panose="02020603050405020304" pitchFamily="18" charset="0"/>
+              <a:rPr lang="en-US" sz="1600" b="1" dirty="0">
+                <a:latin typeface="Georgia" panose="02040502050405020303" pitchFamily="18" charset="0"/>
                 <a:cs typeface="Times New Roman" panose="02020603050405020304" pitchFamily="18" charset="0"/>
               </a:rPr>
-              <a:t>DR RENU DHIR</a:t>
-            </a:r>
-            <a:endParaRPr lang="en-IN" b="1" dirty="0">
-              <a:latin typeface="Times New Roman" panose="02020603050405020304" pitchFamily="18" charset="0"/>
+              <a:t>DR. RENU DHIR</a:t>
+            </a:r>
+          </a:p>
+          <a:p>
+            <a:r>
+              <a:rPr lang="en-US" sz="1600" b="1" dirty="0">
+                <a:latin typeface="Georgia" panose="02040502050405020303" pitchFamily="18" charset="0"/>
+                <a:cs typeface="Times New Roman" panose="02020603050405020304" pitchFamily="18" charset="0"/>
+              </a:rPr>
+              <a:t>PROFESSOR</a:t>
+            </a:r>
+            <a:endParaRPr lang="en-IN" sz="1600" b="1" dirty="0">
+              <a:latin typeface="Georgia" panose="02040502050405020303" pitchFamily="18" charset="0"/>
               <a:cs typeface="Times New Roman" panose="02020603050405020304" pitchFamily="18" charset="0"/>
             </a:endParaRPr>
           </a:p>
           <a:p>
-            <a:endParaRPr lang="en-IN" dirty="0"/>
+            <a:endParaRPr lang="en-IN" sz="1600" b="1" dirty="0">
+              <a:latin typeface="Georgia" panose="02040502050405020303" pitchFamily="18" charset="0"/>
+            </a:endParaRPr>
           </a:p>
         </p:txBody>
       </p:sp>
@@ -4800,7 +4804,7 @@
           <p:cNvPr id="2" name="Title 1">
             <a:extLst>
               <a:ext uri="{FF2B5EF4-FFF2-40B4-BE49-F238E27FC236}">
-                <a16:creationId xmlns:a16="http://schemas.microsoft.com/office/drawing/2014/main" id="{077A146F-D889-0BD8-8104-6161538368F6}"/>
+                <a16:creationId xmlns:a16="http://schemas.microsoft.com/office/drawing/2014/main" id="{1D8E0D88-DA0F-0D6B-97D2-1C4B2CAEC0A5}"/>
               </a:ext>
             </a:extLst>
           </p:cNvPr>
@@ -4813,8 +4817,8 @@
         </p:nvSpPr>
         <p:spPr>
           <a:xfrm>
-            <a:off x="-585784" y="210614"/>
-            <a:ext cx="13363565" cy="1259305"/>
+            <a:off x="903514" y="247841"/>
+            <a:ext cx="10515600" cy="1325563"/>
           </a:xfrm>
         </p:spPr>
         <p:txBody>
@@ -4825,114 +4829,601 @@
           <a:p>
             <a:pPr algn="ctr"/>
             <a:r>
-              <a:rPr lang="en-US" sz="3200" b="1" dirty="0">
-                <a:latin typeface="Times New Roman" panose="02020603050405020304" pitchFamily="18" charset="0"/>
-                <a:cs typeface="Times New Roman" panose="02020603050405020304" pitchFamily="18" charset="0"/>
-              </a:rPr>
-              <a:t>CHALLENGES IN REAL-TIME</a:t>
-            </a:r>
-            <a:endParaRPr lang="en-IN" sz="3200" b="1" dirty="0">
-              <a:latin typeface="Times New Roman" panose="02020603050405020304" pitchFamily="18" charset="0"/>
-              <a:cs typeface="Times New Roman" panose="02020603050405020304" pitchFamily="18" charset="0"/>
-            </a:endParaRPr>
-          </a:p>
-        </p:txBody>
-      </p:sp>
-      <p:sp>
-        <p:nvSpPr>
-          <p:cNvPr id="3" name="Content Placeholder 2">
-            <a:extLst>
-              <a:ext uri="{FF2B5EF4-FFF2-40B4-BE49-F238E27FC236}">
-                <a16:creationId xmlns:a16="http://schemas.microsoft.com/office/drawing/2014/main" id="{F0AE1337-5DAB-AB3A-38D1-AF661EB0AB6F}"/>
-              </a:ext>
-            </a:extLst>
-          </p:cNvPr>
-          <p:cNvSpPr>
-            <a:spLocks noGrp="1"/>
-          </p:cNvSpPr>
+              <a:rPr lang="en-IN" sz="3200" b="1" dirty="0">
+                <a:latin typeface="Georgia" panose="02040502050405020303" pitchFamily="18" charset="0"/>
+              </a:rPr>
+              <a:t>MODEL PERFORMANCE</a:t>
+            </a:r>
+          </a:p>
+        </p:txBody>
+      </p:sp>
+      <p:graphicFrame>
+        <p:nvGraphicFramePr>
+          <p:cNvPr id="5" name="Content Placeholder 4">
+            <a:extLst>
+              <a:ext uri="{FF2B5EF4-FFF2-40B4-BE49-F238E27FC236}">
+                <a16:creationId xmlns:a16="http://schemas.microsoft.com/office/drawing/2014/main" id="{1A9BEDAB-4AF0-985F-6511-780CD44BED0C}"/>
+              </a:ext>
+            </a:extLst>
+          </p:cNvPr>
+          <p:cNvGraphicFramePr>
+            <a:graphicFrameLocks noGrp="1"/>
+          </p:cNvGraphicFramePr>
           <p:nvPr>
             <p:ph idx="1"/>
+            <p:extLst>
+              <p:ext uri="{D42A27DB-BD31-4B8C-83A1-F6EECF244321}">
+                <p14:modId xmlns:p14="http://schemas.microsoft.com/office/powerpoint/2010/main" val="1852532736"/>
+              </p:ext>
+            </p:extLst>
           </p:nvPr>
-        </p:nvSpPr>
-        <p:spPr>
-          <a:xfrm>
-            <a:off x="1161412" y="1835685"/>
-            <a:ext cx="9869171" cy="4520665"/>
-          </a:xfrm>
-        </p:spPr>
-        <p:txBody>
-          <a:bodyPr>
-            <a:normAutofit/>
-          </a:bodyPr>
-          <a:lstStyle/>
-          <a:p>
-            <a:endParaRPr lang="en-US" sz="1800" dirty="0">
-              <a:latin typeface="Times New Roman" panose="02020603050405020304" pitchFamily="18" charset="0"/>
-              <a:cs typeface="Times New Roman" panose="02020603050405020304" pitchFamily="18" charset="0"/>
-            </a:endParaRPr>
-          </a:p>
-          <a:p>
-            <a:r>
-              <a:rPr lang="en-US" sz="1800" dirty="0">
-                <a:latin typeface="Times New Roman" panose="02020603050405020304" pitchFamily="18" charset="0"/>
-                <a:cs typeface="Times New Roman" panose="02020603050405020304" pitchFamily="18" charset="0"/>
-              </a:rPr>
-              <a:t>Difficulty detecting plates in low light or rainy conditions.</a:t>
-            </a:r>
-          </a:p>
-          <a:p>
-            <a:r>
-              <a:rPr lang="en-US" sz="1800" dirty="0">
-                <a:latin typeface="Times New Roman" panose="02020603050405020304" pitchFamily="18" charset="0"/>
-                <a:cs typeface="Times New Roman" panose="02020603050405020304" pitchFamily="18" charset="0"/>
-              </a:rPr>
-              <a:t>Motion blur in high-speed footage.</a:t>
-            </a:r>
-          </a:p>
-          <a:p>
-            <a:r>
-              <a:rPr lang="en-US" sz="1800" dirty="0">
-                <a:latin typeface="Times New Roman" panose="02020603050405020304" pitchFamily="18" charset="0"/>
-                <a:cs typeface="Times New Roman" panose="02020603050405020304" pitchFamily="18" charset="0"/>
-              </a:rPr>
-              <a:t>New cars with no number plates yet.</a:t>
-            </a:r>
-          </a:p>
-          <a:p>
-            <a:r>
-              <a:rPr lang="en-US" sz="1800" dirty="0">
-                <a:latin typeface="Times New Roman" panose="02020603050405020304" pitchFamily="18" charset="0"/>
-                <a:cs typeface="Times New Roman" panose="02020603050405020304" pitchFamily="18" charset="0"/>
-              </a:rPr>
-              <a:t>Non-standard plate formats and fonts(Illegal).</a:t>
-            </a:r>
-          </a:p>
-          <a:p>
-            <a:r>
-              <a:rPr lang="en-IN" sz="1800" dirty="0">
-                <a:latin typeface="Times New Roman" panose="02020603050405020304" pitchFamily="18" charset="0"/>
-                <a:cs typeface="Times New Roman" panose="02020603050405020304" pitchFamily="18" charset="0"/>
-              </a:rPr>
-              <a:t>OCR errors due to font variations. </a:t>
-            </a:r>
-          </a:p>
-          <a:p>
-            <a:r>
-              <a:rPr lang="en-US" sz="1800" dirty="0">
-                <a:latin typeface="Times New Roman" panose="02020603050405020304" pitchFamily="18" charset="0"/>
-                <a:cs typeface="Times New Roman" panose="02020603050405020304" pitchFamily="18" charset="0"/>
-              </a:rPr>
-              <a:t>GPU memory limitations during training.</a:t>
-            </a:r>
-          </a:p>
-        </p:txBody>
-      </p:sp>
+        </p:nvGraphicFramePr>
+        <p:xfrm>
+          <a:off x="1196650" y="1926186"/>
+          <a:ext cx="9798700" cy="3005628"/>
+        </p:xfrm>
+        <a:graphic>
+          <a:graphicData uri="http://schemas.openxmlformats.org/drawingml/2006/table">
+            <a:tbl>
+              <a:tblPr firstRow="1" bandRow="1">
+                <a:tableStyleId>{8799B23B-EC83-4686-B30A-512413B5E67A}</a:tableStyleId>
+              </a:tblPr>
+              <a:tblGrid>
+                <a:gridCol w="2449675">
+                  <a:extLst>
+                    <a:ext uri="{9D8B030D-6E8A-4147-A177-3AD203B41FA5}">
+                      <a16:colId xmlns:a16="http://schemas.microsoft.com/office/drawing/2014/main" val="2901536089"/>
+                    </a:ext>
+                  </a:extLst>
+                </a:gridCol>
+                <a:gridCol w="2449675">
+                  <a:extLst>
+                    <a:ext uri="{9D8B030D-6E8A-4147-A177-3AD203B41FA5}">
+                      <a16:colId xmlns:a16="http://schemas.microsoft.com/office/drawing/2014/main" val="1489604000"/>
+                    </a:ext>
+                  </a:extLst>
+                </a:gridCol>
+                <a:gridCol w="2449675">
+                  <a:extLst>
+                    <a:ext uri="{9D8B030D-6E8A-4147-A177-3AD203B41FA5}">
+                      <a16:colId xmlns:a16="http://schemas.microsoft.com/office/drawing/2014/main" val="2931295395"/>
+                    </a:ext>
+                  </a:extLst>
+                </a:gridCol>
+                <a:gridCol w="2449675">
+                  <a:extLst>
+                    <a:ext uri="{9D8B030D-6E8A-4147-A177-3AD203B41FA5}">
+                      <a16:colId xmlns:a16="http://schemas.microsoft.com/office/drawing/2014/main" val="1344216505"/>
+                    </a:ext>
+                  </a:extLst>
+                </a:gridCol>
+              </a:tblGrid>
+              <a:tr h="459651">
+                <a:tc>
+                  <a:txBody>
+                    <a:bodyPr/>
+                    <a:lstStyle/>
+                    <a:p>
+                      <a:r>
+                        <a:rPr lang="en-IN" sz="1600" dirty="0">
+                          <a:latin typeface="Georgia" panose="02040502050405020303" pitchFamily="18" charset="0"/>
+                        </a:rPr>
+                        <a:t>Model</a:t>
+                      </a:r>
+                    </a:p>
+                  </a:txBody>
+                  <a:tcPr anchor="ctr"/>
+                </a:tc>
+                <a:tc>
+                  <a:txBody>
+                    <a:bodyPr/>
+                    <a:lstStyle/>
+                    <a:p>
+                      <a:r>
+                        <a:rPr lang="en-US" sz="1600" dirty="0">
+                          <a:latin typeface="Georgia" panose="02040502050405020303" pitchFamily="18" charset="0"/>
+                        </a:rPr>
+                        <a:t>YOLOv8 + EasyOCR</a:t>
+                      </a:r>
+                    </a:p>
+                    <a:p>
+                      <a:r>
+                        <a:rPr lang="en-US" sz="1600" dirty="0">
+                          <a:latin typeface="Georgia" panose="02040502050405020303" pitchFamily="18" charset="0"/>
+                        </a:rPr>
+                        <a:t>(proposed solution)</a:t>
+                      </a:r>
+                      <a:endParaRPr lang="en-IN" sz="1600" dirty="0">
+                        <a:latin typeface="Georgia" panose="02040502050405020303" pitchFamily="18" charset="0"/>
+                      </a:endParaRPr>
+                    </a:p>
+                  </a:txBody>
+                  <a:tcPr anchor="ctr"/>
+                </a:tc>
+                <a:tc>
+                  <a:txBody>
+                    <a:bodyPr/>
+                    <a:lstStyle/>
+                    <a:p>
+                      <a:r>
+                        <a:rPr lang="en-IN" sz="1600" dirty="0">
+                          <a:latin typeface="Georgia" panose="02040502050405020303" pitchFamily="18" charset="0"/>
+                        </a:rPr>
+                        <a:t>WPOD-NET + OCR</a:t>
+                      </a:r>
+                    </a:p>
+                  </a:txBody>
+                  <a:tcPr anchor="ctr"/>
+                </a:tc>
+                <a:tc>
+                  <a:txBody>
+                    <a:bodyPr/>
+                    <a:lstStyle/>
+                    <a:p>
+                      <a:r>
+                        <a:rPr lang="en-IN" sz="1600" dirty="0">
+                          <a:latin typeface="Georgia" panose="02040502050405020303" pitchFamily="18" charset="0"/>
+                        </a:rPr>
+                        <a:t>YOLOv8 ALPR</a:t>
+                      </a:r>
+                    </a:p>
+                  </a:txBody>
+                  <a:tcPr anchor="ctr"/>
+                </a:tc>
+                <a:extLst>
+                  <a:ext uri="{0D108BD9-81ED-4DB2-BD59-A6C34878D82A}">
+                    <a16:rowId xmlns:a16="http://schemas.microsoft.com/office/drawing/2014/main" val="2633849674"/>
+                  </a:ext>
+                </a:extLst>
+              </a:tr>
+              <a:tr h="404418">
+                <a:tc>
+                  <a:txBody>
+                    <a:bodyPr/>
+                    <a:lstStyle/>
+                    <a:p>
+                      <a:r>
+                        <a:rPr lang="en-IN" sz="1600" dirty="0">
+                          <a:latin typeface="Georgia" panose="02040502050405020303" pitchFamily="18" charset="0"/>
+                        </a:rPr>
+                        <a:t>Precision</a:t>
+                      </a:r>
+                    </a:p>
+                  </a:txBody>
+                  <a:tcPr anchor="ctr"/>
+                </a:tc>
+                <a:tc>
+                  <a:txBody>
+                    <a:bodyPr/>
+                    <a:lstStyle/>
+                    <a:p>
+                      <a:r>
+                        <a:rPr lang="en-IN" sz="1600" dirty="0">
+                          <a:latin typeface="Georgia" panose="02040502050405020303" pitchFamily="18" charset="0"/>
+                        </a:rPr>
+                        <a:t>0.97</a:t>
+                      </a:r>
+                    </a:p>
+                  </a:txBody>
+                  <a:tcPr anchor="ctr"/>
+                </a:tc>
+                <a:tc>
+                  <a:txBody>
+                    <a:bodyPr/>
+                    <a:lstStyle/>
+                    <a:p>
+                      <a:r>
+                        <a:rPr lang="en-US" sz="1600" dirty="0">
+                          <a:latin typeface="Georgia" panose="02040502050405020303" pitchFamily="18" charset="0"/>
+                        </a:rPr>
+                        <a:t>0.751</a:t>
+                      </a:r>
+                      <a:endParaRPr lang="en-IN" sz="1600" dirty="0">
+                        <a:latin typeface="Georgia" panose="02040502050405020303" pitchFamily="18" charset="0"/>
+                      </a:endParaRPr>
+                    </a:p>
+                  </a:txBody>
+                  <a:tcPr anchor="ctr"/>
+                </a:tc>
+                <a:tc>
+                  <a:txBody>
+                    <a:bodyPr/>
+                    <a:lstStyle/>
+                    <a:p>
+                      <a:r>
+                        <a:rPr lang="en-US" sz="1600" dirty="0">
+                          <a:latin typeface="Georgia" panose="02040502050405020303" pitchFamily="18" charset="0"/>
+                        </a:rPr>
+                        <a:t>0.984</a:t>
+                      </a:r>
+                      <a:endParaRPr lang="en-IN" sz="1600" dirty="0">
+                        <a:latin typeface="Georgia" panose="02040502050405020303" pitchFamily="18" charset="0"/>
+                      </a:endParaRPr>
+                    </a:p>
+                  </a:txBody>
+                  <a:tcPr anchor="ctr"/>
+                </a:tc>
+                <a:extLst>
+                  <a:ext uri="{0D108BD9-81ED-4DB2-BD59-A6C34878D82A}">
+                    <a16:rowId xmlns:a16="http://schemas.microsoft.com/office/drawing/2014/main" val="2642065691"/>
+                  </a:ext>
+                </a:extLst>
+              </a:tr>
+              <a:tr h="404418">
+                <a:tc>
+                  <a:txBody>
+                    <a:bodyPr/>
+                    <a:lstStyle/>
+                    <a:p>
+                      <a:r>
+                        <a:rPr lang="en-IN" sz="1600" dirty="0">
+                          <a:latin typeface="Georgia" panose="02040502050405020303" pitchFamily="18" charset="0"/>
+                        </a:rPr>
+                        <a:t>Recall</a:t>
+                      </a:r>
+                    </a:p>
+                  </a:txBody>
+                  <a:tcPr anchor="ctr"/>
+                </a:tc>
+                <a:tc>
+                  <a:txBody>
+                    <a:bodyPr/>
+                    <a:lstStyle/>
+                    <a:p>
+                      <a:r>
+                        <a:rPr lang="en-IN" sz="1600" dirty="0">
+                          <a:latin typeface="Georgia" panose="02040502050405020303" pitchFamily="18" charset="0"/>
+                        </a:rPr>
+                        <a:t>0.95</a:t>
+                      </a:r>
+                    </a:p>
+                  </a:txBody>
+                  <a:tcPr anchor="ctr"/>
+                </a:tc>
+                <a:tc>
+                  <a:txBody>
+                    <a:bodyPr/>
+                    <a:lstStyle/>
+                    <a:p>
+                      <a:r>
+                        <a:rPr lang="en-US" sz="1600" dirty="0">
+                          <a:latin typeface="Georgia" panose="02040502050405020303" pitchFamily="18" charset="0"/>
+                        </a:rPr>
+                        <a:t>0.796</a:t>
+                      </a:r>
+                      <a:endParaRPr lang="en-IN" sz="1600" dirty="0">
+                        <a:latin typeface="Georgia" panose="02040502050405020303" pitchFamily="18" charset="0"/>
+                      </a:endParaRPr>
+                    </a:p>
+                  </a:txBody>
+                  <a:tcPr anchor="ctr"/>
+                </a:tc>
+                <a:tc>
+                  <a:txBody>
+                    <a:bodyPr/>
+                    <a:lstStyle/>
+                    <a:p>
+                      <a:r>
+                        <a:rPr lang="en-US" sz="1600" dirty="0">
+                          <a:latin typeface="Georgia" panose="02040502050405020303" pitchFamily="18" charset="0"/>
+                        </a:rPr>
+                        <a:t>1.000</a:t>
+                      </a:r>
+                      <a:endParaRPr lang="en-IN" sz="1600" dirty="0">
+                        <a:latin typeface="Georgia" panose="02040502050405020303" pitchFamily="18" charset="0"/>
+                      </a:endParaRPr>
+                    </a:p>
+                  </a:txBody>
+                  <a:tcPr anchor="ctr"/>
+                </a:tc>
+                <a:extLst>
+                  <a:ext uri="{0D108BD9-81ED-4DB2-BD59-A6C34878D82A}">
+                    <a16:rowId xmlns:a16="http://schemas.microsoft.com/office/drawing/2014/main" val="1719143724"/>
+                  </a:ext>
+                </a:extLst>
+              </a:tr>
+              <a:tr h="404418">
+                <a:tc>
+                  <a:txBody>
+                    <a:bodyPr/>
+                    <a:lstStyle/>
+                    <a:p>
+                      <a:r>
+                        <a:rPr lang="en-US" sz="1600" dirty="0">
+                          <a:latin typeface="Georgia" panose="02040502050405020303" pitchFamily="18" charset="0"/>
+                        </a:rPr>
+                        <a:t>F1 Score</a:t>
+                      </a:r>
+                      <a:endParaRPr lang="en-IN" sz="1600" dirty="0">
+                        <a:latin typeface="Georgia" panose="02040502050405020303" pitchFamily="18" charset="0"/>
+                      </a:endParaRPr>
+                    </a:p>
+                  </a:txBody>
+                  <a:tcPr anchor="ctr"/>
+                </a:tc>
+                <a:tc>
+                  <a:txBody>
+                    <a:bodyPr/>
+                    <a:lstStyle/>
+                    <a:p>
+                      <a:r>
+                        <a:rPr lang="en-US" sz="1600" dirty="0">
+                          <a:latin typeface="Georgia" panose="02040502050405020303" pitchFamily="18" charset="0"/>
+                        </a:rPr>
+                        <a:t>0.96</a:t>
+                      </a:r>
+                      <a:endParaRPr lang="en-IN" sz="1600" dirty="0">
+                        <a:latin typeface="Georgia" panose="02040502050405020303" pitchFamily="18" charset="0"/>
+                      </a:endParaRPr>
+                    </a:p>
+                  </a:txBody>
+                  <a:tcPr anchor="ctr"/>
+                </a:tc>
+                <a:tc>
+                  <a:txBody>
+                    <a:bodyPr/>
+                    <a:lstStyle/>
+                    <a:p>
+                      <a:r>
+                        <a:rPr lang="en-US" sz="1600" dirty="0">
+                          <a:latin typeface="Georgia" panose="02040502050405020303" pitchFamily="18" charset="0"/>
+                        </a:rPr>
+                        <a:t>0.796</a:t>
+                      </a:r>
+                      <a:endParaRPr lang="en-IN" sz="1600" dirty="0">
+                        <a:latin typeface="Georgia" panose="02040502050405020303" pitchFamily="18" charset="0"/>
+                      </a:endParaRPr>
+                    </a:p>
+                  </a:txBody>
+                  <a:tcPr anchor="ctr"/>
+                </a:tc>
+                <a:tc>
+                  <a:txBody>
+                    <a:bodyPr/>
+                    <a:lstStyle/>
+                    <a:p>
+                      <a:r>
+                        <a:rPr lang="en-US" sz="1600" dirty="0">
+                          <a:latin typeface="Georgia" panose="02040502050405020303" pitchFamily="18" charset="0"/>
+                        </a:rPr>
+                        <a:t>0.992</a:t>
+                      </a:r>
+                      <a:endParaRPr lang="en-IN" sz="1600" dirty="0">
+                        <a:latin typeface="Georgia" panose="02040502050405020303" pitchFamily="18" charset="0"/>
+                      </a:endParaRPr>
+                    </a:p>
+                  </a:txBody>
+                  <a:tcPr anchor="ctr"/>
+                </a:tc>
+                <a:extLst>
+                  <a:ext uri="{0D108BD9-81ED-4DB2-BD59-A6C34878D82A}">
+                    <a16:rowId xmlns:a16="http://schemas.microsoft.com/office/drawing/2014/main" val="2114847472"/>
+                  </a:ext>
+                </a:extLst>
+              </a:tr>
+              <a:tr h="404418">
+                <a:tc>
+                  <a:txBody>
+                    <a:bodyPr/>
+                    <a:lstStyle/>
+                    <a:p>
+                      <a:r>
+                        <a:rPr lang="en-IN" sz="1600" dirty="0">
+                          <a:latin typeface="Georgia" panose="02040502050405020303" pitchFamily="18" charset="0"/>
+                        </a:rPr>
+                        <a:t>mAP@50</a:t>
+                      </a:r>
+                    </a:p>
+                  </a:txBody>
+                  <a:tcPr anchor="ctr"/>
+                </a:tc>
+                <a:tc>
+                  <a:txBody>
+                    <a:bodyPr/>
+                    <a:lstStyle/>
+                    <a:p>
+                      <a:r>
+                        <a:rPr lang="en-IN" sz="1600" dirty="0">
+                          <a:latin typeface="Georgia" panose="02040502050405020303" pitchFamily="18" charset="0"/>
+                        </a:rPr>
+                        <a:t>0.99</a:t>
+                      </a:r>
+                    </a:p>
+                  </a:txBody>
+                  <a:tcPr anchor="ctr"/>
+                </a:tc>
+                <a:tc>
+                  <a:txBody>
+                    <a:bodyPr/>
+                    <a:lstStyle/>
+                    <a:p>
+                      <a:r>
+                        <a:rPr lang="en-US" sz="1600" dirty="0">
+                          <a:latin typeface="Georgia" panose="02040502050405020303" pitchFamily="18" charset="0"/>
+                        </a:rPr>
+                        <a:t>0.78</a:t>
+                      </a:r>
+                      <a:endParaRPr lang="en-IN" sz="1600" dirty="0">
+                        <a:latin typeface="Georgia" panose="02040502050405020303" pitchFamily="18" charset="0"/>
+                      </a:endParaRPr>
+                    </a:p>
+                  </a:txBody>
+                  <a:tcPr anchor="ctr"/>
+                </a:tc>
+                <a:tc>
+                  <a:txBody>
+                    <a:bodyPr/>
+                    <a:lstStyle/>
+                    <a:p>
+                      <a:r>
+                        <a:rPr lang="en-IN" sz="1600" dirty="0">
+                          <a:latin typeface="Georgia" panose="02040502050405020303" pitchFamily="18" charset="0"/>
+                        </a:rPr>
+                        <a:t>0.992</a:t>
+                      </a:r>
+                    </a:p>
+                  </a:txBody>
+                  <a:tcPr anchor="ctr"/>
+                </a:tc>
+                <a:extLst>
+                  <a:ext uri="{0D108BD9-81ED-4DB2-BD59-A6C34878D82A}">
+                    <a16:rowId xmlns:a16="http://schemas.microsoft.com/office/drawing/2014/main" val="212021323"/>
+                  </a:ext>
+                </a:extLst>
+              </a:tr>
+              <a:tr h="404418">
+                <a:tc>
+                  <a:txBody>
+                    <a:bodyPr/>
+                    <a:lstStyle/>
+                    <a:p>
+                      <a:r>
+                        <a:rPr lang="en-IN" sz="1600" dirty="0">
+                          <a:latin typeface="Georgia" panose="02040502050405020303" pitchFamily="18" charset="0"/>
+                        </a:rPr>
+                        <a:t>mAP@50-95</a:t>
+                      </a:r>
+                    </a:p>
+                  </a:txBody>
+                  <a:tcPr anchor="ctr"/>
+                </a:tc>
+                <a:tc>
+                  <a:txBody>
+                    <a:bodyPr/>
+                    <a:lstStyle/>
+                    <a:p>
+                      <a:r>
+                        <a:rPr lang="en-IN" sz="1600" dirty="0">
+                          <a:latin typeface="Georgia" panose="02040502050405020303" pitchFamily="18" charset="0"/>
+                        </a:rPr>
+                        <a:t>~0.82</a:t>
+                      </a:r>
+                    </a:p>
+                  </a:txBody>
+                  <a:tcPr anchor="ctr"/>
+                </a:tc>
+                <a:tc>
+                  <a:txBody>
+                    <a:bodyPr/>
+                    <a:lstStyle/>
+                    <a:p>
+                      <a:r>
+                        <a:rPr lang="en-US" sz="1600" dirty="0">
+                          <a:latin typeface="Georgia" panose="02040502050405020303" pitchFamily="18" charset="0"/>
+                        </a:rPr>
+                        <a:t>0.50</a:t>
+                      </a:r>
+                      <a:endParaRPr lang="en-IN" sz="1600" dirty="0">
+                        <a:latin typeface="Georgia" panose="02040502050405020303" pitchFamily="18" charset="0"/>
+                      </a:endParaRPr>
+                    </a:p>
+                  </a:txBody>
+                  <a:tcPr anchor="ctr"/>
+                </a:tc>
+                <a:tc>
+                  <a:txBody>
+                    <a:bodyPr/>
+                    <a:lstStyle/>
+                    <a:p>
+                      <a:r>
+                        <a:rPr lang="en-IN" sz="1600" dirty="0">
+                          <a:latin typeface="Georgia" panose="02040502050405020303" pitchFamily="18" charset="0"/>
+                        </a:rPr>
+                        <a:t>0.995</a:t>
+                      </a:r>
+                    </a:p>
+                  </a:txBody>
+                  <a:tcPr anchor="ctr"/>
+                </a:tc>
+                <a:extLst>
+                  <a:ext uri="{0D108BD9-81ED-4DB2-BD59-A6C34878D82A}">
+                    <a16:rowId xmlns:a16="http://schemas.microsoft.com/office/drawing/2014/main" val="2555435838"/>
+                  </a:ext>
+                </a:extLst>
+              </a:tr>
+              <a:tr h="404418">
+                <a:tc>
+                  <a:txBody>
+                    <a:bodyPr/>
+                    <a:lstStyle/>
+                    <a:p>
+                      <a:r>
+                        <a:rPr lang="en-IN" sz="1600" dirty="0">
+                          <a:latin typeface="Georgia" panose="02040502050405020303" pitchFamily="18" charset="0"/>
+                        </a:rPr>
+                        <a:t>Inference Speed</a:t>
+                      </a:r>
+                    </a:p>
+                  </a:txBody>
+                  <a:tcPr anchor="ctr"/>
+                </a:tc>
+                <a:tc>
+                  <a:txBody>
+                    <a:bodyPr/>
+                    <a:lstStyle/>
+                    <a:p>
+                      <a:r>
+                        <a:rPr lang="en-IN" sz="1600" dirty="0">
+                          <a:latin typeface="Georgia" panose="02040502050405020303" pitchFamily="18" charset="0"/>
+                        </a:rPr>
+                        <a:t>~12 ms</a:t>
+                      </a:r>
+                    </a:p>
+                  </a:txBody>
+                  <a:tcPr anchor="ctr"/>
+                </a:tc>
+                <a:tc>
+                  <a:txBody>
+                    <a:bodyPr/>
+                    <a:lstStyle/>
+                    <a:p>
+                      <a:r>
+                        <a:rPr lang="en-US" sz="1600" dirty="0">
+                          <a:latin typeface="Georgia" panose="02040502050405020303" pitchFamily="18" charset="0"/>
+                        </a:rPr>
+                        <a:t>~35 ms</a:t>
+                      </a:r>
+                      <a:endParaRPr lang="en-IN" sz="1600" dirty="0">
+                        <a:latin typeface="Georgia" panose="02040502050405020303" pitchFamily="18" charset="0"/>
+                      </a:endParaRPr>
+                    </a:p>
+                  </a:txBody>
+                  <a:tcPr anchor="ctr"/>
+                </a:tc>
+                <a:tc>
+                  <a:txBody>
+                    <a:bodyPr/>
+                    <a:lstStyle/>
+                    <a:p>
+                      <a:r>
+                        <a:rPr lang="en-US" sz="1600" dirty="0">
+                          <a:latin typeface="Georgia" panose="02040502050405020303" pitchFamily="18" charset="0"/>
+                        </a:rPr>
+                        <a:t>~26ms</a:t>
+                      </a:r>
+                      <a:endParaRPr lang="en-IN" sz="1600" dirty="0">
+                        <a:latin typeface="Georgia" panose="02040502050405020303" pitchFamily="18" charset="0"/>
+                      </a:endParaRPr>
+                    </a:p>
+                  </a:txBody>
+                  <a:tcPr anchor="ctr"/>
+                </a:tc>
+                <a:extLst>
+                  <a:ext uri="{0D108BD9-81ED-4DB2-BD59-A6C34878D82A}">
+                    <a16:rowId xmlns:a16="http://schemas.microsoft.com/office/drawing/2014/main" val="1401972223"/>
+                  </a:ext>
+                </a:extLst>
+              </a:tr>
+            </a:tbl>
+          </a:graphicData>
+        </a:graphic>
+      </p:graphicFrame>
       <p:sp>
         <p:nvSpPr>
           <p:cNvPr id="4" name="Slide Number Placeholder 3">
             <a:extLst>
               <a:ext uri="{FF2B5EF4-FFF2-40B4-BE49-F238E27FC236}">
-                <a16:creationId xmlns:a16="http://schemas.microsoft.com/office/drawing/2014/main" id="{CD7232EF-97FC-28BF-539C-C6D1DE6B3032}"/>
+                <a16:creationId xmlns:a16="http://schemas.microsoft.com/office/drawing/2014/main" id="{2B8FAF09-EBC4-B87F-4FCE-B8BF1C46C770}"/>
               </a:ext>
             </a:extLst>
           </p:cNvPr>
@@ -4956,10 +5447,51 @@
           </a:p>
         </p:txBody>
       </p:sp>
+      <p:sp>
+        <p:nvSpPr>
+          <p:cNvPr id="8" name="TextBox 7">
+            <a:extLst>
+              <a:ext uri="{FF2B5EF4-FFF2-40B4-BE49-F238E27FC236}">
+                <a16:creationId xmlns:a16="http://schemas.microsoft.com/office/drawing/2014/main" id="{4730FED6-72B1-A92F-0C5A-9AA6813113C8}"/>
+              </a:ext>
+            </a:extLst>
+          </p:cNvPr>
+          <p:cNvSpPr txBox="1"/>
+          <p:nvPr/>
+        </p:nvSpPr>
+        <p:spPr>
+          <a:xfrm>
+            <a:off x="3047221" y="5093289"/>
+            <a:ext cx="6097554" cy="338554"/>
+          </a:xfrm>
+          <a:prstGeom prst="rect">
+            <a:avLst/>
+          </a:prstGeom>
+          <a:noFill/>
+        </p:spPr>
+        <p:txBody>
+          <a:bodyPr wrap="square">
+            <a:spAutoFit/>
+          </a:bodyPr>
+          <a:lstStyle/>
+          <a:p>
+            <a:pPr algn="ctr"/>
+            <a:r>
+              <a:rPr lang="en-US" sz="1600" dirty="0">
+                <a:latin typeface="Georgia" panose="02040502050405020303" pitchFamily="18" charset="0"/>
+              </a:rPr>
+              <a:t>Fig. 4 : Model Performance</a:t>
+            </a:r>
+            <a:endParaRPr lang="en-IN" sz="1600" dirty="0">
+              <a:latin typeface="Georgia" panose="02040502050405020303" pitchFamily="18" charset="0"/>
+            </a:endParaRPr>
+          </a:p>
+        </p:txBody>
+      </p:sp>
     </p:spTree>
     <p:extLst>
       <p:ext uri="{BB962C8B-B14F-4D97-AF65-F5344CB8AC3E}">
-        <p14:creationId xmlns:p14="http://schemas.microsoft.com/office/powerpoint/2010/main" val="1076266199"/>
+        <p14:creationId xmlns:p14="http://schemas.microsoft.com/office/powerpoint/2010/main" val="985528072"/>
       </p:ext>
     </p:extLst>
   </p:cSld>
@@ -4991,7 +5523,7 @@
           <p:cNvPr id="2" name="Title 1">
             <a:extLst>
               <a:ext uri="{FF2B5EF4-FFF2-40B4-BE49-F238E27FC236}">
-                <a16:creationId xmlns:a16="http://schemas.microsoft.com/office/drawing/2014/main" id="{48E33823-9FCF-F31A-FBF0-988475B83F73}"/>
+                <a16:creationId xmlns:a16="http://schemas.microsoft.com/office/drawing/2014/main" id="{DF477889-2EEB-CB8F-B111-5DEBA96E7B66}"/>
               </a:ext>
             </a:extLst>
           </p:cNvPr>
@@ -5004,8 +5536,8 @@
         </p:nvSpPr>
         <p:spPr>
           <a:xfrm>
-            <a:off x="419099" y="136525"/>
-            <a:ext cx="11353800" cy="1750846"/>
+            <a:off x="755063" y="136525"/>
+            <a:ext cx="10515600" cy="1325563"/>
           </a:xfrm>
         </p:spPr>
         <p:txBody>
@@ -5017,14 +5549,12 @@
             <a:pPr algn="ctr"/>
             <a:r>
               <a:rPr lang="en-US" sz="3200" b="1" dirty="0">
-                <a:latin typeface="Times New Roman" panose="02020603050405020304" pitchFamily="18" charset="0"/>
-                <a:cs typeface="Times New Roman" panose="02020603050405020304" pitchFamily="18" charset="0"/>
-              </a:rPr>
-              <a:t>FUTURE SCOPE AND EXPANSION POSSIBILITES</a:t>
+                <a:latin typeface="Georgia" panose="02040502050405020303" pitchFamily="18" charset="0"/>
+              </a:rPr>
+              <a:t>RESULT</a:t>
             </a:r>
             <a:endParaRPr lang="en-IN" sz="3200" b="1" dirty="0">
-              <a:latin typeface="Times New Roman" panose="02020603050405020304" pitchFamily="18" charset="0"/>
-              <a:cs typeface="Times New Roman" panose="02020603050405020304" pitchFamily="18" charset="0"/>
+              <a:latin typeface="Georgia" panose="02040502050405020303" pitchFamily="18" charset="0"/>
             </a:endParaRPr>
           </a:p>
         </p:txBody>
@@ -5034,7 +5564,7 @@
           <p:cNvPr id="4" name="Slide Number Placeholder 3">
             <a:extLst>
               <a:ext uri="{FF2B5EF4-FFF2-40B4-BE49-F238E27FC236}">
-                <a16:creationId xmlns:a16="http://schemas.microsoft.com/office/drawing/2014/main" id="{72D1AD6F-37A5-ED21-2C10-07277C4DE602}"/>
+                <a16:creationId xmlns:a16="http://schemas.microsoft.com/office/drawing/2014/main" id="{ACBB2A02-0C60-E482-3F53-ECE4359D2D32}"/>
               </a:ext>
             </a:extLst>
           </p:cNvPr>
@@ -5060,190 +5590,142 @@
       </p:sp>
       <p:sp>
         <p:nvSpPr>
-          <p:cNvPr id="6" name="Rectangle 2">
-            <a:extLst>
-              <a:ext uri="{FF2B5EF4-FFF2-40B4-BE49-F238E27FC236}">
-                <a16:creationId xmlns:a16="http://schemas.microsoft.com/office/drawing/2014/main" id="{539A2A0A-B089-3699-E77F-FEBCB2541029}"/>
-              </a:ext>
-            </a:extLst>
-          </p:cNvPr>
-          <p:cNvSpPr>
-            <a:spLocks noGrp="1" noChangeArrowheads="1"/>
-          </p:cNvSpPr>
-          <p:nvPr>
-            <p:ph idx="1"/>
-          </p:nvPr>
-        </p:nvSpPr>
-        <p:spPr bwMode="auto">
+          <p:cNvPr id="7" name="TextBox 6">
+            <a:extLst>
+              <a:ext uri="{FF2B5EF4-FFF2-40B4-BE49-F238E27FC236}">
+                <a16:creationId xmlns:a16="http://schemas.microsoft.com/office/drawing/2014/main" id="{1DA53F3F-EB90-2886-0994-C013FE356B63}"/>
+              </a:ext>
+            </a:extLst>
+          </p:cNvPr>
+          <p:cNvSpPr txBox="1"/>
+          <p:nvPr/>
+        </p:nvSpPr>
+        <p:spPr>
           <a:xfrm>
-            <a:off x="1365339" y="1942094"/>
-            <a:ext cx="9461321" cy="2120068"/>
+            <a:off x="1502229" y="5654351"/>
+            <a:ext cx="3573624" cy="338554"/>
           </a:xfrm>
           <a:prstGeom prst="rect">
             <a:avLst/>
           </a:prstGeom>
           <a:noFill/>
-          <a:ln>
-            <a:noFill/>
-          </a:ln>
-          <a:effectLst/>
-          <a:extLst>
-            <a:ext uri="{909E8E84-426E-40DD-AFC4-6F175D3DCCD1}">
-              <a14:hiddenFill xmlns:a14="http://schemas.microsoft.com/office/drawing/2010/main">
-                <a:solidFill>
-                  <a:schemeClr val="accent1"/>
-                </a:solidFill>
-              </a14:hiddenFill>
-            </a:ext>
-            <a:ext uri="{91240B29-F687-4F45-9708-019B960494DF}">
-              <a14:hiddenLine xmlns:a14="http://schemas.microsoft.com/office/drawing/2010/main" w="9525">
-                <a:solidFill>
-                  <a:schemeClr val="tx1"/>
-                </a:solidFill>
-                <a:miter lim="800000"/>
-                <a:headEnd/>
-                <a:tailEnd/>
-              </a14:hiddenLine>
-            </a:ext>
-            <a:ext uri="{AF507438-7753-43E0-B8FC-AC1667EBCBE1}">
-              <a14:hiddenEffects xmlns:a14="http://schemas.microsoft.com/office/drawing/2010/main">
-                <a:effectLst>
-                  <a:outerShdw dist="35921" dir="2700000" algn="ctr" rotWithShape="0">
-                    <a:schemeClr val="bg2"/>
-                  </a:outerShdw>
-                </a:effectLst>
-              </a14:hiddenEffects>
-            </a:ext>
-          </a:extLst>
         </p:spPr>
         <p:txBody>
-          <a:bodyPr vert="horz" wrap="square" lIns="91440" tIns="45720" rIns="91440" bIns="45720" numCol="1" anchor="ctr" anchorCtr="0" compatLnSpc="1">
-            <a:prstTxWarp prst="textNoShape">
-              <a:avLst/>
-            </a:prstTxWarp>
+          <a:bodyPr wrap="square" rtlCol="0">
             <a:spAutoFit/>
           </a:bodyPr>
           <a:lstStyle/>
           <a:p>
-            <a:pPr eaLnBrk="0" fontAlgn="base" hangingPunct="0">
-              <a:lnSpc>
-                <a:spcPct val="150000"/>
-              </a:lnSpc>
-              <a:spcBef>
-                <a:spcPct val="0"/>
-              </a:spcBef>
-              <a:spcAft>
-                <a:spcPct val="0"/>
-              </a:spcAft>
-            </a:pPr>
-            <a:r>
-              <a:rPr lang="en-US" sz="1800" dirty="0">
-                <a:latin typeface="Times New Roman" panose="02020603050405020304" pitchFamily="18" charset="0"/>
-                <a:cs typeface="Times New Roman" panose="02020603050405020304" pitchFamily="18" charset="0"/>
-              </a:rPr>
-              <a:t>Integration with college database (student/staff vehicles).</a:t>
-            </a:r>
-          </a:p>
-          <a:p>
-            <a:pPr eaLnBrk="0" fontAlgn="base" hangingPunct="0">
-              <a:lnSpc>
-                <a:spcPct val="150000"/>
-              </a:lnSpc>
-              <a:spcBef>
-                <a:spcPct val="0"/>
-              </a:spcBef>
-              <a:spcAft>
-                <a:spcPct val="0"/>
-              </a:spcAft>
-            </a:pPr>
-            <a:r>
-              <a:rPr lang="en-US" sz="1800" dirty="0">
-                <a:latin typeface="Times New Roman" panose="02020603050405020304" pitchFamily="18" charset="0"/>
-                <a:cs typeface="Times New Roman" panose="02020603050405020304" pitchFamily="18" charset="0"/>
-              </a:rPr>
-              <a:t>Automatic gate opening for authorized vehicles.</a:t>
-            </a:r>
-          </a:p>
-          <a:p>
-            <a:pPr eaLnBrk="0" fontAlgn="base" hangingPunct="0">
-              <a:lnSpc>
-                <a:spcPct val="150000"/>
-              </a:lnSpc>
-              <a:spcBef>
-                <a:spcPct val="0"/>
-              </a:spcBef>
-              <a:spcAft>
-                <a:spcPct val="0"/>
-              </a:spcAft>
-            </a:pPr>
-            <a:r>
-              <a:rPr lang="en-IN" sz="1800" dirty="0">
-                <a:latin typeface="Times New Roman" panose="02020603050405020304" pitchFamily="18" charset="0"/>
-                <a:cs typeface="Times New Roman" panose="02020603050405020304" pitchFamily="18" charset="0"/>
-              </a:rPr>
-              <a:t>Alert system for unknown vehicles.</a:t>
-            </a:r>
-            <a:endParaRPr kumimoji="0" lang="en-US" altLang="en-US" sz="1800" b="0" i="0" u="none" strike="noStrike" cap="none" normalizeH="0" baseline="0" dirty="0">
-              <a:ln>
-                <a:noFill/>
-              </a:ln>
-              <a:solidFill>
-                <a:schemeClr val="tx1"/>
-              </a:solidFill>
-              <a:effectLst/>
-              <a:latin typeface="Times New Roman" panose="02020603050405020304" pitchFamily="18" charset="0"/>
-              <a:cs typeface="Times New Roman" panose="02020603050405020304" pitchFamily="18" charset="0"/>
+            <a:pPr algn="ctr"/>
+            <a:r>
+              <a:rPr lang="en-US" sz="1600" dirty="0">
+                <a:latin typeface="Georgia" panose="02040502050405020303" pitchFamily="18" charset="0"/>
+              </a:rPr>
+              <a:t>Fig. 2 : Plate detection from image</a:t>
+            </a:r>
+            <a:endParaRPr lang="en-IN" sz="1600" dirty="0">
+              <a:latin typeface="Georgia" panose="02040502050405020303" pitchFamily="18" charset="0"/>
             </a:endParaRPr>
           </a:p>
-          <a:p>
-            <a:pPr eaLnBrk="0" fontAlgn="base" hangingPunct="0">
-              <a:lnSpc>
-                <a:spcPct val="150000"/>
-              </a:lnSpc>
-              <a:spcBef>
-                <a:spcPct val="0"/>
-              </a:spcBef>
-              <a:spcAft>
-                <a:spcPct val="0"/>
-              </a:spcAft>
-            </a:pPr>
-            <a:r>
-              <a:rPr kumimoji="0" lang="en-US" altLang="en-US" sz="1800" b="0" i="0" u="none" strike="noStrike" cap="none" normalizeH="0" baseline="0" dirty="0">
-                <a:ln>
-                  <a:noFill/>
-                </a:ln>
-                <a:solidFill>
-                  <a:schemeClr val="tx1"/>
-                </a:solidFill>
-                <a:effectLst/>
-                <a:latin typeface="Times New Roman" panose="02020603050405020304" pitchFamily="18" charset="0"/>
-                <a:cs typeface="Times New Roman" panose="02020603050405020304" pitchFamily="18" charset="0"/>
-              </a:rPr>
-              <a:t>Integrating with toll plazas and parking automation. </a:t>
-            </a:r>
-          </a:p>
-          <a:p>
-            <a:pPr eaLnBrk="0" fontAlgn="base" hangingPunct="0">
-              <a:lnSpc>
-                <a:spcPct val="150000"/>
-              </a:lnSpc>
-              <a:spcBef>
-                <a:spcPct val="0"/>
-              </a:spcBef>
-              <a:spcAft>
-                <a:spcPct val="0"/>
-              </a:spcAft>
-            </a:pPr>
-            <a:endParaRPr kumimoji="0" lang="en-US" altLang="en-US" sz="1800" b="0" i="0" u="none" strike="noStrike" cap="none" normalizeH="0" baseline="0" dirty="0">
-              <a:ln>
-                <a:noFill/>
-              </a:ln>
-              <a:solidFill>
-                <a:schemeClr val="tx1"/>
-              </a:solidFill>
-              <a:effectLst/>
-              <a:latin typeface="Times New Roman" panose="02020603050405020304" pitchFamily="18" charset="0"/>
-              <a:cs typeface="Times New Roman" panose="02020603050405020304" pitchFamily="18" charset="0"/>
+        </p:txBody>
+      </p:sp>
+      <p:pic>
+        <p:nvPicPr>
+          <p:cNvPr id="9" name="Picture 8">
+            <a:extLst>
+              <a:ext uri="{FF2B5EF4-FFF2-40B4-BE49-F238E27FC236}">
+                <a16:creationId xmlns:a16="http://schemas.microsoft.com/office/drawing/2014/main" id="{EC7CC3DF-E156-5F0B-BDF8-D9F8803E9353}"/>
+              </a:ext>
+            </a:extLst>
+          </p:cNvPr>
+          <p:cNvPicPr>
+            <a:picLocks noChangeAspect="1"/>
+          </p:cNvPicPr>
+          <p:nvPr/>
+        </p:nvPicPr>
+        <p:blipFill>
+          <a:blip r:embed="rId2"/>
+          <a:stretch>
+            <a:fillRect/>
+          </a:stretch>
+        </p:blipFill>
+        <p:spPr>
+          <a:xfrm>
+            <a:off x="6096000" y="1683943"/>
+            <a:ext cx="5482451" cy="3788686"/>
+          </a:xfrm>
+          <a:prstGeom prst="rect">
+            <a:avLst/>
+          </a:prstGeom>
+        </p:spPr>
+      </p:pic>
+      <p:pic>
+        <p:nvPicPr>
+          <p:cNvPr id="13" name="Picture 12">
+            <a:extLst>
+              <a:ext uri="{FF2B5EF4-FFF2-40B4-BE49-F238E27FC236}">
+                <a16:creationId xmlns:a16="http://schemas.microsoft.com/office/drawing/2014/main" id="{54B6C0A5-A5D1-F985-4F21-9D00AC9122EF}"/>
+              </a:ext>
+            </a:extLst>
+          </p:cNvPr>
+          <p:cNvPicPr>
+            <a:picLocks noChangeAspect="1"/>
+          </p:cNvPicPr>
+          <p:nvPr/>
+        </p:nvPicPr>
+        <p:blipFill>
+          <a:blip r:embed="rId3"/>
+          <a:stretch>
+            <a:fillRect/>
+          </a:stretch>
+        </p:blipFill>
+        <p:spPr>
+          <a:xfrm>
+            <a:off x="926928" y="1688353"/>
+            <a:ext cx="4724225" cy="3784276"/>
+          </a:xfrm>
+          <a:prstGeom prst="rect">
+            <a:avLst/>
+          </a:prstGeom>
+        </p:spPr>
+      </p:pic>
+      <p:sp>
+        <p:nvSpPr>
+          <p:cNvPr id="14" name="TextBox 13">
+            <a:extLst>
+              <a:ext uri="{FF2B5EF4-FFF2-40B4-BE49-F238E27FC236}">
+                <a16:creationId xmlns:a16="http://schemas.microsoft.com/office/drawing/2014/main" id="{A99006D8-6734-9400-7383-794A6E8DFBA4}"/>
+              </a:ext>
+            </a:extLst>
+          </p:cNvPr>
+          <p:cNvSpPr txBox="1"/>
+          <p:nvPr/>
+        </p:nvSpPr>
+        <p:spPr>
+          <a:xfrm>
+            <a:off x="7050413" y="5531727"/>
+            <a:ext cx="3573624" cy="338554"/>
+          </a:xfrm>
+          <a:prstGeom prst="rect">
+            <a:avLst/>
+          </a:prstGeom>
+          <a:noFill/>
+        </p:spPr>
+        <p:txBody>
+          <a:bodyPr wrap="square" rtlCol="0">
+            <a:spAutoFit/>
+          </a:bodyPr>
+          <a:lstStyle/>
+          <a:p>
+            <a:pPr algn="ctr"/>
+            <a:r>
+              <a:rPr lang="en-US" sz="1600" dirty="0">
+                <a:latin typeface="Georgia" panose="02040502050405020303" pitchFamily="18" charset="0"/>
+              </a:rPr>
+              <a:t>Fig. 3 : Plate detection from video</a:t>
+            </a:r>
+            <a:endParaRPr lang="en-IN" sz="1600" dirty="0">
+              <a:latin typeface="Georgia" panose="02040502050405020303" pitchFamily="18" charset="0"/>
             </a:endParaRPr>
           </a:p>
         </p:txBody>
@@ -5251,7 +5733,7 @@
     </p:spTree>
     <p:extLst>
       <p:ext uri="{BB962C8B-B14F-4D97-AF65-F5344CB8AC3E}">
-        <p14:creationId xmlns:p14="http://schemas.microsoft.com/office/powerpoint/2010/main" val="114671976"/>
+        <p14:creationId xmlns:p14="http://schemas.microsoft.com/office/powerpoint/2010/main" val="3222870826"/>
       </p:ext>
     </p:extLst>
   </p:cSld>
@@ -5283,7 +5765,7 @@
           <p:cNvPr id="2" name="Title 1">
             <a:extLst>
               <a:ext uri="{FF2B5EF4-FFF2-40B4-BE49-F238E27FC236}">
-                <a16:creationId xmlns:a16="http://schemas.microsoft.com/office/drawing/2014/main" id="{7349FF70-514C-691D-8225-AD41BB6D8450}"/>
+                <a16:creationId xmlns:a16="http://schemas.microsoft.com/office/drawing/2014/main" id="{077A146F-D889-0BD8-8104-6161538368F6}"/>
               </a:ext>
             </a:extLst>
           </p:cNvPr>
@@ -5296,8 +5778,8 @@
         </p:nvSpPr>
         <p:spPr>
           <a:xfrm>
-            <a:off x="232611" y="-465221"/>
-            <a:ext cx="11121189" cy="2155909"/>
+            <a:off x="-585786" y="369235"/>
+            <a:ext cx="13363565" cy="1259305"/>
           </a:xfrm>
         </p:spPr>
         <p:txBody>
@@ -5308,12 +5790,16 @@
           <a:p>
             <a:pPr algn="ctr"/>
             <a:r>
-              <a:rPr lang="en-IN" sz="3200" b="1" dirty="0">
-                <a:latin typeface="Times New Roman" panose="02020603050405020304" pitchFamily="18" charset="0"/>
+              <a:rPr lang="en-US" sz="3200" b="1" dirty="0">
+                <a:latin typeface="Georgia" panose="02040502050405020303" pitchFamily="18" charset="0"/>
                 <a:cs typeface="Times New Roman" panose="02020603050405020304" pitchFamily="18" charset="0"/>
               </a:rPr>
-              <a:t>CONCLUSION</a:t>
-            </a:r>
+              <a:t>LIMITATIONS OF PROPOSED WORK</a:t>
+            </a:r>
+            <a:endParaRPr lang="en-IN" sz="3200" b="1" dirty="0">
+              <a:latin typeface="Georgia" panose="02040502050405020303" pitchFamily="18" charset="0"/>
+              <a:cs typeface="Times New Roman" panose="02020603050405020304" pitchFamily="18" charset="0"/>
+            </a:endParaRPr>
           </a:p>
         </p:txBody>
       </p:sp>
@@ -5322,7 +5808,7 @@
           <p:cNvPr id="3" name="Content Placeholder 2">
             <a:extLst>
               <a:ext uri="{FF2B5EF4-FFF2-40B4-BE49-F238E27FC236}">
-                <a16:creationId xmlns:a16="http://schemas.microsoft.com/office/drawing/2014/main" id="{A487E616-ED5A-DA85-A008-92889CA2CBEC}"/>
+                <a16:creationId xmlns:a16="http://schemas.microsoft.com/office/drawing/2014/main" id="{F0AE1337-5DAB-AB3A-38D1-AF661EB0AB6F}"/>
               </a:ext>
             </a:extLst>
           </p:cNvPr>
@@ -5335,150 +5821,84 @@
         </p:nvSpPr>
         <p:spPr>
           <a:xfrm>
-            <a:off x="535405" y="1259304"/>
-            <a:ext cx="11121189" cy="4917659"/>
+            <a:off x="1161410" y="1732112"/>
+            <a:ext cx="9869171" cy="4520665"/>
           </a:xfrm>
         </p:spPr>
         <p:txBody>
           <a:bodyPr>
-            <a:normAutofit lnSpcReduction="10000"/>
+            <a:normAutofit/>
           </a:bodyPr>
           <a:lstStyle/>
           <a:p>
-            <a:pPr>
-              <a:lnSpc>
-                <a:spcPct val="150000"/>
-              </a:lnSpc>
-            </a:pPr>
-            <a:r>
-              <a:rPr lang="en-US" sz="1800" dirty="0">
-                <a:latin typeface="Times New Roman" panose="02020603050405020304" pitchFamily="18" charset="0"/>
-                <a:cs typeface="Times New Roman" panose="02020603050405020304" pitchFamily="18" charset="0"/>
-              </a:rPr>
-              <a:t>The Automatic License Plate Recognition System successfully identifies vehicle license plates in real time using deep learning and image processing.</a:t>
-            </a:r>
-            <a:br>
-              <a:rPr lang="en-US" sz="1800" dirty="0">
-                <a:latin typeface="Times New Roman" panose="02020603050405020304" pitchFamily="18" charset="0"/>
-                <a:cs typeface="Times New Roman" panose="02020603050405020304" pitchFamily="18" charset="0"/>
-              </a:rPr>
-            </a:br>
-            <a:r>
-              <a:rPr lang="en-US" sz="1800" dirty="0">
-                <a:latin typeface="Times New Roman" panose="02020603050405020304" pitchFamily="18" charset="0"/>
-                <a:cs typeface="Times New Roman" panose="02020603050405020304" pitchFamily="18" charset="0"/>
-              </a:rPr>
-              <a:t>The system demonstrates high accuracy in plate detection and character recognition across varying conditions.</a:t>
-            </a:r>
-          </a:p>
-          <a:p>
-            <a:pPr marL="0" indent="0">
-              <a:lnSpc>
-                <a:spcPct val="150000"/>
-              </a:lnSpc>
+            <a:pPr algn="just"/>
+            <a:endParaRPr lang="en-US" sz="2000" dirty="0">
+              <a:latin typeface="Georgia" panose="02040502050405020303" pitchFamily="18" charset="0"/>
+              <a:cs typeface="Times New Roman" panose="02020603050405020304" pitchFamily="18" charset="0"/>
+            </a:endParaRPr>
+          </a:p>
+          <a:p>
+            <a:pPr algn="just"/>
+            <a:r>
+              <a:rPr lang="en-US" sz="2000" dirty="0">
+                <a:latin typeface="Georgia" panose="02040502050405020303" pitchFamily="18" charset="0"/>
+              </a:rPr>
+              <a:t>OCR accuracy may decrease for blurred, tilted, or low-light number plates. </a:t>
+            </a:r>
+          </a:p>
+          <a:p>
+            <a:pPr algn="just"/>
+            <a:r>
+              <a:rPr lang="en-US" sz="2000" dirty="0">
+                <a:latin typeface="Georgia" panose="02040502050405020303" pitchFamily="18" charset="0"/>
+              </a:rPr>
+              <a:t>System performance depends heavily on camera quality and viewing conditions. </a:t>
+            </a:r>
+          </a:p>
+          <a:p>
+            <a:pPr algn="just"/>
+            <a:r>
+              <a:rPr lang="en-US" sz="2000" dirty="0">
+                <a:latin typeface="Georgia" panose="02040502050405020303" pitchFamily="18" charset="0"/>
+              </a:rPr>
+              <a:t>Detection and recognition accuracy may reduce during night-time or glare-heavy scenarios. </a:t>
+            </a:r>
+          </a:p>
+          <a:p>
+            <a:pPr algn="just"/>
+            <a:r>
+              <a:rPr lang="en-US" sz="2000" dirty="0">
+                <a:latin typeface="Georgia" panose="02040502050405020303" pitchFamily="18" charset="0"/>
+              </a:rPr>
+              <a:t>The system does not use advanced vehicle tracking, which may cause multiple OCR variations in videos. </a:t>
+            </a:r>
+          </a:p>
+          <a:p>
+            <a:pPr algn="just"/>
+            <a:r>
+              <a:rPr lang="en-US" sz="2000" dirty="0">
+                <a:latin typeface="Georgia" panose="02040502050405020303" pitchFamily="18" charset="0"/>
+              </a:rPr>
+              <a:t>Limited dataset diversity may affect performance on uncommon plate styles or extreme real-world conditions.</a:t>
+            </a:r>
+          </a:p>
+          <a:p>
+            <a:pPr marL="0" indent="0" algn="just">
               <a:buNone/>
             </a:pPr>
-            <a:endParaRPr lang="en-US" sz="1800" dirty="0">
-              <a:latin typeface="Times New Roman" panose="02020603050405020304" pitchFamily="18" charset="0"/>
+            <a:endParaRPr lang="en-US" sz="2000" dirty="0">
+              <a:latin typeface="Georgia" panose="02040502050405020303" pitchFamily="18" charset="0"/>
               <a:cs typeface="Times New Roman" panose="02020603050405020304" pitchFamily="18" charset="0"/>
             </a:endParaRPr>
           </a:p>
-          <a:p>
-            <a:pPr>
-              <a:lnSpc>
-                <a:spcPct val="150000"/>
-              </a:lnSpc>
-            </a:pPr>
-            <a:r>
-              <a:rPr lang="en-US" sz="1800" b="1" dirty="0">
-                <a:latin typeface="Times New Roman" panose="02020603050405020304" pitchFamily="18" charset="0"/>
-                <a:cs typeface="Times New Roman" panose="02020603050405020304" pitchFamily="18" charset="0"/>
-              </a:rPr>
-              <a:t>Applications:</a:t>
-            </a:r>
-            <a:endParaRPr lang="en-US" sz="1800" dirty="0">
-              <a:latin typeface="Times New Roman" panose="02020603050405020304" pitchFamily="18" charset="0"/>
-              <a:cs typeface="Times New Roman" panose="02020603050405020304" pitchFamily="18" charset="0"/>
-            </a:endParaRPr>
-          </a:p>
-          <a:p>
-            <a:pPr>
-              <a:lnSpc>
-                <a:spcPct val="150000"/>
-              </a:lnSpc>
-            </a:pPr>
-            <a:r>
-              <a:rPr lang="en-US" sz="1800" dirty="0">
-                <a:latin typeface="Times New Roman" panose="02020603050405020304" pitchFamily="18" charset="0"/>
-                <a:cs typeface="Times New Roman" panose="02020603050405020304" pitchFamily="18" charset="0"/>
-              </a:rPr>
-              <a:t>Traffic monitoring</a:t>
-            </a:r>
-          </a:p>
-          <a:p>
-            <a:pPr>
-              <a:lnSpc>
-                <a:spcPct val="150000"/>
-              </a:lnSpc>
-            </a:pPr>
-            <a:r>
-              <a:rPr lang="en-US" sz="1800" dirty="0">
-                <a:latin typeface="Times New Roman" panose="02020603050405020304" pitchFamily="18" charset="0"/>
-                <a:cs typeface="Times New Roman" panose="02020603050405020304" pitchFamily="18" charset="0"/>
-              </a:rPr>
-              <a:t>Security and surveillance</a:t>
-            </a:r>
-          </a:p>
-          <a:p>
-            <a:pPr>
-              <a:lnSpc>
-                <a:spcPct val="150000"/>
-              </a:lnSpc>
-            </a:pPr>
-            <a:r>
-              <a:rPr lang="en-US" sz="1800" dirty="0">
-                <a:latin typeface="Times New Roman" panose="02020603050405020304" pitchFamily="18" charset="0"/>
-                <a:cs typeface="Times New Roman" panose="02020603050405020304" pitchFamily="18" charset="0"/>
-              </a:rPr>
-              <a:t>Parking &amp; toll automation</a:t>
-            </a:r>
-          </a:p>
-          <a:p>
-            <a:pPr>
-              <a:lnSpc>
-                <a:spcPct val="150000"/>
-              </a:lnSpc>
-            </a:pPr>
-            <a:r>
-              <a:rPr lang="en-US" sz="1800" dirty="0">
-                <a:latin typeface="Times New Roman" panose="02020603050405020304" pitchFamily="18" charset="0"/>
-                <a:cs typeface="Times New Roman" panose="02020603050405020304" pitchFamily="18" charset="0"/>
-              </a:rPr>
-              <a:t>Law enforcement and vehicle tracking</a:t>
-            </a:r>
-          </a:p>
-          <a:p>
-            <a:pPr>
-              <a:lnSpc>
-                <a:spcPct val="150000"/>
-              </a:lnSpc>
-            </a:pPr>
-            <a:r>
-              <a:rPr lang="en-US" sz="1800" dirty="0">
-                <a:latin typeface="Times New Roman" panose="02020603050405020304" pitchFamily="18" charset="0"/>
-                <a:cs typeface="Times New Roman" panose="02020603050405020304" pitchFamily="18" charset="0"/>
-              </a:rPr>
-              <a:t>ALPR offers a scalable and cost-effective solution for intelligent transportation systems.</a:t>
-            </a:r>
-          </a:p>
-        </p:txBody>
-      </p:sp>
-      <p:sp>
-        <p:nvSpPr>
-          <p:cNvPr id="5" name="Slide Number Placeholder 4">
-            <a:extLst>
-              <a:ext uri="{FF2B5EF4-FFF2-40B4-BE49-F238E27FC236}">
-                <a16:creationId xmlns:a16="http://schemas.microsoft.com/office/drawing/2014/main" id="{1BC766D0-59ED-4F3F-2691-A4ABCE97A293}"/>
+        </p:txBody>
+      </p:sp>
+      <p:sp>
+        <p:nvSpPr>
+          <p:cNvPr id="4" name="Slide Number Placeholder 3">
+            <a:extLst>
+              <a:ext uri="{FF2B5EF4-FFF2-40B4-BE49-F238E27FC236}">
+                <a16:creationId xmlns:a16="http://schemas.microsoft.com/office/drawing/2014/main" id="{CD7232EF-97FC-28BF-539C-C6D1DE6B3032}"/>
               </a:ext>
             </a:extLst>
           </p:cNvPr>
@@ -5505,7 +5925,7 @@
     </p:spTree>
     <p:extLst>
       <p:ext uri="{BB962C8B-B14F-4D97-AF65-F5344CB8AC3E}">
-        <p14:creationId xmlns:p14="http://schemas.microsoft.com/office/powerpoint/2010/main" val="3318188703"/>
+        <p14:creationId xmlns:p14="http://schemas.microsoft.com/office/powerpoint/2010/main" val="1076266199"/>
       </p:ext>
     </p:extLst>
   </p:cSld>
@@ -5537,7 +5957,7 @@
           <p:cNvPr id="2" name="Title 1">
             <a:extLst>
               <a:ext uri="{FF2B5EF4-FFF2-40B4-BE49-F238E27FC236}">
-                <a16:creationId xmlns:a16="http://schemas.microsoft.com/office/drawing/2014/main" id="{A42C6F46-F8EA-0F81-E45A-6B17465A770B}"/>
+                <a16:creationId xmlns:a16="http://schemas.microsoft.com/office/drawing/2014/main" id="{7349FF70-514C-691D-8225-AD41BB6D8450}"/>
               </a:ext>
             </a:extLst>
           </p:cNvPr>
@@ -5550,8 +5970,8 @@
         </p:nvSpPr>
         <p:spPr>
           <a:xfrm>
-            <a:off x="838200" y="427819"/>
-            <a:ext cx="10515600" cy="1395663"/>
+            <a:off x="1415756" y="136525"/>
+            <a:ext cx="9360488" cy="943392"/>
           </a:xfrm>
         </p:spPr>
         <p:txBody>
@@ -5563,21 +5983,11 @@
             <a:pPr algn="ctr"/>
             <a:r>
               <a:rPr lang="en-IN" sz="3200" b="1" dirty="0">
-                <a:latin typeface="Times New Roman" panose="02020603050405020304" pitchFamily="18" charset="0"/>
+                <a:latin typeface="Georgia" panose="02040502050405020303" pitchFamily="18" charset="0"/>
                 <a:cs typeface="Times New Roman" panose="02020603050405020304" pitchFamily="18" charset="0"/>
               </a:rPr>
-              <a:t>REFERENCES</a:t>
-            </a:r>
-            <a:br>
-              <a:rPr lang="en-IN" sz="3200" b="1" dirty="0">
-                <a:latin typeface="Times New Roman" panose="02020603050405020304" pitchFamily="18" charset="0"/>
-                <a:cs typeface="Times New Roman" panose="02020603050405020304" pitchFamily="18" charset="0"/>
-              </a:rPr>
-            </a:br>
-            <a:endParaRPr lang="en-IN" sz="3200" b="1" dirty="0">
-              <a:latin typeface="Times New Roman" panose="02020603050405020304" pitchFamily="18" charset="0"/>
-              <a:cs typeface="Times New Roman" panose="02020603050405020304" pitchFamily="18" charset="0"/>
-            </a:endParaRPr>
+              <a:t>CONCLUSION &amp; FUTURE SCOPE</a:t>
+            </a:r>
           </a:p>
         </p:txBody>
       </p:sp>
@@ -5586,7 +5996,7 @@
           <p:cNvPr id="3" name="Content Placeholder 2">
             <a:extLst>
               <a:ext uri="{FF2B5EF4-FFF2-40B4-BE49-F238E27FC236}">
-                <a16:creationId xmlns:a16="http://schemas.microsoft.com/office/drawing/2014/main" id="{AA96C5E7-83AB-52F7-2D5C-FF86B07C468F}"/>
+                <a16:creationId xmlns:a16="http://schemas.microsoft.com/office/drawing/2014/main" id="{A487E616-ED5A-DA85-A008-92889CA2CBEC}"/>
               </a:ext>
             </a:extLst>
           </p:cNvPr>
@@ -5599,8 +6009,8 @@
         </p:nvSpPr>
         <p:spPr>
           <a:xfrm>
-            <a:off x="272716" y="1230855"/>
-            <a:ext cx="11081084" cy="4396289"/>
+            <a:off x="535405" y="1438691"/>
+            <a:ext cx="11121189" cy="4917659"/>
           </a:xfrm>
         </p:spPr>
         <p:txBody>
@@ -5609,33 +6019,77 @@
           </a:bodyPr>
           <a:lstStyle/>
           <a:p>
-            <a:pPr marL="0" indent="0">
+            <a:pPr marL="0" indent="0" algn="just">
               <a:buNone/>
             </a:pPr>
-            <a:endParaRPr lang="en-US" sz="1800" b="1" spc="-91" dirty="0">
-              <a:solidFill>
-                <a:srgbClr val="000000"/>
-              </a:solidFill>
-              <a:latin typeface="Times New Roman" panose="02020603050405020304" pitchFamily="18" charset="0"/>
-              <a:ea typeface="Times New Roman Bold"/>
-              <a:cs typeface="Times New Roman" panose="02020603050405020304" pitchFamily="18" charset="0"/>
-              <a:sym typeface="Times New Roman Bold"/>
-            </a:endParaRPr>
-          </a:p>
-          <a:p>
-            <a:pPr marL="0" indent="0">
+            <a:r>
+              <a:rPr lang="en-US" sz="2000" b="1" dirty="0">
+                <a:latin typeface="Georgia" panose="02040502050405020303" pitchFamily="18" charset="0"/>
+              </a:rPr>
+              <a:t>Conclusion</a:t>
+            </a:r>
+          </a:p>
+          <a:p>
+            <a:pPr marL="0" indent="0" algn="just">
               <a:buNone/>
             </a:pPr>
-            <a:endParaRPr lang="en-US" sz="1200" b="1" spc="-91" dirty="0">
-              <a:solidFill>
-                <a:srgbClr val="000000"/>
-              </a:solidFill>
-              <a:latin typeface="Times New Roman" panose="02020603050405020304" pitchFamily="18" charset="0"/>
-              <a:ea typeface="Times New Roman Bold"/>
-              <a:cs typeface="Times New Roman" panose="02020603050405020304" pitchFamily="18" charset="0"/>
-              <a:sym typeface="Times New Roman Bold"/>
+            <a:r>
+              <a:rPr lang="en-US" sz="2000" dirty="0">
+                <a:latin typeface="Georgia" panose="02040502050405020303" pitchFamily="18" charset="0"/>
+              </a:rPr>
+              <a:t>The proposed Automatic Number Plate Recognition (ANPR) system successfully detects and recognizes Indian vehicle number plates from images and videos using YOLOv8 and EasyOCR. The system provides an efficient web-based solution for automated vehicle monitoring and logging at the college main gate, reducing manual effort and improving surveillance.</a:t>
+            </a:r>
+          </a:p>
+          <a:p>
+            <a:pPr marL="0" indent="0" algn="just">
+              <a:buNone/>
+            </a:pPr>
+            <a:br>
+              <a:rPr lang="en-US" sz="2000" dirty="0">
+                <a:latin typeface="Georgia" panose="02040502050405020303" pitchFamily="18" charset="0"/>
+              </a:rPr>
+            </a:br>
+            <a:endParaRPr lang="en-US" sz="2000" dirty="0">
+              <a:latin typeface="Georgia" panose="02040502050405020303" pitchFamily="18" charset="0"/>
             </a:endParaRPr>
           </a:p>
+          <a:p>
+            <a:pPr marL="0" indent="0" algn="just">
+              <a:buNone/>
+            </a:pPr>
+            <a:r>
+              <a:rPr lang="en-US" sz="2000" b="1" dirty="0">
+                <a:latin typeface="Georgia" panose="02040502050405020303" pitchFamily="18" charset="0"/>
+              </a:rPr>
+              <a:t>Future Scope</a:t>
+            </a:r>
+          </a:p>
+          <a:p>
+            <a:pPr algn="just"/>
+            <a:r>
+              <a:rPr lang="en-US" sz="2000" dirty="0">
+                <a:latin typeface="Georgia" panose="02040502050405020303" pitchFamily="18" charset="0"/>
+              </a:rPr>
+              <a:t>The system can be enhanced by integrating it with the college vehicle database.</a:t>
+            </a:r>
+          </a:p>
+          <a:p>
+            <a:pPr algn="just"/>
+            <a:r>
+              <a:rPr lang="en-US" sz="2000" dirty="0">
+                <a:latin typeface="Georgia" panose="02040502050405020303" pitchFamily="18" charset="0"/>
+              </a:rPr>
+              <a:t>It can be implemented with real-time CCTV monitoring support. </a:t>
+            </a:r>
+          </a:p>
+          <a:p>
+            <a:r>
+              <a:rPr lang="en-US" sz="2000" dirty="0">
+                <a:latin typeface="Georgia" panose="02040502050405020303" pitchFamily="18" charset="0"/>
+              </a:rPr>
+              <a:t>The project can be extended for automatic gate control and traffic rule violation tracking. </a:t>
+            </a:r>
+          </a:p>
         </p:txBody>
       </p:sp>
       <p:sp>
@@ -5643,7 +6097,7 @@
           <p:cNvPr id="5" name="Slide Number Placeholder 4">
             <a:extLst>
               <a:ext uri="{FF2B5EF4-FFF2-40B4-BE49-F238E27FC236}">
-                <a16:creationId xmlns:a16="http://schemas.microsoft.com/office/drawing/2014/main" id="{86134649-8643-729B-8C4C-521A08CE9AFB}"/>
+                <a16:creationId xmlns:a16="http://schemas.microsoft.com/office/drawing/2014/main" id="{1BC766D0-59ED-4F3F-2691-A4ABCE97A293}"/>
               </a:ext>
             </a:extLst>
           </p:cNvPr>
@@ -5667,360 +6121,294 @@
           </a:p>
         </p:txBody>
       </p:sp>
-      <p:sp>
-        <p:nvSpPr>
-          <p:cNvPr id="7" name="Rectangle 3">
-            <a:extLst>
-              <a:ext uri="{FF2B5EF4-FFF2-40B4-BE49-F238E27FC236}">
-                <a16:creationId xmlns:a16="http://schemas.microsoft.com/office/drawing/2014/main" id="{E93A3C92-3210-E4FE-DF9A-B6ED336A7861}"/>
-              </a:ext>
-            </a:extLst>
-          </p:cNvPr>
-          <p:cNvSpPr>
-            <a:spLocks noChangeArrowheads="1"/>
-          </p:cNvSpPr>
-          <p:nvPr/>
-        </p:nvSpPr>
-        <p:spPr bwMode="auto">
-          <a:xfrm rot="10800000" flipV="1">
-            <a:off x="816714" y="2188086"/>
-            <a:ext cx="10558571" cy="2264081"/>
-          </a:xfrm>
-          <a:prstGeom prst="rect">
-            <a:avLst/>
-          </a:prstGeom>
-          <a:noFill/>
-          <a:ln>
-            <a:noFill/>
-          </a:ln>
-          <a:effectLst/>
-          <a:extLst>
-            <a:ext uri="{909E8E84-426E-40DD-AFC4-6F175D3DCCD1}">
-              <a14:hiddenFill xmlns:a14="http://schemas.microsoft.com/office/drawing/2010/main">
-                <a:solidFill>
-                  <a:schemeClr val="accent1"/>
-                </a:solidFill>
-              </a14:hiddenFill>
-            </a:ext>
-            <a:ext uri="{91240B29-F687-4F45-9708-019B960494DF}">
-              <a14:hiddenLine xmlns:a14="http://schemas.microsoft.com/office/drawing/2010/main" w="9525">
-                <a:solidFill>
-                  <a:schemeClr val="tx1"/>
-                </a:solidFill>
-                <a:miter lim="800000"/>
-                <a:headEnd/>
-                <a:tailEnd/>
-              </a14:hiddenLine>
-            </a:ext>
-            <a:ext uri="{AF507438-7753-43E0-B8FC-AC1667EBCBE1}">
-              <a14:hiddenEffects xmlns:a14="http://schemas.microsoft.com/office/drawing/2010/main">
-                <a:effectLst>
-                  <a:outerShdw dist="35921" dir="2700000" algn="ctr" rotWithShape="0">
-                    <a:schemeClr val="bg2"/>
-                  </a:outerShdw>
-                </a:effectLst>
-              </a14:hiddenEffects>
-            </a:ext>
-          </a:extLst>
-        </p:spPr>
-        <p:txBody>
-          <a:bodyPr vert="horz" wrap="square" lIns="91440" tIns="45720" rIns="91440" bIns="45720" numCol="1" anchor="ctr" anchorCtr="0" compatLnSpc="1">
-            <a:prstTxWarp prst="textNoShape">
-              <a:avLst/>
-            </a:prstTxWarp>
-            <a:spAutoFit/>
-          </a:bodyPr>
-          <a:lstStyle/>
-          <a:p>
-            <a:pPr marL="0" marR="0" lvl="0" indent="0" algn="l" defTabSz="914400" rtl="0" eaLnBrk="0" fontAlgn="base" latinLnBrk="0" hangingPunct="0">
-              <a:lnSpc>
-                <a:spcPct val="150000"/>
-              </a:lnSpc>
-              <a:spcBef>
-                <a:spcPct val="0"/>
-              </a:spcBef>
-              <a:spcAft>
-                <a:spcPct val="0"/>
-              </a:spcAft>
-              <a:buClrTx/>
-              <a:buSzTx/>
-              <a:tabLst/>
-            </a:pPr>
-            <a:r>
-              <a:rPr kumimoji="0" lang="en-US" altLang="en-US" sz="1600" b="1" i="0" u="none" strike="noStrike" cap="none" normalizeH="0" baseline="0" dirty="0">
-                <a:ln>
-                  <a:noFill/>
-                </a:ln>
-                <a:solidFill>
-                  <a:schemeClr val="tx1"/>
-                </a:solidFill>
-                <a:effectLst/>
-                <a:latin typeface="Times New Roman" panose="02020603050405020304" pitchFamily="18" charset="0"/>
-                <a:cs typeface="Times New Roman" panose="02020603050405020304" pitchFamily="18" charset="0"/>
-              </a:rPr>
-              <a:t>[1] Automatic Number Plate Recognition: A Detailed Survey of Relevant Algorithms </a:t>
-            </a:r>
-            <a:r>
-              <a:rPr kumimoji="0" lang="en-US" altLang="en-US" sz="1600" b="0" i="0" u="none" strike="noStrike" cap="none" normalizeH="0" baseline="0" dirty="0">
-                <a:ln>
-                  <a:noFill/>
-                </a:ln>
-                <a:solidFill>
-                  <a:schemeClr val="tx1"/>
-                </a:solidFill>
-                <a:effectLst/>
-                <a:latin typeface="Times New Roman" panose="02020603050405020304" pitchFamily="18" charset="0"/>
-                <a:cs typeface="Times New Roman" panose="02020603050405020304" pitchFamily="18" charset="0"/>
-              </a:rPr>
-              <a:t>: </a:t>
-            </a:r>
-            <a:r>
-              <a:rPr kumimoji="0" lang="en-US" altLang="en-US" sz="1600" b="0" i="0" u="none" strike="noStrike" cap="none" normalizeH="0" baseline="0" dirty="0">
-                <a:ln>
-                  <a:noFill/>
-                </a:ln>
-                <a:solidFill>
-                  <a:schemeClr val="tx1"/>
-                </a:solidFill>
-                <a:effectLst/>
-                <a:latin typeface="Times New Roman" panose="02020603050405020304" pitchFamily="18" charset="0"/>
-                <a:cs typeface="Times New Roman" panose="02020603050405020304" pitchFamily="18" charset="0"/>
-                <a:hlinkClick r:id="rId2"/>
-              </a:rPr>
-              <a:t>https://pmc.ncbi.nlm.nih.gov/articles/PMC8123416/</a:t>
-            </a:r>
-            <a:r>
-              <a:rPr kumimoji="0" lang="en-US" altLang="en-US" sz="1600" b="0" i="0" u="none" strike="noStrike" cap="none" normalizeH="0" baseline="0" dirty="0">
-                <a:ln>
-                  <a:noFill/>
-                </a:ln>
-                <a:solidFill>
-                  <a:schemeClr val="tx1"/>
-                </a:solidFill>
-                <a:effectLst/>
-                <a:latin typeface="Times New Roman" panose="02020603050405020304" pitchFamily="18" charset="0"/>
-                <a:cs typeface="Times New Roman" panose="02020603050405020304" pitchFamily="18" charset="0"/>
-              </a:rPr>
-              <a:t> </a:t>
-            </a:r>
-            <a:r>
-              <a:rPr kumimoji="0" lang="en-US" altLang="en-US" sz="1600" b="0" i="0" u="none" strike="noStrike" cap="none" normalizeH="0" baseline="0" dirty="0">
-                <a:ln>
-                  <a:noFill/>
-                </a:ln>
-                <a:solidFill>
-                  <a:schemeClr val="tx1"/>
-                </a:solidFill>
-                <a:effectLst/>
-                <a:latin typeface="Times New Roman" panose="02020603050405020304" pitchFamily="18" charset="0"/>
-                <a:cs typeface="Times New Roman" panose="02020603050405020304" pitchFamily="18" charset="0"/>
-                <a:hlinkClick r:id="rId2"/>
-              </a:rPr>
-              <a:t>PubMed Central</a:t>
-            </a:r>
-            <a:endParaRPr kumimoji="0" lang="en-US" altLang="en-US" sz="1600" b="0" i="0" u="none" strike="noStrike" cap="none" normalizeH="0" baseline="0" dirty="0">
-              <a:ln>
-                <a:noFill/>
-              </a:ln>
-              <a:solidFill>
-                <a:schemeClr val="tx1"/>
-              </a:solidFill>
-              <a:effectLst/>
-              <a:latin typeface="Times New Roman" panose="02020603050405020304" pitchFamily="18" charset="0"/>
-              <a:cs typeface="Times New Roman" panose="02020603050405020304" pitchFamily="18" charset="0"/>
-            </a:endParaRPr>
-          </a:p>
-          <a:p>
-            <a:pPr marL="0" marR="0" lvl="0" indent="0" algn="l" defTabSz="914400" rtl="0" eaLnBrk="0" fontAlgn="base" latinLnBrk="0" hangingPunct="0">
-              <a:lnSpc>
-                <a:spcPct val="150000"/>
-              </a:lnSpc>
-              <a:spcBef>
-                <a:spcPct val="0"/>
-              </a:spcBef>
-              <a:spcAft>
-                <a:spcPct val="0"/>
-              </a:spcAft>
-              <a:buClrTx/>
-              <a:buSzTx/>
-              <a:tabLst/>
-            </a:pPr>
-            <a:r>
-              <a:rPr kumimoji="0" lang="en-US" altLang="en-US" sz="1600" b="1" i="0" u="none" strike="noStrike" cap="none" normalizeH="0" baseline="0" dirty="0">
-                <a:ln>
-                  <a:noFill/>
-                </a:ln>
-                <a:solidFill>
-                  <a:schemeClr val="tx1"/>
-                </a:solidFill>
-                <a:effectLst/>
-                <a:latin typeface="Times New Roman" panose="02020603050405020304" pitchFamily="18" charset="0"/>
-                <a:cs typeface="Times New Roman" panose="02020603050405020304" pitchFamily="18" charset="0"/>
-              </a:rPr>
-              <a:t>[2] An End‑to‑End Automated License Plate Recognition System Using YOLO</a:t>
-            </a:r>
-            <a:r>
-              <a:rPr kumimoji="0" lang="en-US" altLang="en-US" sz="1600" i="0" u="none" strike="noStrike" cap="none" normalizeH="0" baseline="0" dirty="0">
-                <a:ln>
-                  <a:noFill/>
-                </a:ln>
-                <a:solidFill>
-                  <a:schemeClr val="tx1"/>
-                </a:solidFill>
-                <a:effectLst/>
-                <a:latin typeface="Times New Roman" panose="02020603050405020304" pitchFamily="18" charset="0"/>
-                <a:cs typeface="Times New Roman" panose="02020603050405020304" pitchFamily="18" charset="0"/>
-              </a:rPr>
-              <a:t>: </a:t>
-            </a:r>
-          </a:p>
-          <a:p>
-            <a:pPr marL="0" marR="0" lvl="0" indent="0" algn="l" defTabSz="914400" rtl="0" eaLnBrk="0" fontAlgn="base" latinLnBrk="0" hangingPunct="0">
-              <a:lnSpc>
-                <a:spcPct val="150000"/>
-              </a:lnSpc>
-              <a:spcBef>
-                <a:spcPct val="0"/>
-              </a:spcBef>
-              <a:spcAft>
-                <a:spcPct val="0"/>
-              </a:spcAft>
-              <a:buClrTx/>
-              <a:buSzTx/>
-              <a:tabLst/>
-            </a:pPr>
-            <a:r>
-              <a:rPr kumimoji="0" lang="en-US" altLang="en-US" sz="1600" b="0" i="0" u="none" strike="noStrike" cap="none" normalizeH="0" baseline="0" dirty="0">
-                <a:ln>
-                  <a:noFill/>
-                </a:ln>
-                <a:solidFill>
-                  <a:schemeClr val="tx1"/>
-                </a:solidFill>
-                <a:effectLst/>
-                <a:latin typeface="Times New Roman" panose="02020603050405020304" pitchFamily="18" charset="0"/>
-                <a:cs typeface="Times New Roman" panose="02020603050405020304" pitchFamily="18" charset="0"/>
-                <a:hlinkClick r:id="rId3"/>
-              </a:rPr>
-              <a:t>https://www.mdpi.com/1424-8220/22/23/9477</a:t>
-            </a:r>
-            <a:r>
-              <a:rPr kumimoji="0" lang="en-US" altLang="en-US" sz="1600" b="0" i="0" u="none" strike="noStrike" cap="none" normalizeH="0" baseline="0" dirty="0">
-                <a:ln>
-                  <a:noFill/>
-                </a:ln>
-                <a:solidFill>
-                  <a:schemeClr val="tx1"/>
-                </a:solidFill>
-                <a:effectLst/>
-                <a:latin typeface="Times New Roman" panose="02020603050405020304" pitchFamily="18" charset="0"/>
-                <a:cs typeface="Times New Roman" panose="02020603050405020304" pitchFamily="18" charset="0"/>
-              </a:rPr>
-              <a:t> </a:t>
-            </a:r>
-            <a:r>
-              <a:rPr kumimoji="0" lang="en-US" altLang="en-US" sz="1600" b="0" i="0" u="none" strike="noStrike" cap="none" normalizeH="0" baseline="0" dirty="0">
-                <a:ln>
-                  <a:noFill/>
-                </a:ln>
-                <a:solidFill>
-                  <a:schemeClr val="tx1"/>
-                </a:solidFill>
-                <a:effectLst/>
-                <a:latin typeface="Times New Roman" panose="02020603050405020304" pitchFamily="18" charset="0"/>
-                <a:cs typeface="Times New Roman" panose="02020603050405020304" pitchFamily="18" charset="0"/>
-                <a:hlinkClick r:id="rId3"/>
-              </a:rPr>
-              <a:t>MDPI</a:t>
-            </a:r>
-            <a:endParaRPr kumimoji="0" lang="en-US" altLang="en-US" sz="1600" b="0" i="0" u="none" strike="noStrike" cap="none" normalizeH="0" baseline="0" dirty="0">
-              <a:ln>
-                <a:noFill/>
-              </a:ln>
-              <a:solidFill>
-                <a:schemeClr val="tx1"/>
-              </a:solidFill>
-              <a:effectLst/>
-              <a:latin typeface="Times New Roman" panose="02020603050405020304" pitchFamily="18" charset="0"/>
-              <a:cs typeface="Times New Roman" panose="02020603050405020304" pitchFamily="18" charset="0"/>
-            </a:endParaRPr>
-          </a:p>
-          <a:p>
-            <a:pPr marL="0" marR="0" lvl="0" indent="0" algn="l" defTabSz="914400" rtl="0" eaLnBrk="0" fontAlgn="base" latinLnBrk="0" hangingPunct="0">
-              <a:lnSpc>
-                <a:spcPct val="150000"/>
-              </a:lnSpc>
-              <a:spcBef>
-                <a:spcPct val="0"/>
-              </a:spcBef>
-              <a:spcAft>
-                <a:spcPct val="0"/>
-              </a:spcAft>
-              <a:buClrTx/>
-              <a:buSzTx/>
-              <a:tabLst/>
-            </a:pPr>
-            <a:r>
-              <a:rPr kumimoji="0" lang="en-US" altLang="en-US" sz="1600" b="1" i="0" u="none" strike="noStrike" cap="none" normalizeH="0" baseline="0" dirty="0">
-                <a:ln>
-                  <a:noFill/>
-                </a:ln>
-                <a:solidFill>
-                  <a:schemeClr val="tx1"/>
-                </a:solidFill>
-                <a:effectLst/>
-                <a:latin typeface="Times New Roman" panose="02020603050405020304" pitchFamily="18" charset="0"/>
-                <a:cs typeface="Times New Roman" panose="02020603050405020304" pitchFamily="18" charset="0"/>
-              </a:rPr>
-              <a:t>[3] Automatic Number Plate Recognition System (ANPR): </a:t>
-            </a:r>
-            <a:r>
-              <a:rPr kumimoji="0" lang="en-US" altLang="en-US" sz="1600" b="0" i="0" u="none" strike="noStrike" cap="none" normalizeH="0" baseline="0" dirty="0">
-                <a:ln>
-                  <a:noFill/>
-                </a:ln>
-                <a:solidFill>
-                  <a:schemeClr val="tx1"/>
-                </a:solidFill>
-                <a:effectLst/>
-                <a:latin typeface="Times New Roman" panose="02020603050405020304" pitchFamily="18" charset="0"/>
-                <a:cs typeface="Times New Roman" panose="02020603050405020304" pitchFamily="18" charset="0"/>
-              </a:rPr>
-              <a:t>A Survey — available PDF: </a:t>
-            </a:r>
-            <a:r>
-              <a:rPr kumimoji="0" lang="en-US" altLang="en-US" sz="1600" b="0" i="0" u="none" strike="noStrike" cap="none" normalizeH="0" baseline="0" dirty="0">
-                <a:ln>
-                  <a:noFill/>
-                </a:ln>
-                <a:solidFill>
-                  <a:schemeClr val="tx1"/>
-                </a:solidFill>
-                <a:effectLst/>
-                <a:latin typeface="Times New Roman" panose="02020603050405020304" pitchFamily="18" charset="0"/>
-                <a:cs typeface="Times New Roman" panose="02020603050405020304" pitchFamily="18" charset="0"/>
-                <a:hlinkClick r:id="rId4"/>
-              </a:rPr>
-              <a:t>https://research.ijcaonline.org/volume69/number9/pxc3887665.pdf</a:t>
-            </a:r>
-            <a:endParaRPr kumimoji="0" lang="en-US" altLang="en-US" sz="1600" b="0" i="0" u="none" strike="noStrike" cap="none" normalizeH="0" baseline="0" dirty="0">
-              <a:ln>
-                <a:noFill/>
-              </a:ln>
-              <a:solidFill>
-                <a:schemeClr val="tx1"/>
-              </a:solidFill>
-              <a:effectLst/>
-              <a:latin typeface="Times New Roman" panose="02020603050405020304" pitchFamily="18" charset="0"/>
-              <a:cs typeface="Times New Roman" panose="02020603050405020304" pitchFamily="18" charset="0"/>
-            </a:endParaRPr>
-          </a:p>
-        </p:txBody>
-      </p:sp>
     </p:spTree>
     <p:extLst>
       <p:ext uri="{BB962C8B-B14F-4D97-AF65-F5344CB8AC3E}">
-        <p14:creationId xmlns:p14="http://schemas.microsoft.com/office/powerpoint/2010/main" val="3916603957"/>
+        <p14:creationId xmlns:p14="http://schemas.microsoft.com/office/powerpoint/2010/main" val="3318188703"/>
+      </p:ext>
+    </p:extLst>
+  </p:cSld>
+  <p:clrMapOvr>
+    <a:masterClrMapping/>
+  </p:clrMapOvr>
+</p:sld>
+</file>
+
+<file path=ppt/slides/slide14.xml><?xml version="1.0" encoding="utf-8"?>
+<p:sld xmlns:a="http://schemas.openxmlformats.org/drawingml/2006/main" xmlns:r="http://schemas.openxmlformats.org/officeDocument/2006/relationships" xmlns:p="http://schemas.openxmlformats.org/presentationml/2006/main">
+  <p:cSld>
+    <p:spTree>
+      <p:nvGrpSpPr>
+        <p:cNvPr id="1" name=""/>
+        <p:cNvGrpSpPr/>
+        <p:nvPr/>
+      </p:nvGrpSpPr>
+      <p:grpSpPr>
+        <a:xfrm>
+          <a:off x="0" y="0"/>
+          <a:ext cx="0" cy="0"/>
+          <a:chOff x="0" y="0"/>
+          <a:chExt cx="0" cy="0"/>
+        </a:xfrm>
+      </p:grpSpPr>
+      <p:sp>
+        <p:nvSpPr>
+          <p:cNvPr id="2" name="Title 1">
+            <a:extLst>
+              <a:ext uri="{FF2B5EF4-FFF2-40B4-BE49-F238E27FC236}">
+                <a16:creationId xmlns:a16="http://schemas.microsoft.com/office/drawing/2014/main" id="{9EA41FA3-1CBB-B5F7-E9BC-075FBC77FAAB}"/>
+              </a:ext>
+            </a:extLst>
+          </p:cNvPr>
+          <p:cNvSpPr>
+            <a:spLocks noGrp="1"/>
+          </p:cNvSpPr>
+          <p:nvPr>
+            <p:ph type="title"/>
+          </p:nvPr>
+        </p:nvSpPr>
+        <p:spPr>
+          <a:xfrm>
+            <a:off x="838200" y="136525"/>
+            <a:ext cx="10515600" cy="1325563"/>
+          </a:xfrm>
+        </p:spPr>
+        <p:txBody>
+          <a:bodyPr>
+            <a:normAutofit/>
+          </a:bodyPr>
+          <a:lstStyle/>
+          <a:p>
+            <a:pPr algn="ctr"/>
+            <a:r>
+              <a:rPr lang="en-US" sz="3200" b="1" dirty="0">
+                <a:latin typeface="Georgia" panose="02040502050405020303" pitchFamily="18" charset="0"/>
+              </a:rPr>
+              <a:t>REFERENCES</a:t>
+            </a:r>
+            <a:endParaRPr lang="en-IN" sz="3200" b="1" dirty="0">
+              <a:latin typeface="Georgia" panose="02040502050405020303" pitchFamily="18" charset="0"/>
+            </a:endParaRPr>
+          </a:p>
+        </p:txBody>
+      </p:sp>
+      <p:sp>
+        <p:nvSpPr>
+          <p:cNvPr id="3" name="Content Placeholder 2">
+            <a:extLst>
+              <a:ext uri="{FF2B5EF4-FFF2-40B4-BE49-F238E27FC236}">
+                <a16:creationId xmlns:a16="http://schemas.microsoft.com/office/drawing/2014/main" id="{0171621A-2D4E-68B6-870E-A8B4046349C5}"/>
+              </a:ext>
+            </a:extLst>
+          </p:cNvPr>
+          <p:cNvSpPr>
+            <a:spLocks noGrp="1"/>
+          </p:cNvSpPr>
+          <p:nvPr>
+            <p:ph idx="1"/>
+          </p:nvPr>
+        </p:nvSpPr>
+        <p:spPr>
+          <a:xfrm>
+            <a:off x="838200" y="1462088"/>
+            <a:ext cx="10515600" cy="4351338"/>
+          </a:xfrm>
+        </p:spPr>
+        <p:txBody>
+          <a:bodyPr>
+            <a:noAutofit/>
+          </a:bodyPr>
+          <a:lstStyle/>
+          <a:p>
+            <a:pPr marL="0" indent="0">
+              <a:buNone/>
+            </a:pPr>
+            <a:r>
+              <a:rPr lang="en-IN" sz="1700" dirty="0">
+                <a:latin typeface="Georgia" panose="02040502050405020303" pitchFamily="18" charset="0"/>
+              </a:rPr>
+              <a:t>[1] Automatic Number Plate Recognition: A Detailed Survey of Relevant Algorithms :</a:t>
+            </a:r>
+            <a:br>
+              <a:rPr lang="en-IN" sz="1700" dirty="0">
+                <a:latin typeface="Georgia" panose="02040502050405020303" pitchFamily="18" charset="0"/>
+              </a:rPr>
+            </a:br>
+            <a:r>
+              <a:rPr lang="en-IN" sz="1700" dirty="0">
+                <a:latin typeface="Georgia" panose="02040502050405020303" pitchFamily="18" charset="0"/>
+                <a:hlinkClick r:id="rId2"/>
+              </a:rPr>
+              <a:t>https://pmc.ncbi.nlm.nih.gov/articles/PMC8123416/</a:t>
+            </a:r>
+            <a:endParaRPr lang="en-IN" sz="1700" dirty="0">
+              <a:latin typeface="Georgia" panose="02040502050405020303" pitchFamily="18" charset="0"/>
+            </a:endParaRPr>
+          </a:p>
+          <a:p>
+            <a:endParaRPr lang="en-IN" sz="1700" dirty="0">
+              <a:latin typeface="Georgia" panose="02040502050405020303" pitchFamily="18" charset="0"/>
+            </a:endParaRPr>
+          </a:p>
+          <a:p>
+            <a:pPr marL="0" indent="0">
+              <a:buNone/>
+            </a:pPr>
+            <a:r>
+              <a:rPr lang="en-IN" sz="1700" dirty="0">
+                <a:latin typeface="Georgia" panose="02040502050405020303" pitchFamily="18" charset="0"/>
+              </a:rPr>
+              <a:t>[2] Bangla License Plate Recognition Using Convolutional Neural Networks (CNN) :</a:t>
+            </a:r>
+            <a:br>
+              <a:rPr lang="en-IN" sz="1700" dirty="0">
+                <a:latin typeface="Georgia" panose="02040502050405020303" pitchFamily="18" charset="0"/>
+              </a:rPr>
+            </a:br>
+            <a:r>
+              <a:rPr lang="en-IN" sz="1700" dirty="0">
+                <a:latin typeface="Georgia" panose="02040502050405020303" pitchFamily="18" charset="0"/>
+                <a:hlinkClick r:id="rId3"/>
+              </a:rPr>
+              <a:t>https://arxiv.org/abs/1809.00905</a:t>
+            </a:r>
+            <a:endParaRPr lang="en-IN" sz="1700" dirty="0">
+              <a:latin typeface="Georgia" panose="02040502050405020303" pitchFamily="18" charset="0"/>
+            </a:endParaRPr>
+          </a:p>
+          <a:p>
+            <a:endParaRPr lang="en-IN" sz="1700" dirty="0">
+              <a:latin typeface="Georgia" panose="02040502050405020303" pitchFamily="18" charset="0"/>
+            </a:endParaRPr>
+          </a:p>
+          <a:p>
+            <a:pPr marL="0" indent="0">
+              <a:buNone/>
+            </a:pPr>
+            <a:r>
+              <a:rPr lang="en-IN" sz="1700" dirty="0">
+                <a:latin typeface="Georgia" panose="02040502050405020303" pitchFamily="18" charset="0"/>
+              </a:rPr>
+              <a:t>[3] Automatic License Plate Recognition System for Vehicles Using CNN :</a:t>
+            </a:r>
+            <a:br>
+              <a:rPr lang="en-IN" sz="1700" dirty="0">
+                <a:latin typeface="Georgia" panose="02040502050405020303" pitchFamily="18" charset="0"/>
+              </a:rPr>
+            </a:br>
+            <a:r>
+              <a:rPr lang="en-IN" sz="1700" dirty="0">
+                <a:latin typeface="Georgia" panose="02040502050405020303" pitchFamily="18" charset="0"/>
+                <a:hlinkClick r:id="rId4"/>
+              </a:rPr>
+              <a:t>https://www.techscience.com/cmc/v71n1/45359/html</a:t>
+            </a:r>
+            <a:endParaRPr lang="en-IN" sz="1700" dirty="0">
+              <a:latin typeface="Georgia" panose="02040502050405020303" pitchFamily="18" charset="0"/>
+            </a:endParaRPr>
+          </a:p>
+          <a:p>
+            <a:endParaRPr lang="en-IN" sz="1700" dirty="0">
+              <a:latin typeface="Georgia" panose="02040502050405020303" pitchFamily="18" charset="0"/>
+            </a:endParaRPr>
+          </a:p>
+          <a:p>
+            <a:pPr marL="0" indent="0">
+              <a:buNone/>
+            </a:pPr>
+            <a:r>
+              <a:rPr lang="en-IN" sz="1700" dirty="0">
+                <a:latin typeface="Georgia" panose="02040502050405020303" pitchFamily="18" charset="0"/>
+              </a:rPr>
+              <a:t>[4] A Robust Real-Time Automatic License Plate Recognition Based on the YOLO Detector :</a:t>
+            </a:r>
+            <a:br>
+              <a:rPr lang="en-IN" sz="1700" dirty="0">
+                <a:latin typeface="Georgia" panose="02040502050405020303" pitchFamily="18" charset="0"/>
+              </a:rPr>
+            </a:br>
+            <a:r>
+              <a:rPr lang="en-IN" sz="1700" dirty="0">
+                <a:latin typeface="Georgia" panose="02040502050405020303" pitchFamily="18" charset="0"/>
+                <a:hlinkClick r:id="rId5"/>
+              </a:rPr>
+              <a:t>https://arxiv.org/abs/1802.09567</a:t>
+            </a:r>
+            <a:endParaRPr lang="en-IN" sz="1700" dirty="0">
+              <a:latin typeface="Georgia" panose="02040502050405020303" pitchFamily="18" charset="0"/>
+            </a:endParaRPr>
+          </a:p>
+          <a:p>
+            <a:endParaRPr lang="en-IN" sz="1700" dirty="0">
+              <a:latin typeface="Georgia" panose="02040502050405020303" pitchFamily="18" charset="0"/>
+            </a:endParaRPr>
+          </a:p>
+          <a:p>
+            <a:pPr marL="0" indent="0">
+              <a:buNone/>
+            </a:pPr>
+            <a:r>
+              <a:rPr lang="en-IN" sz="1700" dirty="0">
+                <a:latin typeface="Georgia" panose="02040502050405020303" pitchFamily="18" charset="0"/>
+              </a:rPr>
+              <a:t>[5] An Efficient and Layout-Independent Automatic License Plate Recognition System Based on the YOLO Detector :</a:t>
+            </a:r>
+            <a:br>
+              <a:rPr lang="en-IN" sz="1700" dirty="0">
+                <a:latin typeface="Georgia" panose="02040502050405020303" pitchFamily="18" charset="0"/>
+              </a:rPr>
+            </a:br>
+            <a:r>
+              <a:rPr lang="en-IN" sz="1700" dirty="0">
+                <a:latin typeface="Georgia" panose="02040502050405020303" pitchFamily="18" charset="0"/>
+                <a:hlinkClick r:id="rId6"/>
+              </a:rPr>
+              <a:t>https://arxiv.org/abs/1909.01754</a:t>
+            </a:r>
+            <a:endParaRPr lang="en-IN" sz="1700" dirty="0">
+              <a:latin typeface="Georgia" panose="02040502050405020303" pitchFamily="18" charset="0"/>
+            </a:endParaRPr>
+          </a:p>
+          <a:p>
+            <a:endParaRPr lang="en-IN" sz="1700" dirty="0">
+              <a:latin typeface="Georgia" panose="02040502050405020303" pitchFamily="18" charset="0"/>
+            </a:endParaRPr>
+          </a:p>
+        </p:txBody>
+      </p:sp>
+      <p:sp>
+        <p:nvSpPr>
+          <p:cNvPr id="4" name="Slide Number Placeholder 3">
+            <a:extLst>
+              <a:ext uri="{FF2B5EF4-FFF2-40B4-BE49-F238E27FC236}">
+                <a16:creationId xmlns:a16="http://schemas.microsoft.com/office/drawing/2014/main" id="{DFD3CCC7-7130-1A41-3CA5-989C3A771E37}"/>
+              </a:ext>
+            </a:extLst>
+          </p:cNvPr>
+          <p:cNvSpPr>
+            <a:spLocks noGrp="1"/>
+          </p:cNvSpPr>
+          <p:nvPr>
+            <p:ph type="sldNum" sz="quarter" idx="12"/>
+          </p:nvPr>
+        </p:nvSpPr>
+        <p:spPr/>
+        <p:txBody>
+          <a:bodyPr/>
+          <a:lstStyle/>
+          <a:p>
+            <a:fld id="{97C92681-5E05-4BC6-8FED-AA8D56459978}" type="slidenum">
+              <a:rPr lang="en-IN" smtClean="0"/>
+              <a:t>14</a:t>
+            </a:fld>
+            <a:endParaRPr lang="en-IN"/>
+          </a:p>
+        </p:txBody>
+      </p:sp>
+    </p:spTree>
+    <p:extLst>
+      <p:ext uri="{BB962C8B-B14F-4D97-AF65-F5344CB8AC3E}">
+        <p14:creationId xmlns:p14="http://schemas.microsoft.com/office/powerpoint/2010/main" val="399669594"/>
       </p:ext>
     </p:extLst>
   </p:cSld>
@@ -6052,7 +6440,7 @@
           <p:cNvPr id="2" name="Title 1">
             <a:extLst>
               <a:ext uri="{FF2B5EF4-FFF2-40B4-BE49-F238E27FC236}">
-                <a16:creationId xmlns:a16="http://schemas.microsoft.com/office/drawing/2014/main" id="{39A2973B-A247-E265-B959-98113F36C150}"/>
+                <a16:creationId xmlns:a16="http://schemas.microsoft.com/office/drawing/2014/main" id="{DF7ADF90-DFDB-6C04-2F3E-75C20A6CCCA8}"/>
               </a:ext>
             </a:extLst>
           </p:cNvPr>
@@ -6065,8 +6453,8 @@
         </p:nvSpPr>
         <p:spPr>
           <a:xfrm>
-            <a:off x="425116" y="-79250"/>
-            <a:ext cx="10928684" cy="1401930"/>
+            <a:off x="838197" y="71635"/>
+            <a:ext cx="10515600" cy="1325563"/>
           </a:xfrm>
         </p:spPr>
         <p:txBody>
@@ -6078,282 +6466,1019 @@
             <a:pPr algn="ctr"/>
             <a:r>
               <a:rPr lang="en-US" sz="3200" b="1" dirty="0">
-                <a:latin typeface="Times New Roman" panose="02020603050405020304" pitchFamily="18" charset="0"/>
-                <a:cs typeface="Times New Roman" panose="02020603050405020304" pitchFamily="18" charset="0"/>
+                <a:latin typeface="Georgia" panose="02040502050405020303" pitchFamily="18" charset="0"/>
+                <a:ea typeface="Sans Serif Collection" panose="020B0502040504020204" pitchFamily="34" charset="0"/>
+                <a:cs typeface="Sans Serif Collection" panose="020B0502040504020204" pitchFamily="34" charset="0"/>
               </a:rPr>
               <a:t>INDEX</a:t>
             </a:r>
-            <a:endParaRPr lang="en-IN" sz="3200" dirty="0"/>
-          </a:p>
-        </p:txBody>
-      </p:sp>
-      <p:sp>
-        <p:nvSpPr>
-          <p:cNvPr id="3" name="Content Placeholder 2">
-            <a:extLst>
-              <a:ext uri="{FF2B5EF4-FFF2-40B4-BE49-F238E27FC236}">
-                <a16:creationId xmlns:a16="http://schemas.microsoft.com/office/drawing/2014/main" id="{4588BEAD-3D76-E026-C1D3-3840E2D820FB}"/>
-              </a:ext>
-            </a:extLst>
-          </p:cNvPr>
-          <p:cNvSpPr>
-            <a:spLocks noGrp="1"/>
-          </p:cNvSpPr>
+            <a:endParaRPr lang="en-IN" sz="3200" b="1" dirty="0">
+              <a:latin typeface="Georgia" panose="02040502050405020303" pitchFamily="18" charset="0"/>
+              <a:ea typeface="Sans Serif Collection" panose="020B0502040504020204" pitchFamily="34" charset="0"/>
+              <a:cs typeface="Sans Serif Collection" panose="020B0502040504020204" pitchFamily="34" charset="0"/>
+            </a:endParaRPr>
+          </a:p>
+        </p:txBody>
+      </p:sp>
+      <p:graphicFrame>
+        <p:nvGraphicFramePr>
+          <p:cNvPr id="5" name="Content Placeholder 4">
+            <a:extLst>
+              <a:ext uri="{FF2B5EF4-FFF2-40B4-BE49-F238E27FC236}">
+                <a16:creationId xmlns:a16="http://schemas.microsoft.com/office/drawing/2014/main" id="{6226C300-5766-FC50-BCB2-E7F21C2F18E9}"/>
+              </a:ext>
+            </a:extLst>
+          </p:cNvPr>
+          <p:cNvGraphicFramePr>
+            <a:graphicFrameLocks noGrp="1"/>
+          </p:cNvGraphicFramePr>
           <p:nvPr>
             <p:ph idx="1"/>
+            <p:extLst>
+              <p:ext uri="{D42A27DB-BD31-4B8C-83A1-F6EECF244321}">
+                <p14:modId xmlns:p14="http://schemas.microsoft.com/office/powerpoint/2010/main" val="3759563026"/>
+              </p:ext>
+            </p:extLst>
           </p:nvPr>
-        </p:nvSpPr>
-        <p:spPr>
-          <a:xfrm>
-            <a:off x="425116" y="1491048"/>
-            <a:ext cx="10515600" cy="4236735"/>
-          </a:xfrm>
-        </p:spPr>
-        <p:txBody>
-          <a:bodyPr>
-            <a:normAutofit fontScale="25000" lnSpcReduction="20000"/>
-          </a:bodyPr>
-          <a:lstStyle/>
-          <a:p>
-            <a:pPr marL="0" indent="0" algn="just">
-              <a:buNone/>
-            </a:pPr>
-            <a:r>
-              <a:rPr lang="en-IN" sz="8000" b="1" spc="-10" dirty="0">
-                <a:latin typeface="Times New Roman"/>
-                <a:cs typeface="Times New Roman"/>
-              </a:rPr>
-              <a:t>CONTENTS                                                                	      PAGE NO. </a:t>
-            </a:r>
-          </a:p>
-          <a:p>
-            <a:pPr marL="0" indent="0" algn="just">
-              <a:buNone/>
-            </a:pPr>
-            <a:endParaRPr lang="en-IN" sz="3200" dirty="0">
-              <a:latin typeface="Times New Roman"/>
-              <a:cs typeface="Times New Roman"/>
-            </a:endParaRPr>
-          </a:p>
-          <a:p>
-            <a:pPr marL="12700" indent="0" algn="just">
-              <a:lnSpc>
-                <a:spcPct val="100000"/>
-              </a:lnSpc>
-              <a:spcBef>
-                <a:spcPts val="95"/>
-              </a:spcBef>
-              <a:buNone/>
-              <a:tabLst>
-                <a:tab pos="354965" algn="l"/>
-              </a:tabLst>
-            </a:pPr>
-            <a:r>
-              <a:rPr lang="en-US" sz="7200" spc="-10" dirty="0">
-                <a:latin typeface="Times New Roman" panose="02020603050405020304" pitchFamily="18" charset="0"/>
-                <a:cs typeface="Times New Roman" panose="02020603050405020304" pitchFamily="18" charset="0"/>
-              </a:rPr>
-              <a:t>INTRODUCTION                                                                            	3</a:t>
-            </a:r>
-          </a:p>
-          <a:p>
-            <a:pPr marL="12700" indent="0" algn="just">
-              <a:lnSpc>
-                <a:spcPct val="100000"/>
-              </a:lnSpc>
-              <a:buNone/>
-              <a:tabLst>
-                <a:tab pos="354965" algn="l"/>
-              </a:tabLst>
-            </a:pPr>
-            <a:r>
-              <a:rPr lang="en-US" sz="7200" spc="-10" dirty="0">
-                <a:latin typeface="Times New Roman" panose="02020603050405020304" pitchFamily="18" charset="0"/>
-                <a:cs typeface="Times New Roman" panose="02020603050405020304" pitchFamily="18" charset="0"/>
-              </a:rPr>
-              <a:t>LITERATURE AND RESEARCH                                                  	4</a:t>
-            </a:r>
-          </a:p>
-          <a:p>
-            <a:pPr marL="12700" indent="0" algn="just">
-              <a:lnSpc>
-                <a:spcPct val="100000"/>
-              </a:lnSpc>
-              <a:buNone/>
-              <a:tabLst>
-                <a:tab pos="354965" algn="l"/>
-              </a:tabLst>
-            </a:pPr>
-            <a:r>
-              <a:rPr lang="en-US" sz="7200" spc="-10" dirty="0">
-                <a:latin typeface="Times New Roman" panose="02020603050405020304" pitchFamily="18" charset="0"/>
-                <a:cs typeface="Times New Roman" panose="02020603050405020304" pitchFamily="18" charset="0"/>
-              </a:rPr>
-              <a:t>PROBLEM STATEMENT                                                               	5</a:t>
-            </a:r>
-          </a:p>
-          <a:p>
-            <a:pPr marL="12700" indent="0" algn="just">
-              <a:lnSpc>
-                <a:spcPct val="100000"/>
-              </a:lnSpc>
-              <a:buNone/>
-              <a:tabLst>
-                <a:tab pos="354965" algn="l"/>
-              </a:tabLst>
-            </a:pPr>
-            <a:r>
-              <a:rPr lang="en-US" sz="7200" spc="-10" dirty="0">
-                <a:latin typeface="Times New Roman" panose="02020603050405020304" pitchFamily="18" charset="0"/>
-                <a:cs typeface="Times New Roman" panose="02020603050405020304" pitchFamily="18" charset="0"/>
-              </a:rPr>
-              <a:t>SOLUTION                                                                		6</a:t>
-            </a:r>
-          </a:p>
-          <a:p>
-            <a:pPr marL="12700" indent="0" algn="just">
-              <a:lnSpc>
-                <a:spcPct val="100000"/>
-              </a:lnSpc>
-              <a:buNone/>
-              <a:tabLst>
-                <a:tab pos="354965" algn="l"/>
-              </a:tabLst>
-            </a:pPr>
-            <a:r>
-              <a:rPr lang="en-US" sz="7200" spc="-10" dirty="0">
-                <a:latin typeface="Times New Roman" panose="02020603050405020304" pitchFamily="18" charset="0"/>
-                <a:cs typeface="Times New Roman" panose="02020603050405020304" pitchFamily="18" charset="0"/>
-              </a:rPr>
-              <a:t>OUTPUT                                                                             		7</a:t>
-            </a:r>
-          </a:p>
-          <a:p>
-            <a:pPr marL="12700" indent="0" algn="just">
-              <a:lnSpc>
-                <a:spcPct val="100000"/>
-              </a:lnSpc>
-              <a:buNone/>
-              <a:tabLst>
-                <a:tab pos="354965" algn="l"/>
-              </a:tabLst>
-            </a:pPr>
-            <a:r>
-              <a:rPr lang="en-US" sz="7200" spc="-10" dirty="0">
-                <a:latin typeface="Times New Roman" panose="02020603050405020304" pitchFamily="18" charset="0"/>
-                <a:cs typeface="Times New Roman" panose="02020603050405020304" pitchFamily="18" charset="0"/>
-              </a:rPr>
-              <a:t>MODEL PERFORMANCE					8</a:t>
-            </a:r>
-          </a:p>
-          <a:p>
-            <a:pPr marL="12700" indent="0" algn="just">
-              <a:lnSpc>
-                <a:spcPct val="100000"/>
-              </a:lnSpc>
-              <a:buNone/>
-              <a:tabLst>
-                <a:tab pos="354965" algn="l"/>
-              </a:tabLst>
-            </a:pPr>
-            <a:r>
-              <a:rPr lang="en-US" sz="7200" spc="-10" dirty="0">
-                <a:latin typeface="Times New Roman" panose="02020603050405020304" pitchFamily="18" charset="0"/>
-                <a:cs typeface="Times New Roman" panose="02020603050405020304" pitchFamily="18" charset="0"/>
-              </a:rPr>
-              <a:t>TECHNOLOGY STACK                                                                 	9                                                                                                         </a:t>
-            </a:r>
-          </a:p>
-          <a:p>
-            <a:pPr marL="12700" indent="0" algn="just">
-              <a:lnSpc>
-                <a:spcPct val="100000"/>
-              </a:lnSpc>
-              <a:buNone/>
-              <a:tabLst>
-                <a:tab pos="354965" algn="l"/>
-              </a:tabLst>
-            </a:pPr>
-            <a:r>
-              <a:rPr lang="en-US" sz="7200" dirty="0">
-                <a:latin typeface="Times New Roman" panose="02020603050405020304" pitchFamily="18" charset="0"/>
-                <a:cs typeface="Times New Roman" panose="02020603050405020304" pitchFamily="18" charset="0"/>
-              </a:rPr>
-              <a:t>CHALLENGES		                                    		10</a:t>
-            </a:r>
-          </a:p>
-          <a:p>
-            <a:pPr marL="12700" indent="0" algn="just">
-              <a:lnSpc>
-                <a:spcPct val="100000"/>
-              </a:lnSpc>
-              <a:buNone/>
-              <a:tabLst>
-                <a:tab pos="354965" algn="l"/>
-              </a:tabLst>
-            </a:pPr>
-            <a:r>
-              <a:rPr lang="en-US" sz="7200" spc="-10" dirty="0">
-                <a:latin typeface="Times New Roman" panose="02020603050405020304" pitchFamily="18" charset="0"/>
-                <a:cs typeface="Times New Roman" panose="02020603050405020304" pitchFamily="18" charset="0"/>
-              </a:rPr>
-              <a:t>FUTURE SCOPE			                                     	11</a:t>
-            </a:r>
-          </a:p>
-          <a:p>
-            <a:pPr marL="12700" indent="0" algn="just">
-              <a:lnSpc>
-                <a:spcPct val="100000"/>
-              </a:lnSpc>
-              <a:buNone/>
-              <a:tabLst>
-                <a:tab pos="354965" algn="l"/>
-              </a:tabLst>
-            </a:pPr>
-            <a:r>
-              <a:rPr lang="en-US" sz="7200" spc="-10" dirty="0">
-                <a:latin typeface="Times New Roman" panose="02020603050405020304" pitchFamily="18" charset="0"/>
-                <a:cs typeface="Times New Roman" panose="02020603050405020304" pitchFamily="18" charset="0"/>
-              </a:rPr>
-              <a:t>CONCLUSION                                                                            	12</a:t>
-            </a:r>
-          </a:p>
-          <a:p>
-            <a:pPr marL="12700" indent="0" algn="just">
-              <a:lnSpc>
-                <a:spcPct val="100000"/>
-              </a:lnSpc>
-              <a:buNone/>
-              <a:tabLst>
-                <a:tab pos="354965" algn="l"/>
-              </a:tabLst>
-            </a:pPr>
-            <a:r>
-              <a:rPr lang="en-US" sz="7200" spc="-10" dirty="0">
-                <a:latin typeface="Times New Roman" panose="02020603050405020304" pitchFamily="18" charset="0"/>
-                <a:cs typeface="Times New Roman" panose="02020603050405020304" pitchFamily="18" charset="0"/>
-              </a:rPr>
-              <a:t>REFERENCES                                                                             	13                                                                         </a:t>
-            </a:r>
-            <a:endParaRPr lang="en-IN" sz="7200" dirty="0">
-              <a:latin typeface="Times New Roman" panose="02020603050405020304" pitchFamily="18" charset="0"/>
-              <a:cs typeface="Times New Roman" panose="02020603050405020304" pitchFamily="18" charset="0"/>
-            </a:endParaRPr>
-          </a:p>
-          <a:p>
-            <a:endParaRPr lang="en-IN" dirty="0">
-              <a:latin typeface="Times New Roman" panose="02020603050405020304" pitchFamily="18" charset="0"/>
-              <a:cs typeface="Times New Roman" panose="02020603050405020304" pitchFamily="18" charset="0"/>
-            </a:endParaRPr>
-          </a:p>
-        </p:txBody>
-      </p:sp>
-      <p:sp>
-        <p:nvSpPr>
-          <p:cNvPr id="5" name="Slide Number Placeholder 4">
-            <a:extLst>
-              <a:ext uri="{FF2B5EF4-FFF2-40B4-BE49-F238E27FC236}">
-                <a16:creationId xmlns:a16="http://schemas.microsoft.com/office/drawing/2014/main" id="{0BD29CC8-1860-81AC-833F-FD134298E343}"/>
+        </p:nvGraphicFramePr>
+        <p:xfrm>
+          <a:off x="1499310" y="1397198"/>
+          <a:ext cx="9193380" cy="4875804"/>
+        </p:xfrm>
+        <a:graphic>
+          <a:graphicData uri="http://schemas.openxmlformats.org/drawingml/2006/table">
+            <a:tbl>
+              <a:tblPr firstRow="1" bandRow="1">
+                <a:tableStyleId>{8799B23B-EC83-4686-B30A-512413B5E67A}</a:tableStyleId>
+              </a:tblPr>
+              <a:tblGrid>
+                <a:gridCol w="974083">
+                  <a:extLst>
+                    <a:ext uri="{9D8B030D-6E8A-4147-A177-3AD203B41FA5}">
+                      <a16:colId xmlns:a16="http://schemas.microsoft.com/office/drawing/2014/main" val="1667298340"/>
+                    </a:ext>
+                  </a:extLst>
+                </a:gridCol>
+                <a:gridCol w="6801272">
+                  <a:extLst>
+                    <a:ext uri="{9D8B030D-6E8A-4147-A177-3AD203B41FA5}">
+                      <a16:colId xmlns:a16="http://schemas.microsoft.com/office/drawing/2014/main" val="1792528007"/>
+                    </a:ext>
+                  </a:extLst>
+                </a:gridCol>
+                <a:gridCol w="1418025">
+                  <a:extLst>
+                    <a:ext uri="{9D8B030D-6E8A-4147-A177-3AD203B41FA5}">
+                      <a16:colId xmlns:a16="http://schemas.microsoft.com/office/drawing/2014/main" val="1136664651"/>
+                    </a:ext>
+                  </a:extLst>
+                </a:gridCol>
+              </a:tblGrid>
+              <a:tr h="375132">
+                <a:tc>
+                  <a:txBody>
+                    <a:bodyPr/>
+                    <a:lstStyle/>
+                    <a:p>
+                      <a:pPr algn="ctr"/>
+                      <a:r>
+                        <a:rPr lang="en-US" sz="2000" dirty="0">
+                          <a:latin typeface="Georgia" panose="02040502050405020303" pitchFamily="18" charset="0"/>
+                          <a:ea typeface="Verdana" panose="020B0604030504040204" pitchFamily="34" charset="0"/>
+                          <a:cs typeface="Sans Serif Collection" panose="020B0502040504020204" pitchFamily="34" charset="0"/>
+                        </a:rPr>
+                        <a:t>S. No.</a:t>
+                      </a:r>
+                      <a:endParaRPr lang="en-IN" sz="2000" dirty="0">
+                        <a:latin typeface="Georgia" panose="02040502050405020303" pitchFamily="18" charset="0"/>
+                        <a:ea typeface="Verdana" panose="020B0604030504040204" pitchFamily="34" charset="0"/>
+                        <a:cs typeface="Sans Serif Collection" panose="020B0502040504020204" pitchFamily="34" charset="0"/>
+                      </a:endParaRPr>
+                    </a:p>
+                  </a:txBody>
+                  <a:tcPr anchor="ctr"/>
+                </a:tc>
+                <a:tc>
+                  <a:txBody>
+                    <a:bodyPr/>
+                    <a:lstStyle/>
+                    <a:p>
+                      <a:pPr algn="ctr"/>
+                      <a:r>
+                        <a:rPr lang="en-US" sz="2000" dirty="0">
+                          <a:latin typeface="Georgia" panose="02040502050405020303" pitchFamily="18" charset="0"/>
+                          <a:ea typeface="Verdana" panose="020B0604030504040204" pitchFamily="34" charset="0"/>
+                          <a:cs typeface="Sans Serif Collection" panose="020B0502040504020204" pitchFamily="34" charset="0"/>
+                        </a:rPr>
+                        <a:t>Content</a:t>
+                      </a:r>
+                      <a:endParaRPr lang="en-IN" sz="2000" dirty="0">
+                        <a:latin typeface="Georgia" panose="02040502050405020303" pitchFamily="18" charset="0"/>
+                        <a:ea typeface="Verdana" panose="020B0604030504040204" pitchFamily="34" charset="0"/>
+                        <a:cs typeface="Sans Serif Collection" panose="020B0502040504020204" pitchFamily="34" charset="0"/>
+                      </a:endParaRPr>
+                    </a:p>
+                  </a:txBody>
+                  <a:tcPr anchor="ctr"/>
+                </a:tc>
+                <a:tc>
+                  <a:txBody>
+                    <a:bodyPr/>
+                    <a:lstStyle/>
+                    <a:p>
+                      <a:pPr algn="ctr"/>
+                      <a:r>
+                        <a:rPr lang="en-US" sz="2000" dirty="0">
+                          <a:latin typeface="Georgia" panose="02040502050405020303" pitchFamily="18" charset="0"/>
+                          <a:ea typeface="Verdana" panose="020B0604030504040204" pitchFamily="34" charset="0"/>
+                          <a:cs typeface="Times New Roman" panose="02020603050405020304" pitchFamily="18" charset="0"/>
+                        </a:rPr>
+                        <a:t>Page No.</a:t>
+                      </a:r>
+                      <a:endParaRPr lang="en-IN" sz="2000" dirty="0">
+                        <a:latin typeface="Georgia" panose="02040502050405020303" pitchFamily="18" charset="0"/>
+                        <a:ea typeface="Verdana" panose="020B0604030504040204" pitchFamily="34" charset="0"/>
+                        <a:cs typeface="Times New Roman" panose="02020603050405020304" pitchFamily="18" charset="0"/>
+                      </a:endParaRPr>
+                    </a:p>
+                  </a:txBody>
+                  <a:tcPr anchor="ctr"/>
+                </a:tc>
+                <a:extLst>
+                  <a:ext uri="{0D108BD9-81ED-4DB2-BD59-A6C34878D82A}">
+                    <a16:rowId xmlns:a16="http://schemas.microsoft.com/office/drawing/2014/main" val="1752574096"/>
+                  </a:ext>
+                </a:extLst>
+              </a:tr>
+              <a:tr h="373297">
+                <a:tc>
+                  <a:txBody>
+                    <a:bodyPr/>
+                    <a:lstStyle/>
+                    <a:p>
+                      <a:pPr algn="ctr"/>
+                      <a:r>
+                        <a:rPr lang="en-US" sz="1600" dirty="0">
+                          <a:latin typeface="Georgia" panose="02040502050405020303" pitchFamily="18" charset="0"/>
+                          <a:ea typeface="Verdana" panose="020B0604030504040204" pitchFamily="34" charset="0"/>
+                          <a:cs typeface="Sans Serif Collection" panose="020B0502040504020204" pitchFamily="34" charset="0"/>
+                        </a:rPr>
+                        <a:t>1.</a:t>
+                      </a:r>
+                      <a:endParaRPr lang="en-IN" sz="1600" dirty="0">
+                        <a:latin typeface="Georgia" panose="02040502050405020303" pitchFamily="18" charset="0"/>
+                        <a:ea typeface="Verdana" panose="020B0604030504040204" pitchFamily="34" charset="0"/>
+                        <a:cs typeface="Sans Serif Collection" panose="020B0502040504020204" pitchFamily="34" charset="0"/>
+                      </a:endParaRPr>
+                    </a:p>
+                  </a:txBody>
+                  <a:tcPr anchor="ctr"/>
+                </a:tc>
+                <a:tc>
+                  <a:txBody>
+                    <a:bodyPr/>
+                    <a:lstStyle/>
+                    <a:p>
+                      <a:pPr algn="l"/>
+                      <a:r>
+                        <a:rPr lang="en-US" sz="1600" spc="-10" dirty="0">
+                          <a:latin typeface="Georgia" panose="02040502050405020303" pitchFamily="18" charset="0"/>
+                          <a:ea typeface="Verdana" panose="020B0604030504040204" pitchFamily="34" charset="0"/>
+                          <a:cs typeface="Sans Serif Collection" panose="020B0502040504020204" pitchFamily="34" charset="0"/>
+                        </a:rPr>
+                        <a:t>INTRODUCTION</a:t>
+                      </a:r>
+                      <a:endParaRPr lang="en-IN" sz="1600" dirty="0">
+                        <a:latin typeface="Georgia" panose="02040502050405020303" pitchFamily="18" charset="0"/>
+                        <a:ea typeface="Verdana" panose="020B0604030504040204" pitchFamily="34" charset="0"/>
+                        <a:cs typeface="Sans Serif Collection" panose="020B0502040504020204" pitchFamily="34" charset="0"/>
+                      </a:endParaRPr>
+                    </a:p>
+                  </a:txBody>
+                  <a:tcPr anchor="ctr"/>
+                </a:tc>
+                <a:tc>
+                  <a:txBody>
+                    <a:bodyPr/>
+                    <a:lstStyle/>
+                    <a:p>
+                      <a:pPr algn="ctr"/>
+                      <a:r>
+                        <a:rPr lang="en-IN" dirty="0">
+                          <a:latin typeface="Georgia" panose="02040502050405020303" pitchFamily="18" charset="0"/>
+                          <a:ea typeface="Verdana" panose="020B0604030504040204" pitchFamily="34" charset="0"/>
+                          <a:cs typeface="Times New Roman" panose="02020603050405020304" pitchFamily="18" charset="0"/>
+                        </a:rPr>
+                        <a:t>3</a:t>
+                      </a:r>
+                    </a:p>
+                  </a:txBody>
+                  <a:tcPr anchor="ctr"/>
+                </a:tc>
+                <a:extLst>
+                  <a:ext uri="{0D108BD9-81ED-4DB2-BD59-A6C34878D82A}">
+                    <a16:rowId xmlns:a16="http://schemas.microsoft.com/office/drawing/2014/main" val="3705631999"/>
+                  </a:ext>
+                </a:extLst>
+              </a:tr>
+              <a:tr h="373297">
+                <a:tc>
+                  <a:txBody>
+                    <a:bodyPr/>
+                    <a:lstStyle/>
+                    <a:p>
+                      <a:pPr algn="ctr"/>
+                      <a:r>
+                        <a:rPr lang="en-US" sz="1600" dirty="0">
+                          <a:latin typeface="Georgia" panose="02040502050405020303" pitchFamily="18" charset="0"/>
+                          <a:ea typeface="Verdana" panose="020B0604030504040204" pitchFamily="34" charset="0"/>
+                          <a:cs typeface="Sans Serif Collection" panose="020B0502040504020204" pitchFamily="34" charset="0"/>
+                        </a:rPr>
+                        <a:t>2.</a:t>
+                      </a:r>
+                      <a:endParaRPr lang="en-IN" sz="1600" dirty="0">
+                        <a:latin typeface="Georgia" panose="02040502050405020303" pitchFamily="18" charset="0"/>
+                        <a:ea typeface="Verdana" panose="020B0604030504040204" pitchFamily="34" charset="0"/>
+                        <a:cs typeface="Sans Serif Collection" panose="020B0502040504020204" pitchFamily="34" charset="0"/>
+                      </a:endParaRPr>
+                    </a:p>
+                  </a:txBody>
+                  <a:tcPr anchor="ctr"/>
+                </a:tc>
+                <a:tc>
+                  <a:txBody>
+                    <a:bodyPr/>
+                    <a:lstStyle/>
+                    <a:p>
+                      <a:pPr algn="l"/>
+                      <a:r>
+                        <a:rPr lang="en-US" sz="1600" spc="-10" dirty="0">
+                          <a:latin typeface="Georgia" panose="02040502050405020303" pitchFamily="18" charset="0"/>
+                          <a:ea typeface="Verdana" panose="020B0604030504040204" pitchFamily="34" charset="0"/>
+                          <a:cs typeface="Sans Serif Collection" panose="020B0502040504020204" pitchFamily="34" charset="0"/>
+                        </a:rPr>
+                        <a:t>RESEARCH OBJECTIVE</a:t>
+                      </a:r>
+                      <a:endParaRPr lang="en-IN" sz="1600" dirty="0">
+                        <a:latin typeface="Georgia" panose="02040502050405020303" pitchFamily="18" charset="0"/>
+                        <a:ea typeface="Verdana" panose="020B0604030504040204" pitchFamily="34" charset="0"/>
+                        <a:cs typeface="Sans Serif Collection" panose="020B0502040504020204" pitchFamily="34" charset="0"/>
+                      </a:endParaRPr>
+                    </a:p>
+                  </a:txBody>
+                  <a:tcPr anchor="ctr"/>
+                </a:tc>
+                <a:tc>
+                  <a:txBody>
+                    <a:bodyPr/>
+                    <a:lstStyle/>
+                    <a:p>
+                      <a:pPr algn="ctr"/>
+                      <a:r>
+                        <a:rPr lang="en-IN" dirty="0">
+                          <a:latin typeface="Georgia" panose="02040502050405020303" pitchFamily="18" charset="0"/>
+                          <a:ea typeface="Verdana" panose="020B0604030504040204" pitchFamily="34" charset="0"/>
+                          <a:cs typeface="Times New Roman" panose="02020603050405020304" pitchFamily="18" charset="0"/>
+                        </a:rPr>
+                        <a:t>4</a:t>
+                      </a:r>
+                    </a:p>
+                  </a:txBody>
+                  <a:tcPr anchor="ctr"/>
+                </a:tc>
+                <a:extLst>
+                  <a:ext uri="{0D108BD9-81ED-4DB2-BD59-A6C34878D82A}">
+                    <a16:rowId xmlns:a16="http://schemas.microsoft.com/office/drawing/2014/main" val="1382621442"/>
+                  </a:ext>
+                </a:extLst>
+              </a:tr>
+              <a:tr h="373297">
+                <a:tc>
+                  <a:txBody>
+                    <a:bodyPr/>
+                    <a:lstStyle/>
+                    <a:p>
+                      <a:pPr algn="ctr"/>
+                      <a:r>
+                        <a:rPr lang="en-US" sz="1600" dirty="0">
+                          <a:latin typeface="Georgia" panose="02040502050405020303" pitchFamily="18" charset="0"/>
+                          <a:ea typeface="Verdana" panose="020B0604030504040204" pitchFamily="34" charset="0"/>
+                          <a:cs typeface="Sans Serif Collection" panose="020B0502040504020204" pitchFamily="34" charset="0"/>
+                        </a:rPr>
+                        <a:t>3.</a:t>
+                      </a:r>
+                      <a:endParaRPr lang="en-IN" sz="1600" dirty="0">
+                        <a:latin typeface="Georgia" panose="02040502050405020303" pitchFamily="18" charset="0"/>
+                        <a:ea typeface="Verdana" panose="020B0604030504040204" pitchFamily="34" charset="0"/>
+                        <a:cs typeface="Sans Serif Collection" panose="020B0502040504020204" pitchFamily="34" charset="0"/>
+                      </a:endParaRPr>
+                    </a:p>
+                  </a:txBody>
+                  <a:tcPr anchor="ctr"/>
+                </a:tc>
+                <a:tc>
+                  <a:txBody>
+                    <a:bodyPr/>
+                    <a:lstStyle/>
+                    <a:p>
+                      <a:pPr algn="l"/>
+                      <a:r>
+                        <a:rPr lang="en-US" sz="1600" spc="-10" dirty="0">
+                          <a:latin typeface="Georgia" panose="02040502050405020303" pitchFamily="18" charset="0"/>
+                          <a:ea typeface="Verdana" panose="020B0604030504040204" pitchFamily="34" charset="0"/>
+                          <a:cs typeface="Sans Serif Collection" panose="020B0502040504020204" pitchFamily="34" charset="0"/>
+                        </a:rPr>
+                        <a:t>LITERATURE SURVEY</a:t>
+                      </a:r>
+                      <a:endParaRPr lang="en-IN" sz="1600" dirty="0">
+                        <a:latin typeface="Georgia" panose="02040502050405020303" pitchFamily="18" charset="0"/>
+                        <a:ea typeface="Verdana" panose="020B0604030504040204" pitchFamily="34" charset="0"/>
+                        <a:cs typeface="Sans Serif Collection" panose="020B0502040504020204" pitchFamily="34" charset="0"/>
+                      </a:endParaRPr>
+                    </a:p>
+                  </a:txBody>
+                  <a:tcPr anchor="ctr"/>
+                </a:tc>
+                <a:tc>
+                  <a:txBody>
+                    <a:bodyPr/>
+                    <a:lstStyle/>
+                    <a:p>
+                      <a:pPr algn="ctr"/>
+                      <a:r>
+                        <a:rPr lang="en-IN" dirty="0">
+                          <a:latin typeface="Georgia" panose="02040502050405020303" pitchFamily="18" charset="0"/>
+                          <a:ea typeface="Verdana" panose="020B0604030504040204" pitchFamily="34" charset="0"/>
+                          <a:cs typeface="Times New Roman" panose="02020603050405020304" pitchFamily="18" charset="0"/>
+                        </a:rPr>
+                        <a:t>5</a:t>
+                      </a:r>
+                    </a:p>
+                  </a:txBody>
+                  <a:tcPr anchor="ctr"/>
+                </a:tc>
+                <a:extLst>
+                  <a:ext uri="{0D108BD9-81ED-4DB2-BD59-A6C34878D82A}">
+                    <a16:rowId xmlns:a16="http://schemas.microsoft.com/office/drawing/2014/main" val="68421489"/>
+                  </a:ext>
+                </a:extLst>
+              </a:tr>
+              <a:tr h="373297">
+                <a:tc>
+                  <a:txBody>
+                    <a:bodyPr/>
+                    <a:lstStyle/>
+                    <a:p>
+                      <a:pPr algn="ctr"/>
+                      <a:r>
+                        <a:rPr lang="en-US" sz="1600" dirty="0">
+                          <a:latin typeface="Georgia" panose="02040502050405020303" pitchFamily="18" charset="0"/>
+                          <a:ea typeface="Verdana" panose="020B0604030504040204" pitchFamily="34" charset="0"/>
+                          <a:cs typeface="Sans Serif Collection" panose="020B0502040504020204" pitchFamily="34" charset="0"/>
+                        </a:rPr>
+                        <a:t>4.</a:t>
+                      </a:r>
+                      <a:endParaRPr lang="en-IN" sz="1600" dirty="0">
+                        <a:latin typeface="Georgia" panose="02040502050405020303" pitchFamily="18" charset="0"/>
+                        <a:ea typeface="Verdana" panose="020B0604030504040204" pitchFamily="34" charset="0"/>
+                        <a:cs typeface="Sans Serif Collection" panose="020B0502040504020204" pitchFamily="34" charset="0"/>
+                      </a:endParaRPr>
+                    </a:p>
+                  </a:txBody>
+                  <a:tcPr anchor="ctr"/>
+                </a:tc>
+                <a:tc>
+                  <a:txBody>
+                    <a:bodyPr/>
+                    <a:lstStyle/>
+                    <a:p>
+                      <a:pPr algn="l"/>
+                      <a:r>
+                        <a:rPr lang="en-US" sz="1600" dirty="0">
+                          <a:latin typeface="Georgia" panose="02040502050405020303" pitchFamily="18" charset="0"/>
+                          <a:ea typeface="Verdana" panose="020B0604030504040204" pitchFamily="34" charset="0"/>
+                          <a:cs typeface="Sans Serif Collection" panose="020B0502040504020204" pitchFamily="34" charset="0"/>
+                        </a:rPr>
+                        <a:t>PROBLEM STATEMENT</a:t>
+                      </a:r>
+                      <a:endParaRPr lang="en-IN" sz="1600" dirty="0">
+                        <a:latin typeface="Georgia" panose="02040502050405020303" pitchFamily="18" charset="0"/>
+                        <a:ea typeface="Verdana" panose="020B0604030504040204" pitchFamily="34" charset="0"/>
+                        <a:cs typeface="Sans Serif Collection" panose="020B0502040504020204" pitchFamily="34" charset="0"/>
+                      </a:endParaRPr>
+                    </a:p>
+                  </a:txBody>
+                  <a:tcPr anchor="ctr"/>
+                </a:tc>
+                <a:tc>
+                  <a:txBody>
+                    <a:bodyPr/>
+                    <a:lstStyle/>
+                    <a:p>
+                      <a:pPr algn="ctr"/>
+                      <a:r>
+                        <a:rPr lang="en-IN" dirty="0">
+                          <a:latin typeface="Georgia" panose="02040502050405020303" pitchFamily="18" charset="0"/>
+                          <a:ea typeface="Verdana" panose="020B0604030504040204" pitchFamily="34" charset="0"/>
+                          <a:cs typeface="Times New Roman" panose="02020603050405020304" pitchFamily="18" charset="0"/>
+                        </a:rPr>
+                        <a:t>6</a:t>
+                      </a:r>
+                    </a:p>
+                  </a:txBody>
+                  <a:tcPr anchor="ctr"/>
+                </a:tc>
+                <a:extLst>
+                  <a:ext uri="{0D108BD9-81ED-4DB2-BD59-A6C34878D82A}">
+                    <a16:rowId xmlns:a16="http://schemas.microsoft.com/office/drawing/2014/main" val="179470742"/>
+                  </a:ext>
+                </a:extLst>
+              </a:tr>
+              <a:tr h="373297">
+                <a:tc>
+                  <a:txBody>
+                    <a:bodyPr/>
+                    <a:lstStyle/>
+                    <a:p>
+                      <a:pPr algn="ctr"/>
+                      <a:r>
+                        <a:rPr lang="en-US" sz="1600" dirty="0">
+                          <a:latin typeface="Georgia" panose="02040502050405020303" pitchFamily="18" charset="0"/>
+                          <a:ea typeface="Verdana" panose="020B0604030504040204" pitchFamily="34" charset="0"/>
+                          <a:cs typeface="Sans Serif Collection" panose="020B0502040504020204" pitchFamily="34" charset="0"/>
+                        </a:rPr>
+                        <a:t>5.</a:t>
+                      </a:r>
+                      <a:endParaRPr lang="en-IN" sz="1600" dirty="0">
+                        <a:latin typeface="Georgia" panose="02040502050405020303" pitchFamily="18" charset="0"/>
+                        <a:ea typeface="Verdana" panose="020B0604030504040204" pitchFamily="34" charset="0"/>
+                        <a:cs typeface="Sans Serif Collection" panose="020B0502040504020204" pitchFamily="34" charset="0"/>
+                      </a:endParaRPr>
+                    </a:p>
+                  </a:txBody>
+                  <a:tcPr anchor="ctr"/>
+                </a:tc>
+                <a:tc>
+                  <a:txBody>
+                    <a:bodyPr/>
+                    <a:lstStyle/>
+                    <a:p>
+                      <a:pPr algn="l"/>
+                      <a:r>
+                        <a:rPr lang="en-US" sz="1600" dirty="0">
+                          <a:latin typeface="Georgia" panose="02040502050405020303" pitchFamily="18" charset="0"/>
+                          <a:ea typeface="Verdana" panose="020B0604030504040204" pitchFamily="34" charset="0"/>
+                          <a:cs typeface="Sans Serif Collection" panose="020B0502040504020204" pitchFamily="34" charset="0"/>
+                        </a:rPr>
+                        <a:t>PROPOSED METHODOLOGY</a:t>
+                      </a:r>
+                      <a:endParaRPr lang="en-IN" sz="1600" dirty="0">
+                        <a:latin typeface="Georgia" panose="02040502050405020303" pitchFamily="18" charset="0"/>
+                        <a:ea typeface="Verdana" panose="020B0604030504040204" pitchFamily="34" charset="0"/>
+                        <a:cs typeface="Sans Serif Collection" panose="020B0502040504020204" pitchFamily="34" charset="0"/>
+                      </a:endParaRPr>
+                    </a:p>
+                  </a:txBody>
+                  <a:tcPr anchor="ctr"/>
+                </a:tc>
+                <a:tc>
+                  <a:txBody>
+                    <a:bodyPr/>
+                    <a:lstStyle/>
+                    <a:p>
+                      <a:pPr algn="ctr"/>
+                      <a:r>
+                        <a:rPr lang="en-IN" dirty="0">
+                          <a:latin typeface="Georgia" panose="02040502050405020303" pitchFamily="18" charset="0"/>
+                          <a:ea typeface="Verdana" panose="020B0604030504040204" pitchFamily="34" charset="0"/>
+                          <a:cs typeface="Times New Roman" panose="02020603050405020304" pitchFamily="18" charset="0"/>
+                        </a:rPr>
+                        <a:t>7</a:t>
+                      </a:r>
+                    </a:p>
+                  </a:txBody>
+                  <a:tcPr anchor="ctr"/>
+                </a:tc>
+                <a:extLst>
+                  <a:ext uri="{0D108BD9-81ED-4DB2-BD59-A6C34878D82A}">
+                    <a16:rowId xmlns:a16="http://schemas.microsoft.com/office/drawing/2014/main" val="1536743710"/>
+                  </a:ext>
+                </a:extLst>
+              </a:tr>
+              <a:tr h="373297">
+                <a:tc>
+                  <a:txBody>
+                    <a:bodyPr/>
+                    <a:lstStyle/>
+                    <a:p>
+                      <a:pPr algn="ctr"/>
+                      <a:r>
+                        <a:rPr lang="en-US" sz="1600" dirty="0">
+                          <a:latin typeface="Georgia" panose="02040502050405020303" pitchFamily="18" charset="0"/>
+                          <a:ea typeface="Verdana" panose="020B0604030504040204" pitchFamily="34" charset="0"/>
+                          <a:cs typeface="Sans Serif Collection" panose="020B0502040504020204" pitchFamily="34" charset="0"/>
+                        </a:rPr>
+                        <a:t>6.</a:t>
+                      </a:r>
+                      <a:endParaRPr lang="en-IN" sz="1600" dirty="0">
+                        <a:latin typeface="Georgia" panose="02040502050405020303" pitchFamily="18" charset="0"/>
+                        <a:ea typeface="Verdana" panose="020B0604030504040204" pitchFamily="34" charset="0"/>
+                        <a:cs typeface="Sans Serif Collection" panose="020B0502040504020204" pitchFamily="34" charset="0"/>
+                      </a:endParaRPr>
+                    </a:p>
+                  </a:txBody>
+                  <a:tcPr anchor="ctr"/>
+                </a:tc>
+                <a:tc>
+                  <a:txBody>
+                    <a:bodyPr/>
+                    <a:lstStyle/>
+                    <a:p>
+                      <a:pPr algn="l"/>
+                      <a:r>
+                        <a:rPr lang="en-US" sz="1600" dirty="0">
+                          <a:latin typeface="Georgia" panose="02040502050405020303" pitchFamily="18" charset="0"/>
+                          <a:ea typeface="Verdana" panose="020B0604030504040204" pitchFamily="34" charset="0"/>
+                          <a:cs typeface="Sans Serif Collection" panose="020B0502040504020204" pitchFamily="34" charset="0"/>
+                        </a:rPr>
+                        <a:t>DATASET DESCRIPTION</a:t>
+                      </a:r>
+                      <a:endParaRPr lang="en-IN" sz="1600" dirty="0">
+                        <a:latin typeface="Georgia" panose="02040502050405020303" pitchFamily="18" charset="0"/>
+                        <a:ea typeface="Verdana" panose="020B0604030504040204" pitchFamily="34" charset="0"/>
+                        <a:cs typeface="Sans Serif Collection" panose="020B0502040504020204" pitchFamily="34" charset="0"/>
+                      </a:endParaRPr>
+                    </a:p>
+                  </a:txBody>
+                  <a:tcPr anchor="ctr"/>
+                </a:tc>
+                <a:tc>
+                  <a:txBody>
+                    <a:bodyPr/>
+                    <a:lstStyle/>
+                    <a:p>
+                      <a:pPr algn="ctr"/>
+                      <a:r>
+                        <a:rPr lang="en-IN" dirty="0">
+                          <a:latin typeface="Georgia" panose="02040502050405020303" pitchFamily="18" charset="0"/>
+                          <a:ea typeface="Verdana" panose="020B0604030504040204" pitchFamily="34" charset="0"/>
+                          <a:cs typeface="Times New Roman" panose="02020603050405020304" pitchFamily="18" charset="0"/>
+                        </a:rPr>
+                        <a:t>8</a:t>
+                      </a:r>
+                    </a:p>
+                  </a:txBody>
+                  <a:tcPr anchor="ctr"/>
+                </a:tc>
+                <a:extLst>
+                  <a:ext uri="{0D108BD9-81ED-4DB2-BD59-A6C34878D82A}">
+                    <a16:rowId xmlns:a16="http://schemas.microsoft.com/office/drawing/2014/main" val="487001276"/>
+                  </a:ext>
+                </a:extLst>
+              </a:tr>
+              <a:tr h="373297">
+                <a:tc>
+                  <a:txBody>
+                    <a:bodyPr/>
+                    <a:lstStyle/>
+                    <a:p>
+                      <a:pPr algn="ctr"/>
+                      <a:r>
+                        <a:rPr lang="en-US" sz="1600" dirty="0">
+                          <a:latin typeface="Georgia" panose="02040502050405020303" pitchFamily="18" charset="0"/>
+                          <a:ea typeface="Verdana" panose="020B0604030504040204" pitchFamily="34" charset="0"/>
+                          <a:cs typeface="Sans Serif Collection" panose="020B0502040504020204" pitchFamily="34" charset="0"/>
+                        </a:rPr>
+                        <a:t>7.</a:t>
+                      </a:r>
+                      <a:endParaRPr lang="en-IN" sz="1600" dirty="0">
+                        <a:latin typeface="Georgia" panose="02040502050405020303" pitchFamily="18" charset="0"/>
+                        <a:ea typeface="Verdana" panose="020B0604030504040204" pitchFamily="34" charset="0"/>
+                        <a:cs typeface="Sans Serif Collection" panose="020B0502040504020204" pitchFamily="34" charset="0"/>
+                      </a:endParaRPr>
+                    </a:p>
+                  </a:txBody>
+                  <a:tcPr anchor="ctr"/>
+                </a:tc>
+                <a:tc>
+                  <a:txBody>
+                    <a:bodyPr/>
+                    <a:lstStyle/>
+                    <a:p>
+                      <a:pPr marL="0" marR="0" lvl="0" indent="0" algn="l" defTabSz="914400" rtl="0" eaLnBrk="1" fontAlgn="auto" latinLnBrk="0" hangingPunct="1">
+                        <a:lnSpc>
+                          <a:spcPct val="100000"/>
+                        </a:lnSpc>
+                        <a:spcBef>
+                          <a:spcPts val="0"/>
+                        </a:spcBef>
+                        <a:spcAft>
+                          <a:spcPts val="0"/>
+                        </a:spcAft>
+                        <a:buClrTx/>
+                        <a:buSzTx/>
+                        <a:buFontTx/>
+                        <a:buNone/>
+                        <a:tabLst/>
+                        <a:defRPr/>
+                      </a:pPr>
+                      <a:r>
+                        <a:rPr lang="en-US" sz="1600" dirty="0">
+                          <a:latin typeface="Georgia" panose="02040502050405020303" pitchFamily="18" charset="0"/>
+                          <a:ea typeface="Verdana" panose="020B0604030504040204" pitchFamily="34" charset="0"/>
+                          <a:cs typeface="Sans Serif Collection" panose="020B0502040504020204" pitchFamily="34" charset="0"/>
+                        </a:rPr>
+                        <a:t>TECHNOLOGY STACK</a:t>
+                      </a:r>
+                      <a:endParaRPr lang="en-IN" sz="1600" dirty="0">
+                        <a:latin typeface="Georgia" panose="02040502050405020303" pitchFamily="18" charset="0"/>
+                        <a:ea typeface="Verdana" panose="020B0604030504040204" pitchFamily="34" charset="0"/>
+                        <a:cs typeface="Sans Serif Collection" panose="020B0502040504020204" pitchFamily="34" charset="0"/>
+                      </a:endParaRPr>
+                    </a:p>
+                  </a:txBody>
+                  <a:tcPr anchor="ctr"/>
+                </a:tc>
+                <a:tc>
+                  <a:txBody>
+                    <a:bodyPr/>
+                    <a:lstStyle/>
+                    <a:p>
+                      <a:pPr algn="ctr"/>
+                      <a:r>
+                        <a:rPr lang="en-IN" dirty="0">
+                          <a:latin typeface="Georgia" panose="02040502050405020303" pitchFamily="18" charset="0"/>
+                          <a:ea typeface="Verdana" panose="020B0604030504040204" pitchFamily="34" charset="0"/>
+                          <a:cs typeface="Times New Roman" panose="02020603050405020304" pitchFamily="18" charset="0"/>
+                        </a:rPr>
+                        <a:t>9</a:t>
+                      </a:r>
+                    </a:p>
+                  </a:txBody>
+                  <a:tcPr anchor="ctr"/>
+                </a:tc>
+                <a:extLst>
+                  <a:ext uri="{0D108BD9-81ED-4DB2-BD59-A6C34878D82A}">
+                    <a16:rowId xmlns:a16="http://schemas.microsoft.com/office/drawing/2014/main" val="667966436"/>
+                  </a:ext>
+                </a:extLst>
+              </a:tr>
+              <a:tr h="373297">
+                <a:tc>
+                  <a:txBody>
+                    <a:bodyPr/>
+                    <a:lstStyle/>
+                    <a:p>
+                      <a:pPr algn="ctr"/>
+                      <a:r>
+                        <a:rPr lang="en-US" sz="1600" dirty="0">
+                          <a:latin typeface="Georgia" panose="02040502050405020303" pitchFamily="18" charset="0"/>
+                          <a:ea typeface="Verdana" panose="020B0604030504040204" pitchFamily="34" charset="0"/>
+                          <a:cs typeface="Sans Serif Collection" panose="020B0502040504020204" pitchFamily="34" charset="0"/>
+                        </a:rPr>
+                        <a:t>8.</a:t>
+                      </a:r>
+                      <a:endParaRPr lang="en-IN" sz="1600" dirty="0">
+                        <a:latin typeface="Georgia" panose="02040502050405020303" pitchFamily="18" charset="0"/>
+                        <a:ea typeface="Verdana" panose="020B0604030504040204" pitchFamily="34" charset="0"/>
+                        <a:cs typeface="Sans Serif Collection" panose="020B0502040504020204" pitchFamily="34" charset="0"/>
+                      </a:endParaRPr>
+                    </a:p>
+                  </a:txBody>
+                  <a:tcPr anchor="ctr"/>
+                </a:tc>
+                <a:tc>
+                  <a:txBody>
+                    <a:bodyPr/>
+                    <a:lstStyle/>
+                    <a:p>
+                      <a:pPr marL="0" marR="0" lvl="0" indent="0" algn="l" defTabSz="914400" rtl="0" eaLnBrk="1" fontAlgn="auto" latinLnBrk="0" hangingPunct="1">
+                        <a:lnSpc>
+                          <a:spcPct val="100000"/>
+                        </a:lnSpc>
+                        <a:spcBef>
+                          <a:spcPts val="0"/>
+                        </a:spcBef>
+                        <a:spcAft>
+                          <a:spcPts val="0"/>
+                        </a:spcAft>
+                        <a:buClrTx/>
+                        <a:buSzTx/>
+                        <a:buFontTx/>
+                        <a:buNone/>
+                        <a:tabLst/>
+                        <a:defRPr/>
+                      </a:pPr>
+                      <a:r>
+                        <a:rPr lang="en-IN" sz="1600" dirty="0">
+                          <a:latin typeface="Georgia" panose="02040502050405020303" pitchFamily="18" charset="0"/>
+                          <a:ea typeface="Verdana" panose="020B0604030504040204" pitchFamily="34" charset="0"/>
+                          <a:cs typeface="Sans Serif Collection" panose="020B0502040504020204" pitchFamily="34" charset="0"/>
+                        </a:rPr>
+                        <a:t>MODEL PERFORMANCE</a:t>
+                      </a:r>
+                    </a:p>
+                  </a:txBody>
+                  <a:tcPr anchor="ctr"/>
+                </a:tc>
+                <a:tc>
+                  <a:txBody>
+                    <a:bodyPr/>
+                    <a:lstStyle/>
+                    <a:p>
+                      <a:pPr algn="ctr"/>
+                      <a:r>
+                        <a:rPr lang="en-IN" dirty="0">
+                          <a:latin typeface="Georgia" panose="02040502050405020303" pitchFamily="18" charset="0"/>
+                          <a:ea typeface="Verdana" panose="020B0604030504040204" pitchFamily="34" charset="0"/>
+                          <a:cs typeface="Times New Roman" panose="02020603050405020304" pitchFamily="18" charset="0"/>
+                        </a:rPr>
+                        <a:t>10</a:t>
+                      </a:r>
+                    </a:p>
+                  </a:txBody>
+                  <a:tcPr anchor="ctr"/>
+                </a:tc>
+                <a:extLst>
+                  <a:ext uri="{0D108BD9-81ED-4DB2-BD59-A6C34878D82A}">
+                    <a16:rowId xmlns:a16="http://schemas.microsoft.com/office/drawing/2014/main" val="3719809311"/>
+                  </a:ext>
+                </a:extLst>
+              </a:tr>
+              <a:tr h="373297">
+                <a:tc>
+                  <a:txBody>
+                    <a:bodyPr/>
+                    <a:lstStyle/>
+                    <a:p>
+                      <a:pPr algn="ctr"/>
+                      <a:r>
+                        <a:rPr lang="en-IN" sz="1600" dirty="0">
+                          <a:latin typeface="Georgia" panose="02040502050405020303" pitchFamily="18" charset="0"/>
+                          <a:ea typeface="Verdana" panose="020B0604030504040204" pitchFamily="34" charset="0"/>
+                          <a:cs typeface="Sans Serif Collection" panose="020B0502040504020204" pitchFamily="34" charset="0"/>
+                        </a:rPr>
+                        <a:t>9.</a:t>
+                      </a:r>
+                    </a:p>
+                  </a:txBody>
+                  <a:tcPr anchor="ctr"/>
+                </a:tc>
+                <a:tc>
+                  <a:txBody>
+                    <a:bodyPr/>
+                    <a:lstStyle/>
+                    <a:p>
+                      <a:pPr algn="l"/>
+                      <a:r>
+                        <a:rPr lang="en-IN" sz="1600" dirty="0">
+                          <a:latin typeface="Georgia" panose="02040502050405020303" pitchFamily="18" charset="0"/>
+                          <a:ea typeface="Verdana" panose="020B0604030504040204" pitchFamily="34" charset="0"/>
+                          <a:cs typeface="Sans Serif Collection" panose="020B0502040504020204" pitchFamily="34" charset="0"/>
+                        </a:rPr>
+                        <a:t>RESULT</a:t>
+                      </a:r>
+                    </a:p>
+                  </a:txBody>
+                  <a:tcPr anchor="ctr"/>
+                </a:tc>
+                <a:tc>
+                  <a:txBody>
+                    <a:bodyPr/>
+                    <a:lstStyle/>
+                    <a:p>
+                      <a:pPr algn="ctr"/>
+                      <a:r>
+                        <a:rPr lang="en-IN" dirty="0">
+                          <a:latin typeface="Georgia" panose="02040502050405020303" pitchFamily="18" charset="0"/>
+                          <a:ea typeface="Verdana" panose="020B0604030504040204" pitchFamily="34" charset="0"/>
+                          <a:cs typeface="Times New Roman" panose="02020603050405020304" pitchFamily="18" charset="0"/>
+                        </a:rPr>
+                        <a:t>11</a:t>
+                      </a:r>
+                    </a:p>
+                  </a:txBody>
+                  <a:tcPr anchor="ctr"/>
+                </a:tc>
+                <a:extLst>
+                  <a:ext uri="{0D108BD9-81ED-4DB2-BD59-A6C34878D82A}">
+                    <a16:rowId xmlns:a16="http://schemas.microsoft.com/office/drawing/2014/main" val="4151802931"/>
+                  </a:ext>
+                </a:extLst>
+              </a:tr>
+              <a:tr h="373297">
+                <a:tc>
+                  <a:txBody>
+                    <a:bodyPr/>
+                    <a:lstStyle/>
+                    <a:p>
+                      <a:pPr algn="ctr"/>
+                      <a:r>
+                        <a:rPr lang="en-IN" sz="1600" dirty="0">
+                          <a:latin typeface="Georgia" panose="02040502050405020303" pitchFamily="18" charset="0"/>
+                          <a:ea typeface="Verdana" panose="020B0604030504040204" pitchFamily="34" charset="0"/>
+                          <a:cs typeface="Sans Serif Collection" panose="020B0502040504020204" pitchFamily="34" charset="0"/>
+                        </a:rPr>
+                        <a:t>10.</a:t>
+                      </a:r>
+                    </a:p>
+                  </a:txBody>
+                  <a:tcPr anchor="ctr"/>
+                </a:tc>
+                <a:tc>
+                  <a:txBody>
+                    <a:bodyPr/>
+                    <a:lstStyle/>
+                    <a:p>
+                      <a:pPr algn="l"/>
+                      <a:r>
+                        <a:rPr lang="en-IN" sz="1600" dirty="0">
+                          <a:latin typeface="Georgia" panose="02040502050405020303" pitchFamily="18" charset="0"/>
+                          <a:ea typeface="Verdana" panose="020B0604030504040204" pitchFamily="34" charset="0"/>
+                          <a:cs typeface="Sans Serif Collection" panose="020B0502040504020204" pitchFamily="34" charset="0"/>
+                        </a:rPr>
+                        <a:t>LIMITATIONS OF PROPOSED SOLUTION</a:t>
+                      </a:r>
+                    </a:p>
+                  </a:txBody>
+                  <a:tcPr anchor="ctr"/>
+                </a:tc>
+                <a:tc>
+                  <a:txBody>
+                    <a:bodyPr/>
+                    <a:lstStyle/>
+                    <a:p>
+                      <a:pPr algn="ctr"/>
+                      <a:r>
+                        <a:rPr lang="en-IN" dirty="0">
+                          <a:latin typeface="Georgia" panose="02040502050405020303" pitchFamily="18" charset="0"/>
+                          <a:ea typeface="Verdana" panose="020B0604030504040204" pitchFamily="34" charset="0"/>
+                          <a:cs typeface="Times New Roman" panose="02020603050405020304" pitchFamily="18" charset="0"/>
+                        </a:rPr>
+                        <a:t>12</a:t>
+                      </a:r>
+                    </a:p>
+                  </a:txBody>
+                  <a:tcPr anchor="ctr"/>
+                </a:tc>
+                <a:extLst>
+                  <a:ext uri="{0D108BD9-81ED-4DB2-BD59-A6C34878D82A}">
+                    <a16:rowId xmlns:a16="http://schemas.microsoft.com/office/drawing/2014/main" val="1425314242"/>
+                  </a:ext>
+                </a:extLst>
+              </a:tr>
+              <a:tr h="373297">
+                <a:tc>
+                  <a:txBody>
+                    <a:bodyPr/>
+                    <a:lstStyle/>
+                    <a:p>
+                      <a:pPr algn="ctr"/>
+                      <a:r>
+                        <a:rPr lang="en-US" sz="1600" dirty="0">
+                          <a:latin typeface="Georgia" panose="02040502050405020303" pitchFamily="18" charset="0"/>
+                          <a:ea typeface="Verdana" panose="020B0604030504040204" pitchFamily="34" charset="0"/>
+                          <a:cs typeface="Sans Serif Collection" panose="020B0502040504020204" pitchFamily="34" charset="0"/>
+                        </a:rPr>
+                        <a:t>11.</a:t>
+                      </a:r>
+                      <a:endParaRPr lang="en-IN" sz="1600" dirty="0">
+                        <a:latin typeface="Georgia" panose="02040502050405020303" pitchFamily="18" charset="0"/>
+                        <a:ea typeface="Verdana" panose="020B0604030504040204" pitchFamily="34" charset="0"/>
+                        <a:cs typeface="Sans Serif Collection" panose="020B0502040504020204" pitchFamily="34" charset="0"/>
+                      </a:endParaRPr>
+                    </a:p>
+                  </a:txBody>
+                  <a:tcPr anchor="ctr"/>
+                </a:tc>
+                <a:tc>
+                  <a:txBody>
+                    <a:bodyPr/>
+                    <a:lstStyle/>
+                    <a:p>
+                      <a:pPr algn="l"/>
+                      <a:r>
+                        <a:rPr lang="en-US" sz="1600" dirty="0">
+                          <a:latin typeface="Georgia" panose="02040502050405020303" pitchFamily="18" charset="0"/>
+                          <a:ea typeface="Verdana" panose="020B0604030504040204" pitchFamily="34" charset="0"/>
+                          <a:cs typeface="Sans Serif Collection" panose="020B0502040504020204" pitchFamily="34" charset="0"/>
+                        </a:rPr>
+                        <a:t>CONCLUSION AND FUTURE SCOPE</a:t>
+                      </a:r>
+                      <a:endParaRPr lang="en-IN" sz="1600" dirty="0">
+                        <a:latin typeface="Georgia" panose="02040502050405020303" pitchFamily="18" charset="0"/>
+                        <a:ea typeface="Verdana" panose="020B0604030504040204" pitchFamily="34" charset="0"/>
+                        <a:cs typeface="Sans Serif Collection" panose="020B0502040504020204" pitchFamily="34" charset="0"/>
+                      </a:endParaRPr>
+                    </a:p>
+                  </a:txBody>
+                  <a:tcPr anchor="ctr"/>
+                </a:tc>
+                <a:tc>
+                  <a:txBody>
+                    <a:bodyPr/>
+                    <a:lstStyle/>
+                    <a:p>
+                      <a:pPr algn="ctr"/>
+                      <a:r>
+                        <a:rPr lang="en-IN" dirty="0">
+                          <a:latin typeface="Georgia" panose="02040502050405020303" pitchFamily="18" charset="0"/>
+                          <a:ea typeface="Verdana" panose="020B0604030504040204" pitchFamily="34" charset="0"/>
+                          <a:cs typeface="Times New Roman" panose="02020603050405020304" pitchFamily="18" charset="0"/>
+                        </a:rPr>
+                        <a:t>13</a:t>
+                      </a:r>
+                    </a:p>
+                  </a:txBody>
+                  <a:tcPr anchor="ctr"/>
+                </a:tc>
+                <a:extLst>
+                  <a:ext uri="{0D108BD9-81ED-4DB2-BD59-A6C34878D82A}">
+                    <a16:rowId xmlns:a16="http://schemas.microsoft.com/office/drawing/2014/main" val="446898042"/>
+                  </a:ext>
+                </a:extLst>
+              </a:tr>
+              <a:tr h="373297">
+                <a:tc>
+                  <a:txBody>
+                    <a:bodyPr/>
+                    <a:lstStyle/>
+                    <a:p>
+                      <a:pPr algn="ctr"/>
+                      <a:r>
+                        <a:rPr lang="en-US" sz="1600" dirty="0">
+                          <a:latin typeface="Georgia" panose="02040502050405020303" pitchFamily="18" charset="0"/>
+                          <a:ea typeface="Verdana" panose="020B0604030504040204" pitchFamily="34" charset="0"/>
+                          <a:cs typeface="Sans Serif Collection" panose="020B0502040504020204" pitchFamily="34" charset="0"/>
+                        </a:rPr>
+                        <a:t>12.</a:t>
+                      </a:r>
+                      <a:endParaRPr lang="en-IN" sz="1600" dirty="0">
+                        <a:latin typeface="Georgia" panose="02040502050405020303" pitchFamily="18" charset="0"/>
+                        <a:ea typeface="Verdana" panose="020B0604030504040204" pitchFamily="34" charset="0"/>
+                        <a:cs typeface="Sans Serif Collection" panose="020B0502040504020204" pitchFamily="34" charset="0"/>
+                      </a:endParaRPr>
+                    </a:p>
+                  </a:txBody>
+                  <a:tcPr anchor="ctr"/>
+                </a:tc>
+                <a:tc>
+                  <a:txBody>
+                    <a:bodyPr/>
+                    <a:lstStyle/>
+                    <a:p>
+                      <a:pPr algn="l"/>
+                      <a:r>
+                        <a:rPr lang="en-US" sz="1600" dirty="0">
+                          <a:latin typeface="Georgia" panose="02040502050405020303" pitchFamily="18" charset="0"/>
+                          <a:ea typeface="Verdana" panose="020B0604030504040204" pitchFamily="34" charset="0"/>
+                          <a:cs typeface="Sans Serif Collection" panose="020B0502040504020204" pitchFamily="34" charset="0"/>
+                        </a:rPr>
+                        <a:t>REFERENCES</a:t>
+                      </a:r>
+                      <a:endParaRPr lang="en-IN" sz="1600" dirty="0">
+                        <a:latin typeface="Georgia" panose="02040502050405020303" pitchFamily="18" charset="0"/>
+                        <a:ea typeface="Verdana" panose="020B0604030504040204" pitchFamily="34" charset="0"/>
+                        <a:cs typeface="Sans Serif Collection" panose="020B0502040504020204" pitchFamily="34" charset="0"/>
+                      </a:endParaRPr>
+                    </a:p>
+                  </a:txBody>
+                  <a:tcPr anchor="ctr"/>
+                </a:tc>
+                <a:tc>
+                  <a:txBody>
+                    <a:bodyPr/>
+                    <a:lstStyle/>
+                    <a:p>
+                      <a:pPr algn="ctr"/>
+                      <a:r>
+                        <a:rPr lang="en-IN" dirty="0">
+                          <a:latin typeface="Georgia" panose="02040502050405020303" pitchFamily="18" charset="0"/>
+                          <a:ea typeface="Verdana" panose="020B0604030504040204" pitchFamily="34" charset="0"/>
+                          <a:cs typeface="Times New Roman" panose="02020603050405020304" pitchFamily="18" charset="0"/>
+                        </a:rPr>
+                        <a:t>14</a:t>
+                      </a:r>
+                    </a:p>
+                  </a:txBody>
+                  <a:tcPr anchor="ctr"/>
+                </a:tc>
+                <a:extLst>
+                  <a:ext uri="{0D108BD9-81ED-4DB2-BD59-A6C34878D82A}">
+                    <a16:rowId xmlns:a16="http://schemas.microsoft.com/office/drawing/2014/main" val="3407561012"/>
+                  </a:ext>
+                </a:extLst>
+              </a:tr>
+            </a:tbl>
+          </a:graphicData>
+        </a:graphic>
+      </p:graphicFrame>
+      <p:sp>
+        <p:nvSpPr>
+          <p:cNvPr id="4" name="Slide Number Placeholder 3">
+            <a:extLst>
+              <a:ext uri="{FF2B5EF4-FFF2-40B4-BE49-F238E27FC236}">
+                <a16:creationId xmlns:a16="http://schemas.microsoft.com/office/drawing/2014/main" id="{D6A402EC-D9FE-21B3-815B-A782F6A9452F}"/>
               </a:ext>
             </a:extLst>
           </p:cNvPr>
@@ -6380,7 +7505,7 @@
     </p:spTree>
     <p:extLst>
       <p:ext uri="{BB962C8B-B14F-4D97-AF65-F5344CB8AC3E}">
-        <p14:creationId xmlns:p14="http://schemas.microsoft.com/office/powerpoint/2010/main" val="2226578215"/>
+        <p14:creationId xmlns:p14="http://schemas.microsoft.com/office/powerpoint/2010/main" val="1170700797"/>
       </p:ext>
     </p:extLst>
   </p:cSld>
@@ -6412,7 +7537,7 @@
           <p:cNvPr id="2" name="Title 1">
             <a:extLst>
               <a:ext uri="{FF2B5EF4-FFF2-40B4-BE49-F238E27FC236}">
-                <a16:creationId xmlns:a16="http://schemas.microsoft.com/office/drawing/2014/main" id="{C5AA367F-D3CD-6975-2BB6-7F7CC070AFEB}"/>
+                <a16:creationId xmlns:a16="http://schemas.microsoft.com/office/drawing/2014/main" id="{9965A78D-25B6-1CBD-7C32-99B797871375}"/>
               </a:ext>
             </a:extLst>
           </p:cNvPr>
@@ -6423,12 +7548,7 @@
             <p:ph type="title"/>
           </p:nvPr>
         </p:nvSpPr>
-        <p:spPr>
-          <a:xfrm>
-            <a:off x="441158" y="385011"/>
-            <a:ext cx="10912642" cy="1305677"/>
-          </a:xfrm>
-        </p:spPr>
+        <p:spPr/>
         <p:txBody>
           <a:bodyPr>
             <a:normAutofit/>
@@ -6438,12 +7558,13 @@
             <a:pPr algn="ctr"/>
             <a:r>
               <a:rPr lang="en-US" sz="3200" b="1" dirty="0">
-                <a:latin typeface="Times New Roman" panose="02020603050405020304" pitchFamily="18" charset="0"/>
-                <a:cs typeface="Times New Roman" panose="02020603050405020304" pitchFamily="18" charset="0"/>
+                <a:latin typeface="Georgia" panose="02040502050405020303" pitchFamily="18" charset="0"/>
               </a:rPr>
               <a:t>INTRODUCTION</a:t>
             </a:r>
-            <a:endParaRPr lang="en-IN" sz="3200" dirty="0"/>
+            <a:endParaRPr lang="en-IN" sz="3200" b="1" dirty="0">
+              <a:latin typeface="Georgia" panose="02040502050405020303" pitchFamily="18" charset="0"/>
+            </a:endParaRPr>
           </a:p>
         </p:txBody>
       </p:sp>
@@ -6452,7 +7573,7 @@
           <p:cNvPr id="3" name="Content Placeholder 2">
             <a:extLst>
               <a:ext uri="{FF2B5EF4-FFF2-40B4-BE49-F238E27FC236}">
-                <a16:creationId xmlns:a16="http://schemas.microsoft.com/office/drawing/2014/main" id="{4FC34A6D-0317-4CCF-71E8-B1586F2F0317}"/>
+                <a16:creationId xmlns:a16="http://schemas.microsoft.com/office/drawing/2014/main" id="{D6CBDB83-AE5C-99A1-70F8-28C370704C36}"/>
               </a:ext>
             </a:extLst>
           </p:cNvPr>
@@ -6465,8 +7586,8 @@
         </p:nvSpPr>
         <p:spPr>
           <a:xfrm>
-            <a:off x="441158" y="1938476"/>
-            <a:ext cx="10912642" cy="4677025"/>
+            <a:off x="838200" y="2005012"/>
+            <a:ext cx="10515600" cy="4351338"/>
           </a:xfrm>
         </p:spPr>
         <p:txBody>
@@ -6475,138 +7596,52 @@
           </a:bodyPr>
           <a:lstStyle/>
           <a:p>
-            <a:pPr>
-              <a:buFont typeface="Wingdings" panose="05000000000000000000" pitchFamily="2" charset="2"/>
-              <a:buChar char="Ø"/>
-            </a:pPr>
-            <a:r>
-              <a:rPr lang="en-US" sz="1950" b="1" dirty="0">
-                <a:latin typeface="Times New Roman" panose="02020603050405020304" pitchFamily="18" charset="0"/>
-                <a:cs typeface="Times New Roman" panose="02020603050405020304" pitchFamily="18" charset="0"/>
-              </a:rPr>
-              <a:t>What is </a:t>
-            </a:r>
-            <a:r>
-              <a:rPr lang="en-IN" sz="1950" b="1" dirty="0">
-                <a:latin typeface="Times New Roman" panose="02020603050405020304" pitchFamily="18" charset="0"/>
-                <a:cs typeface="Times New Roman" panose="02020603050405020304" pitchFamily="18" charset="0"/>
-              </a:rPr>
-              <a:t>Automatic License Plate Recognition (ALPR)</a:t>
-            </a:r>
-            <a:r>
-              <a:rPr lang="en-US" sz="1950" b="1" dirty="0">
-                <a:latin typeface="Times New Roman" panose="02020603050405020304" pitchFamily="18" charset="0"/>
-                <a:cs typeface="Times New Roman" panose="02020603050405020304" pitchFamily="18" charset="0"/>
-              </a:rPr>
-              <a:t>?</a:t>
-            </a:r>
-            <a:endParaRPr lang="en-US" sz="1950" dirty="0">
-              <a:latin typeface="Times New Roman" panose="02020603050405020304" pitchFamily="18" charset="0"/>
-              <a:cs typeface="Times New Roman" panose="02020603050405020304" pitchFamily="18" charset="0"/>
+            <a:pPr algn="just"/>
+            <a:r>
+              <a:rPr lang="en-US" sz="2000" dirty="0">
+                <a:latin typeface="Georgia" panose="02040502050405020303" pitchFamily="18" charset="0"/>
+              </a:rPr>
+              <a:t>Automatic Number Plate Recognition (ANPR) is a computer vision technology that automatically detects and recognizes vehicle number plates from images or video streams using deep learning, image processing, and OCR techniques.</a:t>
+            </a:r>
+          </a:p>
+          <a:p>
+            <a:pPr algn="just"/>
+            <a:endParaRPr lang="en-US" sz="2000" dirty="0">
+              <a:latin typeface="Georgia" panose="02040502050405020303" pitchFamily="18" charset="0"/>
             </a:endParaRPr>
           </a:p>
           <a:p>
-            <a:pPr marL="742950" lvl="1" indent="-285750"/>
-            <a:r>
-              <a:rPr lang="en-US" sz="1800" dirty="0">
-                <a:latin typeface="Times New Roman" panose="02020603050405020304" pitchFamily="18" charset="0"/>
-                <a:cs typeface="Times New Roman" panose="02020603050405020304" pitchFamily="18" charset="0"/>
-              </a:rPr>
-              <a:t>A computer vision system that automatically identifies vehicle license plate numbers from images or videos.</a:t>
-            </a:r>
-          </a:p>
-          <a:p>
-            <a:pPr marL="457200" lvl="1" indent="0">
-              <a:buNone/>
-            </a:pPr>
-            <a:endParaRPr lang="en-US" sz="1800" b="1" dirty="0">
-              <a:latin typeface="Times New Roman" panose="02020603050405020304" pitchFamily="18" charset="0"/>
-              <a:cs typeface="Times New Roman" panose="02020603050405020304" pitchFamily="18" charset="0"/>
+            <a:pPr algn="just"/>
+            <a:r>
+              <a:rPr lang="en-US" sz="2000" dirty="0">
+                <a:latin typeface="Georgia" panose="02040502050405020303" pitchFamily="18" charset="0"/>
+              </a:rPr>
+              <a:t>ANPR systems are widely used in traffic monitoring, parking management, toll collection, and security surveillance. These systems help automate vehicle identification and reduce manual effort in monitoring vehicles.</a:t>
+            </a:r>
+          </a:p>
+          <a:p>
+            <a:pPr algn="just"/>
+            <a:endParaRPr lang="en-US" sz="2000" dirty="0">
+              <a:latin typeface="Georgia" panose="02040502050405020303" pitchFamily="18" charset="0"/>
             </a:endParaRPr>
           </a:p>
           <a:p>
-            <a:pPr>
-              <a:buFont typeface="Wingdings" panose="05000000000000000000" pitchFamily="2" charset="2"/>
-              <a:buChar char="Ø"/>
-            </a:pPr>
-            <a:r>
-              <a:rPr lang="en-US" sz="1950" b="1" dirty="0">
-                <a:latin typeface="Times New Roman" panose="02020603050405020304" pitchFamily="18" charset="0"/>
-                <a:cs typeface="Times New Roman" panose="02020603050405020304" pitchFamily="18" charset="0"/>
-              </a:rPr>
-              <a:t>Importance</a:t>
-            </a:r>
-            <a:r>
-              <a:rPr lang="en-US" sz="1950" dirty="0">
-                <a:latin typeface="Times New Roman" panose="02020603050405020304" pitchFamily="18" charset="0"/>
-                <a:cs typeface="Times New Roman" panose="02020603050405020304" pitchFamily="18" charset="0"/>
-              </a:rPr>
-              <a:t>:</a:t>
-            </a:r>
-          </a:p>
-          <a:p>
-            <a:pPr marL="742950" lvl="1" indent="-285750"/>
-            <a:r>
-              <a:rPr lang="en-US" sz="1800" dirty="0">
-                <a:latin typeface="Times New Roman" panose="02020603050405020304" pitchFamily="18" charset="0"/>
-                <a:cs typeface="Times New Roman" panose="02020603050405020304" pitchFamily="18" charset="0"/>
-              </a:rPr>
-              <a:t>It plays a crucial role in traffic automation, surveillance, parking management, toll collection, and law enforcement. It eliminates the need for manual monitoring and enhances security and efficiency.</a:t>
-            </a:r>
-          </a:p>
-          <a:p>
-            <a:pPr marL="457200" lvl="1" indent="0">
-              <a:buNone/>
-            </a:pPr>
-            <a:endParaRPr lang="en-US" sz="1800" dirty="0">
-              <a:latin typeface="Times New Roman" panose="02020603050405020304" pitchFamily="18" charset="0"/>
-              <a:cs typeface="Times New Roman" panose="02020603050405020304" pitchFamily="18" charset="0"/>
-            </a:endParaRPr>
-          </a:p>
-          <a:p>
-            <a:pPr>
-              <a:buFont typeface="Wingdings" panose="05000000000000000000" pitchFamily="2" charset="2"/>
-              <a:buChar char="Ø"/>
-            </a:pPr>
-            <a:r>
-              <a:rPr lang="en-US" sz="1950" b="1" dirty="0">
-                <a:latin typeface="Times New Roman" panose="02020603050405020304" pitchFamily="18" charset="0"/>
-                <a:cs typeface="Times New Roman" panose="02020603050405020304" pitchFamily="18" charset="0"/>
-              </a:rPr>
-              <a:t>Objective</a:t>
-            </a:r>
-            <a:r>
-              <a:rPr lang="en-US" sz="1950" dirty="0">
-                <a:latin typeface="Times New Roman" panose="02020603050405020304" pitchFamily="18" charset="0"/>
-                <a:cs typeface="Times New Roman" panose="02020603050405020304" pitchFamily="18" charset="0"/>
-              </a:rPr>
-              <a:t>:</a:t>
-            </a:r>
-          </a:p>
-          <a:p>
-            <a:pPr marL="742950" lvl="1" indent="-285750"/>
-            <a:r>
-              <a:rPr lang="en-US" sz="1800" dirty="0">
-                <a:latin typeface="Times New Roman" panose="02020603050405020304" pitchFamily="18" charset="0"/>
-                <a:cs typeface="Times New Roman" panose="02020603050405020304" pitchFamily="18" charset="0"/>
-              </a:rPr>
-              <a:t>To design and implement an Automatic License Plate Recognition system capable of detecting, segmenting, and recognizing license plates in real time using image processing and deep learning techniques.</a:t>
-            </a:r>
-          </a:p>
-          <a:p>
-            <a:endParaRPr lang="en-IN" dirty="0"/>
-          </a:p>
-          <a:p>
-            <a:endParaRPr lang="en-IN" dirty="0"/>
-          </a:p>
-        </p:txBody>
-      </p:sp>
-      <p:sp>
-        <p:nvSpPr>
-          <p:cNvPr id="5" name="Slide Number Placeholder 4">
-            <a:extLst>
-              <a:ext uri="{FF2B5EF4-FFF2-40B4-BE49-F238E27FC236}">
-                <a16:creationId xmlns:a16="http://schemas.microsoft.com/office/drawing/2014/main" id="{8F2CC403-2FFC-0C15-A673-E231893D2D92}"/>
+            <a:pPr algn="just"/>
+            <a:r>
+              <a:rPr lang="en-US" sz="2000" dirty="0">
+                <a:latin typeface="Georgia" panose="02040502050405020303" pitchFamily="18" charset="0"/>
+              </a:rPr>
+              <a:t>The use of ANPR improves accuracy, speed, and efficiency in vehicle tracking and entry management. It also enhances security and provides a reliable solution for modern intelligent transportation systems.</a:t>
+            </a:r>
+          </a:p>
+        </p:txBody>
+      </p:sp>
+      <p:sp>
+        <p:nvSpPr>
+          <p:cNvPr id="4" name="Slide Number Placeholder 3">
+            <a:extLst>
+              <a:ext uri="{FF2B5EF4-FFF2-40B4-BE49-F238E27FC236}">
+                <a16:creationId xmlns:a16="http://schemas.microsoft.com/office/drawing/2014/main" id="{8BB3EABB-AC6F-3158-2CE7-F33A8E904EC0}"/>
               </a:ext>
             </a:extLst>
           </p:cNvPr>
@@ -6633,7 +7668,7 @@
     </p:spTree>
     <p:extLst>
       <p:ext uri="{BB962C8B-B14F-4D97-AF65-F5344CB8AC3E}">
-        <p14:creationId xmlns:p14="http://schemas.microsoft.com/office/powerpoint/2010/main" val="4281101854"/>
+        <p14:creationId xmlns:p14="http://schemas.microsoft.com/office/powerpoint/2010/main" val="1120793300"/>
       </p:ext>
     </p:extLst>
   </p:cSld>
@@ -6665,7 +7700,7 @@
           <p:cNvPr id="2" name="Title 1">
             <a:extLst>
               <a:ext uri="{FF2B5EF4-FFF2-40B4-BE49-F238E27FC236}">
-                <a16:creationId xmlns:a16="http://schemas.microsoft.com/office/drawing/2014/main" id="{BA4147B6-8BE9-62D6-AD0B-C636D315D0A8}"/>
+                <a16:creationId xmlns:a16="http://schemas.microsoft.com/office/drawing/2014/main" id="{F1BF2322-7F45-D17D-8E91-D2412351E3AE}"/>
               </a:ext>
             </a:extLst>
           </p:cNvPr>
@@ -6676,12 +7711,7 @@
             <p:ph type="title"/>
           </p:nvPr>
         </p:nvSpPr>
-        <p:spPr>
-          <a:xfrm>
-            <a:off x="499310" y="256674"/>
-            <a:ext cx="11193379" cy="1004860"/>
-          </a:xfrm>
-        </p:spPr>
+        <p:spPr/>
         <p:txBody>
           <a:bodyPr>
             <a:normAutofit/>
@@ -6690,13 +7720,11 @@
           <a:p>
             <a:pPr algn="ctr"/>
             <a:r>
-              <a:rPr lang="en-US" sz="3200" b="1" dirty="0">
-                <a:latin typeface="Times New Roman" panose="02020603050405020304" pitchFamily="18" charset="0"/>
-                <a:cs typeface="Times New Roman" panose="02020603050405020304" pitchFamily="18" charset="0"/>
-              </a:rPr>
-              <a:t>LITERATURE AND RESEARCH </a:t>
-            </a:r>
-            <a:endParaRPr lang="en-IN" sz="3200" dirty="0"/>
+              <a:rPr lang="en-IN" sz="3200" b="1" dirty="0">
+                <a:latin typeface="Georgia" panose="02040502050405020303" pitchFamily="18" charset="0"/>
+              </a:rPr>
+              <a:t>RESEARCH OBJECTIVE</a:t>
+            </a:r>
           </a:p>
         </p:txBody>
       </p:sp>
@@ -6705,7 +7733,7 @@
           <p:cNvPr id="3" name="Content Placeholder 2">
             <a:extLst>
               <a:ext uri="{FF2B5EF4-FFF2-40B4-BE49-F238E27FC236}">
-                <a16:creationId xmlns:a16="http://schemas.microsoft.com/office/drawing/2014/main" id="{57CE637C-32B1-035B-02C5-F84F80A6E763}"/>
+                <a16:creationId xmlns:a16="http://schemas.microsoft.com/office/drawing/2014/main" id="{AC666D50-9938-3BD5-903A-E04C787980EA}"/>
               </a:ext>
             </a:extLst>
           </p:cNvPr>
@@ -6718,8 +7746,8 @@
         </p:nvSpPr>
         <p:spPr>
           <a:xfrm>
-            <a:off x="499309" y="1261534"/>
-            <a:ext cx="11193379" cy="5339792"/>
+            <a:off x="838200" y="2005012"/>
+            <a:ext cx="10515600" cy="4351338"/>
           </a:xfrm>
         </p:spPr>
         <p:txBody>
@@ -6728,226 +7756,38 @@
           </a:bodyPr>
           <a:lstStyle/>
           <a:p>
-            <a:pPr>
-              <a:buFont typeface="Wingdings" panose="05000000000000000000" pitchFamily="2" charset="2"/>
-              <a:buChar char="Ø"/>
-            </a:pPr>
-            <a:r>
-              <a:rPr lang="en-US" sz="1950" b="1" dirty="0">
-                <a:latin typeface="Times New Roman" panose="02020603050405020304" pitchFamily="18" charset="0"/>
-                <a:cs typeface="Times New Roman" panose="02020603050405020304" pitchFamily="18" charset="0"/>
-              </a:rPr>
-              <a:t>Research Focus</a:t>
-            </a:r>
-            <a:r>
-              <a:rPr lang="en-US" sz="1950" dirty="0">
-                <a:latin typeface="Times New Roman" panose="02020603050405020304" pitchFamily="18" charset="0"/>
-                <a:cs typeface="Times New Roman" panose="02020603050405020304" pitchFamily="18" charset="0"/>
-              </a:rPr>
-              <a:t>: </a:t>
-            </a:r>
-          </a:p>
-          <a:p>
-            <a:pPr lvl="1"/>
-            <a:r>
-              <a:rPr lang="en-US" sz="1800" dirty="0">
-                <a:latin typeface="Times New Roman" panose="02020603050405020304" pitchFamily="18" charset="0"/>
-                <a:cs typeface="Times New Roman" panose="02020603050405020304" pitchFamily="18" charset="0"/>
-              </a:rPr>
-              <a:t>Recent research emphasizes the need for </a:t>
-            </a:r>
-            <a:r>
-              <a:rPr lang="en-US" sz="1800" b="1" dirty="0">
-                <a:latin typeface="Times New Roman" panose="02020603050405020304" pitchFamily="18" charset="0"/>
-                <a:cs typeface="Times New Roman" panose="02020603050405020304" pitchFamily="18" charset="0"/>
-              </a:rPr>
-              <a:t>robust and real-time ALPR systems</a:t>
-            </a:r>
-            <a:r>
-              <a:rPr lang="en-US" sz="1800" dirty="0">
-                <a:latin typeface="Times New Roman" panose="02020603050405020304" pitchFamily="18" charset="0"/>
-                <a:cs typeface="Times New Roman" panose="02020603050405020304" pitchFamily="18" charset="0"/>
-              </a:rPr>
-              <a:t> capable of handling real-world challenges such as varying lighting conditions, motion blur, different plate formats, and complex backgrounds. Modern approaches focus on deep learning-based solutions for improved accuracy and scalability. [1]</a:t>
-            </a:r>
-          </a:p>
-          <a:p>
-            <a:pPr marL="457200" lvl="1" indent="0">
-              <a:buNone/>
-            </a:pPr>
-            <a:endParaRPr lang="en-US" sz="1800" b="1" dirty="0">
-              <a:latin typeface="Times New Roman" panose="02020603050405020304" pitchFamily="18" charset="0"/>
-              <a:cs typeface="Times New Roman" panose="02020603050405020304" pitchFamily="18" charset="0"/>
+            <a:r>
+              <a:rPr lang="en-US" sz="2000" dirty="0">
+                <a:latin typeface="Georgia" panose="02040502050405020303" pitchFamily="18" charset="0"/>
+              </a:rPr>
+              <a:t>The main objective of this project is to develop an Automatic Number Plate Recognition (ANPR) system capable of detecting and recognizing vehicle number plates in real time at the college main gate. The system focuses on automating vehicle entry monitoring using deep learning and OCR techniques.</a:t>
+            </a:r>
+            <a:br>
+              <a:rPr lang="en-US" sz="2000" dirty="0">
+                <a:latin typeface="Georgia" panose="02040502050405020303" pitchFamily="18" charset="0"/>
+              </a:rPr>
+            </a:br>
+            <a:endParaRPr lang="en-US" sz="2000" dirty="0">
+              <a:latin typeface="Georgia" panose="02040502050405020303" pitchFamily="18" charset="0"/>
             </a:endParaRPr>
           </a:p>
           <a:p>
-            <a:pPr>
-              <a:buFont typeface="Wingdings" panose="05000000000000000000" pitchFamily="2" charset="2"/>
-              <a:buChar char="Ø"/>
-            </a:pPr>
-            <a:r>
-              <a:rPr lang="en-US" sz="1950" b="1" dirty="0">
-                <a:latin typeface="Times New Roman" panose="02020603050405020304" pitchFamily="18" charset="0"/>
-                <a:cs typeface="Times New Roman" panose="02020603050405020304" pitchFamily="18" charset="0"/>
-              </a:rPr>
-              <a:t>Key Takeaway</a:t>
-            </a:r>
-            <a:r>
-              <a:rPr lang="en-US" sz="1950" dirty="0">
-                <a:latin typeface="Times New Roman" panose="02020603050405020304" pitchFamily="18" charset="0"/>
-                <a:cs typeface="Times New Roman" panose="02020603050405020304" pitchFamily="18" charset="0"/>
-              </a:rPr>
-              <a:t>: </a:t>
-            </a:r>
-          </a:p>
-          <a:p>
-            <a:pPr lvl="1"/>
-            <a:r>
-              <a:rPr lang="en-US" sz="1800" b="1" dirty="0">
-                <a:latin typeface="Times New Roman" panose="02020603050405020304" pitchFamily="18" charset="0"/>
-                <a:cs typeface="Times New Roman" panose="02020603050405020304" pitchFamily="18" charset="0"/>
-              </a:rPr>
-              <a:t>Traditional Methods:</a:t>
-            </a:r>
-            <a:br>
-              <a:rPr lang="en-US" sz="1800" dirty="0">
-                <a:latin typeface="Times New Roman" panose="02020603050405020304" pitchFamily="18" charset="0"/>
-                <a:cs typeface="Times New Roman" panose="02020603050405020304" pitchFamily="18" charset="0"/>
-              </a:rPr>
-            </a:br>
-            <a:r>
-              <a:rPr lang="en-US" sz="1800" dirty="0">
-                <a:latin typeface="Times New Roman" panose="02020603050405020304" pitchFamily="18" charset="0"/>
-                <a:cs typeface="Times New Roman" panose="02020603050405020304" pitchFamily="18" charset="0"/>
-              </a:rPr>
-              <a:t>Edge detection and morphological operations were widely used for plate localization but are highly sensitive to noise, shadows, and environmental variations.</a:t>
-            </a:r>
-          </a:p>
-          <a:p>
-            <a:pPr lvl="1"/>
-            <a:r>
-              <a:rPr lang="en-US" sz="1800" b="1" dirty="0">
-                <a:latin typeface="Times New Roman" panose="02020603050405020304" pitchFamily="18" charset="0"/>
-                <a:cs typeface="Times New Roman" panose="02020603050405020304" pitchFamily="18" charset="0"/>
-              </a:rPr>
-              <a:t>Deep Learning-Based Detection:</a:t>
-            </a:r>
-            <a:br>
-              <a:rPr lang="en-US" sz="1800" dirty="0">
-                <a:latin typeface="Times New Roman" panose="02020603050405020304" pitchFamily="18" charset="0"/>
-                <a:cs typeface="Times New Roman" panose="02020603050405020304" pitchFamily="18" charset="0"/>
-              </a:rPr>
-            </a:br>
-            <a:r>
-              <a:rPr lang="en-US" sz="1800" dirty="0">
-                <a:latin typeface="Times New Roman" panose="02020603050405020304" pitchFamily="18" charset="0"/>
-                <a:cs typeface="Times New Roman" panose="02020603050405020304" pitchFamily="18" charset="0"/>
-              </a:rPr>
-              <a:t>YOLO-based models (especially YOLOv5/YOLOv8) provide </a:t>
-            </a:r>
-            <a:r>
-              <a:rPr lang="en-US" sz="1800" b="1" dirty="0">
-                <a:latin typeface="Times New Roman" panose="02020603050405020304" pitchFamily="18" charset="0"/>
-                <a:cs typeface="Times New Roman" panose="02020603050405020304" pitchFamily="18" charset="0"/>
-              </a:rPr>
-              <a:t>high accuracy and real-time performance</a:t>
-            </a:r>
-            <a:r>
-              <a:rPr lang="en-US" sz="1800" dirty="0">
-                <a:latin typeface="Times New Roman" panose="02020603050405020304" pitchFamily="18" charset="0"/>
-                <a:cs typeface="Times New Roman" panose="02020603050405020304" pitchFamily="18" charset="0"/>
-              </a:rPr>
-              <a:t>, even under challenging conditions like low light, occlusion, and angled views. [2].</a:t>
-            </a:r>
-          </a:p>
-          <a:p>
-            <a:pPr lvl="1"/>
-            <a:r>
-              <a:rPr lang="en-US" sz="1800" b="1" dirty="0">
-                <a:latin typeface="Times New Roman" panose="02020603050405020304" pitchFamily="18" charset="0"/>
-                <a:cs typeface="Times New Roman" panose="02020603050405020304" pitchFamily="18" charset="0"/>
-              </a:rPr>
-              <a:t>OCR Techniques:</a:t>
-            </a:r>
-            <a:br>
-              <a:rPr lang="en-US" sz="1800" dirty="0">
-                <a:latin typeface="Times New Roman" panose="02020603050405020304" pitchFamily="18" charset="0"/>
-                <a:cs typeface="Times New Roman" panose="02020603050405020304" pitchFamily="18" charset="0"/>
-              </a:rPr>
-            </a:br>
-            <a:r>
-              <a:rPr lang="en-US" sz="1800" dirty="0">
-                <a:latin typeface="Times New Roman" panose="02020603050405020304" pitchFamily="18" charset="0"/>
-                <a:cs typeface="Times New Roman" panose="02020603050405020304" pitchFamily="18" charset="0"/>
-              </a:rPr>
-              <a:t>Modern OCR tools such as </a:t>
-            </a:r>
-            <a:r>
-              <a:rPr lang="en-US" sz="1800" b="1" dirty="0">
-                <a:latin typeface="Times New Roman" panose="02020603050405020304" pitchFamily="18" charset="0"/>
-                <a:cs typeface="Times New Roman" panose="02020603050405020304" pitchFamily="18" charset="0"/>
-              </a:rPr>
-              <a:t>EasyOCR and Tesseract</a:t>
-            </a:r>
-            <a:r>
-              <a:rPr lang="en-US" sz="1800" dirty="0">
-                <a:latin typeface="Times New Roman" panose="02020603050405020304" pitchFamily="18" charset="0"/>
-                <a:cs typeface="Times New Roman" panose="02020603050405020304" pitchFamily="18" charset="0"/>
-              </a:rPr>
-              <a:t> enable efficient extraction of alphanumeric text from detected plates without requiring explicit character segmentation.</a:t>
-            </a:r>
-          </a:p>
-          <a:p>
-            <a:pPr lvl="1"/>
-            <a:r>
-              <a:rPr lang="en-US" sz="1800" b="1" dirty="0">
-                <a:latin typeface="Times New Roman" panose="02020603050405020304" pitchFamily="18" charset="0"/>
-                <a:cs typeface="Times New Roman" panose="02020603050405020304" pitchFamily="18" charset="0"/>
-              </a:rPr>
-              <a:t>End-to-End Systems:</a:t>
-            </a:r>
-            <a:br>
-              <a:rPr lang="en-US" sz="1800" dirty="0">
-                <a:latin typeface="Times New Roman" panose="02020603050405020304" pitchFamily="18" charset="0"/>
-                <a:cs typeface="Times New Roman" panose="02020603050405020304" pitchFamily="18" charset="0"/>
-              </a:rPr>
-            </a:br>
-            <a:r>
-              <a:rPr lang="en-US" sz="1800" dirty="0">
-                <a:latin typeface="Times New Roman" panose="02020603050405020304" pitchFamily="18" charset="0"/>
-                <a:cs typeface="Times New Roman" panose="02020603050405020304" pitchFamily="18" charset="0"/>
-              </a:rPr>
-              <a:t>Recent trends focus on combining </a:t>
-            </a:r>
-            <a:r>
-              <a:rPr lang="en-US" sz="1800" b="1" dirty="0">
-                <a:latin typeface="Times New Roman" panose="02020603050405020304" pitchFamily="18" charset="0"/>
-                <a:cs typeface="Times New Roman" panose="02020603050405020304" pitchFamily="18" charset="0"/>
-              </a:rPr>
-              <a:t>object detection + OCR pipelines</a:t>
-            </a:r>
-            <a:r>
-              <a:rPr lang="en-US" sz="1800" dirty="0">
-                <a:latin typeface="Times New Roman" panose="02020603050405020304" pitchFamily="18" charset="0"/>
-                <a:cs typeface="Times New Roman" panose="02020603050405020304" pitchFamily="18" charset="0"/>
-              </a:rPr>
-              <a:t>, eliminating the need for manual preprocessing and improving overall system efficiency. </a:t>
-            </a:r>
-          </a:p>
-          <a:p>
-            <a:pPr marL="0" indent="0">
-              <a:buNone/>
-            </a:pPr>
-            <a:endParaRPr lang="en-IN" dirty="0"/>
-          </a:p>
-        </p:txBody>
-      </p:sp>
-      <p:sp>
-        <p:nvSpPr>
-          <p:cNvPr id="8" name="Slide Number Placeholder 7">
-            <a:extLst>
-              <a:ext uri="{FF2B5EF4-FFF2-40B4-BE49-F238E27FC236}">
-                <a16:creationId xmlns:a16="http://schemas.microsoft.com/office/drawing/2014/main" id="{F803C0E3-FEC4-B5B6-D872-2C3D4B08DCBF}"/>
+            <a:pPr algn="just"/>
+            <a:r>
+              <a:rPr lang="en-US" sz="2000" dirty="0">
+                <a:latin typeface="Georgia" panose="02040502050405020303" pitchFamily="18" charset="0"/>
+              </a:rPr>
+              <a:t>The proposed system aims to reduce manual effort and human errors while improving the overall efficiency and security of vehicle management. It automatically extracts and stores vehicle number plate information for monitoring and record-keeping purposes.</a:t>
+            </a:r>
+          </a:p>
+        </p:txBody>
+      </p:sp>
+      <p:sp>
+        <p:nvSpPr>
+          <p:cNvPr id="4" name="Slide Number Placeholder 3">
+            <a:extLst>
+              <a:ext uri="{FF2B5EF4-FFF2-40B4-BE49-F238E27FC236}">
+                <a16:creationId xmlns:a16="http://schemas.microsoft.com/office/drawing/2014/main" id="{7495C11A-302E-46BB-E76F-EA245EF8FC16}"/>
               </a:ext>
             </a:extLst>
           </p:cNvPr>
@@ -6967,14 +7807,14 @@
               <a:rPr lang="en-IN" smtClean="0"/>
               <a:t>4</a:t>
             </a:fld>
-            <a:endParaRPr lang="en-IN" dirty="0"/>
+            <a:endParaRPr lang="en-IN"/>
           </a:p>
         </p:txBody>
       </p:sp>
     </p:spTree>
     <p:extLst>
       <p:ext uri="{BB962C8B-B14F-4D97-AF65-F5344CB8AC3E}">
-        <p14:creationId xmlns:p14="http://schemas.microsoft.com/office/powerpoint/2010/main" val="1553662846"/>
+        <p14:creationId xmlns:p14="http://schemas.microsoft.com/office/powerpoint/2010/main" val="752520850"/>
       </p:ext>
     </p:extLst>
   </p:cSld>
@@ -7006,7 +7846,7 @@
           <p:cNvPr id="2" name="Title 1">
             <a:extLst>
               <a:ext uri="{FF2B5EF4-FFF2-40B4-BE49-F238E27FC236}">
-                <a16:creationId xmlns:a16="http://schemas.microsoft.com/office/drawing/2014/main" id="{1D297F6C-4AD1-2FE0-E8FB-746570D68466}"/>
+                <a16:creationId xmlns:a16="http://schemas.microsoft.com/office/drawing/2014/main" id="{C023AEE2-624F-7F60-DF74-7C0B1CB30875}"/>
               </a:ext>
             </a:extLst>
           </p:cNvPr>
@@ -7019,8 +7859,8 @@
         </p:nvSpPr>
         <p:spPr>
           <a:xfrm>
-            <a:off x="232611" y="368968"/>
-            <a:ext cx="11121189" cy="917966"/>
+            <a:off x="838200" y="136525"/>
+            <a:ext cx="10515600" cy="1325563"/>
           </a:xfrm>
         </p:spPr>
         <p:txBody>
@@ -7032,162 +7872,708 @@
             <a:pPr algn="ctr"/>
             <a:r>
               <a:rPr lang="en-US" sz="3200" b="1" dirty="0">
-                <a:latin typeface="Times New Roman" panose="02020603050405020304" pitchFamily="18" charset="0"/>
-                <a:cs typeface="Times New Roman" panose="02020603050405020304" pitchFamily="18" charset="0"/>
-              </a:rPr>
-              <a:t>PROBLEM STATEMENT</a:t>
-            </a:r>
-            <a:endParaRPr lang="en-IN" sz="3200" dirty="0"/>
-          </a:p>
-        </p:txBody>
-      </p:sp>
-      <p:sp>
-        <p:nvSpPr>
-          <p:cNvPr id="3" name="Content Placeholder 2">
-            <a:extLst>
-              <a:ext uri="{FF2B5EF4-FFF2-40B4-BE49-F238E27FC236}">
-                <a16:creationId xmlns:a16="http://schemas.microsoft.com/office/drawing/2014/main" id="{987F2132-C9FF-7E6C-1F2C-0BB4729D9AF4}"/>
-              </a:ext>
-            </a:extLst>
-          </p:cNvPr>
-          <p:cNvSpPr>
-            <a:spLocks noGrp="1"/>
-          </p:cNvSpPr>
+                <a:latin typeface="Georgia" panose="02040502050405020303" pitchFamily="18" charset="0"/>
+              </a:rPr>
+              <a:t>LITERATURE SURVEY</a:t>
+            </a:r>
+            <a:endParaRPr lang="en-IN" sz="3200" b="1" dirty="0">
+              <a:latin typeface="Georgia" panose="02040502050405020303" pitchFamily="18" charset="0"/>
+            </a:endParaRPr>
+          </a:p>
+        </p:txBody>
+      </p:sp>
+      <p:graphicFrame>
+        <p:nvGraphicFramePr>
+          <p:cNvPr id="5" name="Content Placeholder 4">
+            <a:extLst>
+              <a:ext uri="{FF2B5EF4-FFF2-40B4-BE49-F238E27FC236}">
+                <a16:creationId xmlns:a16="http://schemas.microsoft.com/office/drawing/2014/main" id="{B7A27ABE-CDE9-CAF9-7E22-3B39123EAB0D}"/>
+              </a:ext>
+            </a:extLst>
+          </p:cNvPr>
+          <p:cNvGraphicFramePr>
+            <a:graphicFrameLocks noGrp="1"/>
+          </p:cNvGraphicFramePr>
           <p:nvPr>
             <p:ph idx="1"/>
+            <p:extLst>
+              <p:ext uri="{D42A27DB-BD31-4B8C-83A1-F6EECF244321}">
+                <p14:modId xmlns:p14="http://schemas.microsoft.com/office/powerpoint/2010/main" val="2431751490"/>
+              </p:ext>
+            </p:extLst>
           </p:nvPr>
-        </p:nvSpPr>
-        <p:spPr>
-          <a:xfrm>
-            <a:off x="535405" y="1286934"/>
-            <a:ext cx="11121189" cy="4989847"/>
-          </a:xfrm>
-        </p:spPr>
-        <p:txBody>
-          <a:bodyPr>
-            <a:normAutofit/>
-          </a:bodyPr>
-          <a:lstStyle/>
-          <a:p>
-            <a:pPr marL="457200" lvl="1" indent="0">
-              <a:buNone/>
-            </a:pPr>
-            <a:endParaRPr lang="en-US" b="1" dirty="0">
-              <a:latin typeface="Times New Roman" panose="02020603050405020304" pitchFamily="18" charset="0"/>
-              <a:cs typeface="Times New Roman" panose="02020603050405020304" pitchFamily="18" charset="0"/>
-            </a:endParaRPr>
-          </a:p>
-          <a:p>
-            <a:pPr marL="0" indent="0">
-              <a:buNone/>
-            </a:pPr>
-            <a:r>
-              <a:rPr lang="en-US" sz="1800" dirty="0">
-                <a:latin typeface="Times New Roman" panose="02020603050405020304" pitchFamily="18" charset="0"/>
-                <a:cs typeface="Times New Roman" panose="02020603050405020304" pitchFamily="18" charset="0"/>
-              </a:rPr>
-              <a:t>At the college main gate, vehicle entry is currently not monitored/monitored manually sometimes, which leads to:</a:t>
-            </a:r>
-          </a:p>
-          <a:p>
-            <a:r>
-              <a:rPr lang="en-US" sz="1800" dirty="0">
-                <a:latin typeface="Times New Roman" panose="02020603050405020304" pitchFamily="18" charset="0"/>
-                <a:cs typeface="Times New Roman" panose="02020603050405020304" pitchFamily="18" charset="0"/>
-              </a:rPr>
-              <a:t>Inefficiency during peak hours</a:t>
-            </a:r>
-          </a:p>
-          <a:p>
-            <a:r>
-              <a:rPr lang="en-US" sz="1800" dirty="0">
-                <a:latin typeface="Times New Roman" panose="02020603050405020304" pitchFamily="18" charset="0"/>
-                <a:cs typeface="Times New Roman" panose="02020603050405020304" pitchFamily="18" charset="0"/>
-              </a:rPr>
-              <a:t>Human errors in logging vehicle details </a:t>
-            </a:r>
-          </a:p>
-          <a:p>
-            <a:r>
-              <a:rPr lang="en-US" sz="1800" dirty="0">
-                <a:latin typeface="Times New Roman" panose="02020603050405020304" pitchFamily="18" charset="0"/>
-                <a:cs typeface="Times New Roman" panose="02020603050405020304" pitchFamily="18" charset="0"/>
-              </a:rPr>
-              <a:t>Lack of efficient real-time tracking and record keeping</a:t>
-            </a:r>
-          </a:p>
-          <a:p>
-            <a:pPr marL="0" indent="0">
-              <a:buNone/>
-            </a:pPr>
-            <a:endParaRPr lang="en-US" sz="1950" b="1" dirty="0">
-              <a:latin typeface="Times New Roman" panose="02020603050405020304" pitchFamily="18" charset="0"/>
-              <a:cs typeface="Times New Roman" panose="02020603050405020304" pitchFamily="18" charset="0"/>
-            </a:endParaRPr>
-          </a:p>
-          <a:p>
-            <a:pPr marL="0" indent="0">
-              <a:buNone/>
-            </a:pPr>
-            <a:r>
-              <a:rPr lang="en-US" sz="1950" b="1" dirty="0">
-                <a:latin typeface="Times New Roman" panose="02020603050405020304" pitchFamily="18" charset="0"/>
-                <a:cs typeface="Times New Roman" panose="02020603050405020304" pitchFamily="18" charset="0"/>
-              </a:rPr>
-              <a:t>Objective:</a:t>
-            </a:r>
-            <a:endParaRPr lang="en-US" sz="1950" dirty="0">
-              <a:latin typeface="Times New Roman" panose="02020603050405020304" pitchFamily="18" charset="0"/>
-              <a:cs typeface="Times New Roman" panose="02020603050405020304" pitchFamily="18" charset="0"/>
-            </a:endParaRPr>
-          </a:p>
-          <a:p>
-            <a:pPr marL="0" indent="0">
-              <a:buNone/>
-            </a:pPr>
-            <a:r>
-              <a:rPr lang="en-US" sz="1800" dirty="0">
-                <a:latin typeface="Times New Roman" panose="02020603050405020304" pitchFamily="18" charset="0"/>
-                <a:cs typeface="Times New Roman" panose="02020603050405020304" pitchFamily="18" charset="0"/>
-              </a:rPr>
-              <a:t>To develop an automated system that:</a:t>
-            </a:r>
-          </a:p>
-          <a:p>
-            <a:r>
-              <a:rPr lang="en-US" sz="1800" dirty="0">
-                <a:latin typeface="Times New Roman" panose="02020603050405020304" pitchFamily="18" charset="0"/>
-                <a:cs typeface="Times New Roman" panose="02020603050405020304" pitchFamily="18" charset="0"/>
-              </a:rPr>
-              <a:t>Detects vehicle number plates in real time </a:t>
-            </a:r>
-          </a:p>
-          <a:p>
-            <a:r>
-              <a:rPr lang="en-US" sz="1800" dirty="0">
-                <a:latin typeface="Times New Roman" panose="02020603050405020304" pitchFamily="18" charset="0"/>
-                <a:cs typeface="Times New Roman" panose="02020603050405020304" pitchFamily="18" charset="0"/>
-              </a:rPr>
-              <a:t>Extracts plate numbers automatically </a:t>
-            </a:r>
-          </a:p>
-          <a:p>
-            <a:r>
-              <a:rPr lang="en-US" sz="1800" dirty="0">
-                <a:latin typeface="Times New Roman" panose="02020603050405020304" pitchFamily="18" charset="0"/>
-                <a:cs typeface="Times New Roman" panose="02020603050405020304" pitchFamily="18" charset="0"/>
-              </a:rPr>
-              <a:t>Logs vehicle entry with timestamp for monitoring and security</a:t>
-            </a:r>
-          </a:p>
-        </p:txBody>
-      </p:sp>
-      <p:sp>
-        <p:nvSpPr>
-          <p:cNvPr id="5" name="Slide Number Placeholder 4">
-            <a:extLst>
-              <a:ext uri="{FF2B5EF4-FFF2-40B4-BE49-F238E27FC236}">
-                <a16:creationId xmlns:a16="http://schemas.microsoft.com/office/drawing/2014/main" id="{B32D394A-BDC3-D8D3-841A-A93A0337E6A7}"/>
+        </p:nvGraphicFramePr>
+        <p:xfrm>
+          <a:off x="571500" y="1601108"/>
+          <a:ext cx="11049000" cy="4755242"/>
+        </p:xfrm>
+        <a:graphic>
+          <a:graphicData uri="http://schemas.openxmlformats.org/drawingml/2006/table">
+            <a:tbl>
+              <a:tblPr firstRow="1" bandRow="1">
+                <a:tableStyleId>{8799B23B-EC83-4686-B30A-512413B5E67A}</a:tableStyleId>
+              </a:tblPr>
+              <a:tblGrid>
+                <a:gridCol w="685800">
+                  <a:extLst>
+                    <a:ext uri="{9D8B030D-6E8A-4147-A177-3AD203B41FA5}">
+                      <a16:colId xmlns:a16="http://schemas.microsoft.com/office/drawing/2014/main" val="4032117901"/>
+                    </a:ext>
+                  </a:extLst>
+                </a:gridCol>
+                <a:gridCol w="3072104">
+                  <a:extLst>
+                    <a:ext uri="{9D8B030D-6E8A-4147-A177-3AD203B41FA5}">
+                      <a16:colId xmlns:a16="http://schemas.microsoft.com/office/drawing/2014/main" val="1392569771"/>
+                    </a:ext>
+                  </a:extLst>
+                </a:gridCol>
+                <a:gridCol w="1091682">
+                  <a:extLst>
+                    <a:ext uri="{9D8B030D-6E8A-4147-A177-3AD203B41FA5}">
+                      <a16:colId xmlns:a16="http://schemas.microsoft.com/office/drawing/2014/main" val="809746929"/>
+                    </a:ext>
+                  </a:extLst>
+                </a:gridCol>
+                <a:gridCol w="2976465">
+                  <a:extLst>
+                    <a:ext uri="{9D8B030D-6E8A-4147-A177-3AD203B41FA5}">
+                      <a16:colId xmlns:a16="http://schemas.microsoft.com/office/drawing/2014/main" val="399951704"/>
+                    </a:ext>
+                  </a:extLst>
+                </a:gridCol>
+                <a:gridCol w="3222949">
+                  <a:extLst>
+                    <a:ext uri="{9D8B030D-6E8A-4147-A177-3AD203B41FA5}">
+                      <a16:colId xmlns:a16="http://schemas.microsoft.com/office/drawing/2014/main" val="209465686"/>
+                    </a:ext>
+                  </a:extLst>
+                </a:gridCol>
+              </a:tblGrid>
+              <a:tr h="536674">
+                <a:tc>
+                  <a:txBody>
+                    <a:bodyPr/>
+                    <a:lstStyle/>
+                    <a:p>
+                      <a:pPr algn="ctr"/>
+                      <a:r>
+                        <a:rPr lang="en-US" sz="1200" dirty="0">
+                          <a:latin typeface="Georgia" panose="02040502050405020303" pitchFamily="18" charset="0"/>
+                        </a:rPr>
+                        <a:t>S. No.</a:t>
+                      </a:r>
+                      <a:endParaRPr lang="en-IN" sz="1200" dirty="0">
+                        <a:latin typeface="Georgia" panose="02040502050405020303" pitchFamily="18" charset="0"/>
+                      </a:endParaRPr>
+                    </a:p>
+                  </a:txBody>
+                  <a:tcPr anchor="ctr"/>
+                </a:tc>
+                <a:tc>
+                  <a:txBody>
+                    <a:bodyPr/>
+                    <a:lstStyle/>
+                    <a:p>
+                      <a:pPr algn="ctr"/>
+                      <a:r>
+                        <a:rPr lang="en-US" sz="1200" dirty="0">
+                          <a:latin typeface="Georgia" panose="02040502050405020303" pitchFamily="18" charset="0"/>
+                        </a:rPr>
+                        <a:t>Paper</a:t>
+                      </a:r>
+                      <a:endParaRPr lang="en-IN" sz="1200" dirty="0">
+                        <a:latin typeface="Georgia" panose="02040502050405020303" pitchFamily="18" charset="0"/>
+                      </a:endParaRPr>
+                    </a:p>
+                  </a:txBody>
+                  <a:tcPr anchor="ctr"/>
+                </a:tc>
+                <a:tc>
+                  <a:txBody>
+                    <a:bodyPr/>
+                    <a:lstStyle/>
+                    <a:p>
+                      <a:pPr algn="ctr"/>
+                      <a:r>
+                        <a:rPr lang="en-US" sz="1200" dirty="0">
+                          <a:latin typeface="Georgia" panose="02040502050405020303" pitchFamily="18" charset="0"/>
+                        </a:rPr>
+                        <a:t>Year</a:t>
+                      </a:r>
+                      <a:endParaRPr lang="en-IN" sz="1200" dirty="0">
+                        <a:latin typeface="Georgia" panose="02040502050405020303" pitchFamily="18" charset="0"/>
+                      </a:endParaRPr>
+                    </a:p>
+                  </a:txBody>
+                  <a:tcPr anchor="ctr"/>
+                </a:tc>
+                <a:tc>
+                  <a:txBody>
+                    <a:bodyPr/>
+                    <a:lstStyle/>
+                    <a:p>
+                      <a:pPr algn="ctr"/>
+                      <a:r>
+                        <a:rPr lang="en-US" sz="1200" dirty="0">
+                          <a:latin typeface="Georgia" panose="02040502050405020303" pitchFamily="18" charset="0"/>
+                        </a:rPr>
+                        <a:t>Purpose</a:t>
+                      </a:r>
+                      <a:endParaRPr lang="en-IN" sz="1200" dirty="0">
+                        <a:latin typeface="Georgia" panose="02040502050405020303" pitchFamily="18" charset="0"/>
+                      </a:endParaRPr>
+                    </a:p>
+                  </a:txBody>
+                  <a:tcPr anchor="ctr"/>
+                </a:tc>
+                <a:tc>
+                  <a:txBody>
+                    <a:bodyPr/>
+                    <a:lstStyle/>
+                    <a:p>
+                      <a:pPr algn="ctr"/>
+                      <a:r>
+                        <a:rPr lang="en-US" sz="1200" dirty="0">
+                          <a:latin typeface="Georgia" panose="02040502050405020303" pitchFamily="18" charset="0"/>
+                        </a:rPr>
+                        <a:t>Key Findings</a:t>
+                      </a:r>
+                      <a:endParaRPr lang="en-IN" sz="1200" dirty="0">
+                        <a:latin typeface="Georgia" panose="02040502050405020303" pitchFamily="18" charset="0"/>
+                      </a:endParaRPr>
+                    </a:p>
+                  </a:txBody>
+                  <a:tcPr anchor="ctr"/>
+                </a:tc>
+                <a:extLst>
+                  <a:ext uri="{0D108BD9-81ED-4DB2-BD59-A6C34878D82A}">
+                    <a16:rowId xmlns:a16="http://schemas.microsoft.com/office/drawing/2014/main" val="2091510885"/>
+                  </a:ext>
+                </a:extLst>
+              </a:tr>
+              <a:tr h="751344">
+                <a:tc>
+                  <a:txBody>
+                    <a:bodyPr/>
+                    <a:lstStyle/>
+                    <a:p>
+                      <a:pPr algn="ctr"/>
+                      <a:r>
+                        <a:rPr lang="en-US" sz="1200" dirty="0">
+                          <a:latin typeface="Georgia" panose="02040502050405020303" pitchFamily="18" charset="0"/>
+                        </a:rPr>
+                        <a:t>1.</a:t>
+                      </a:r>
+                      <a:endParaRPr lang="en-IN" sz="1200" dirty="0">
+                        <a:latin typeface="Georgia" panose="02040502050405020303" pitchFamily="18" charset="0"/>
+                      </a:endParaRPr>
+                    </a:p>
+                  </a:txBody>
+                  <a:tcPr anchor="ctr"/>
+                </a:tc>
+                <a:tc>
+                  <a:txBody>
+                    <a:bodyPr/>
+                    <a:lstStyle/>
+                    <a:p>
+                      <a:pPr algn="just"/>
+                      <a:r>
+                        <a:rPr lang="en-US" sz="1200" dirty="0">
+                          <a:latin typeface="Georgia" panose="02040502050405020303" pitchFamily="18" charset="0"/>
+                        </a:rPr>
+                        <a:t>Automatic Number Plate Recognition: A Detailed Survey of Relevant Algorithms [1]</a:t>
+                      </a:r>
+                      <a:endParaRPr lang="en-IN" sz="1200" dirty="0">
+                        <a:latin typeface="Georgia" panose="02040502050405020303" pitchFamily="18" charset="0"/>
+                      </a:endParaRPr>
+                    </a:p>
+                  </a:txBody>
+                  <a:tcPr anchor="ctr"/>
+                </a:tc>
+                <a:tc>
+                  <a:txBody>
+                    <a:bodyPr/>
+                    <a:lstStyle/>
+                    <a:p>
+                      <a:pPr algn="ctr"/>
+                      <a:r>
+                        <a:rPr lang="en-US" sz="1200" dirty="0">
+                          <a:latin typeface="Georgia" panose="02040502050405020303" pitchFamily="18" charset="0"/>
+                        </a:rPr>
+                        <a:t>2021</a:t>
+                      </a:r>
+                      <a:endParaRPr lang="en-IN" sz="1200" dirty="0">
+                        <a:latin typeface="Georgia" panose="02040502050405020303" pitchFamily="18" charset="0"/>
+                      </a:endParaRPr>
+                    </a:p>
+                  </a:txBody>
+                  <a:tcPr anchor="ctr"/>
+                </a:tc>
+                <a:tc>
+                  <a:txBody>
+                    <a:bodyPr/>
+                    <a:lstStyle/>
+                    <a:p>
+                      <a:pPr algn="just"/>
+                      <a:r>
+                        <a:rPr lang="en-US" sz="1200" dirty="0">
+                          <a:latin typeface="Georgia" panose="02040502050405020303" pitchFamily="18" charset="0"/>
+                        </a:rPr>
+                        <a:t>Reviewed traditional image processing techniques used in ANPR systems.</a:t>
+                      </a:r>
+                      <a:endParaRPr lang="en-IN" sz="1200" dirty="0">
+                        <a:latin typeface="Georgia" panose="02040502050405020303" pitchFamily="18" charset="0"/>
+                      </a:endParaRPr>
+                    </a:p>
+                  </a:txBody>
+                  <a:tcPr anchor="ctr"/>
+                </a:tc>
+                <a:tc>
+                  <a:txBody>
+                    <a:bodyPr/>
+                    <a:lstStyle/>
+                    <a:p>
+                      <a:pPr algn="just"/>
+                      <a:r>
+                        <a:rPr lang="en-US" sz="1200" dirty="0">
+                          <a:latin typeface="Georgia" panose="02040502050405020303" pitchFamily="18" charset="0"/>
+                        </a:rPr>
+                        <a:t>Traditional methods were sensitive to lighting, shadows, and environmental noise.</a:t>
+                      </a:r>
+                      <a:endParaRPr lang="en-IN" sz="1200" dirty="0">
+                        <a:latin typeface="Georgia" panose="02040502050405020303" pitchFamily="18" charset="0"/>
+                      </a:endParaRPr>
+                    </a:p>
+                  </a:txBody>
+                  <a:tcPr anchor="ctr"/>
+                </a:tc>
+                <a:extLst>
+                  <a:ext uri="{0D108BD9-81ED-4DB2-BD59-A6C34878D82A}">
+                    <a16:rowId xmlns:a16="http://schemas.microsoft.com/office/drawing/2014/main" val="2223157282"/>
+                  </a:ext>
+                </a:extLst>
+              </a:tr>
+              <a:tr h="833737">
+                <a:tc>
+                  <a:txBody>
+                    <a:bodyPr/>
+                    <a:lstStyle/>
+                    <a:p>
+                      <a:pPr algn="ctr"/>
+                      <a:r>
+                        <a:rPr lang="en-US" sz="1200" dirty="0">
+                          <a:latin typeface="Georgia" panose="02040502050405020303" pitchFamily="18" charset="0"/>
+                        </a:rPr>
+                        <a:t>2.</a:t>
+                      </a:r>
+                      <a:endParaRPr lang="en-IN" sz="1200" dirty="0">
+                        <a:latin typeface="Georgia" panose="02040502050405020303" pitchFamily="18" charset="0"/>
+                      </a:endParaRPr>
+                    </a:p>
+                  </a:txBody>
+                  <a:tcPr anchor="ctr"/>
+                </a:tc>
+                <a:tc>
+                  <a:txBody>
+                    <a:bodyPr/>
+                    <a:lstStyle/>
+                    <a:p>
+                      <a:pPr algn="just"/>
+                      <a:r>
+                        <a:rPr lang="en-US" sz="1200" dirty="0">
+                          <a:latin typeface="Georgia" panose="02040502050405020303" pitchFamily="18" charset="0"/>
+                        </a:rPr>
+                        <a:t>Bangla License Plate Recognition Using Convolutional Neural Networks (CNN) [2]</a:t>
+                      </a:r>
+                      <a:endParaRPr lang="en-IN" sz="1200" dirty="0">
+                        <a:latin typeface="Georgia" panose="02040502050405020303" pitchFamily="18" charset="0"/>
+                      </a:endParaRPr>
+                    </a:p>
+                  </a:txBody>
+                  <a:tcPr anchor="ctr"/>
+                </a:tc>
+                <a:tc>
+                  <a:txBody>
+                    <a:bodyPr/>
+                    <a:lstStyle/>
+                    <a:p>
+                      <a:pPr algn="ctr"/>
+                      <a:r>
+                        <a:rPr lang="en-US" sz="1200" dirty="0">
+                          <a:latin typeface="Georgia" panose="02040502050405020303" pitchFamily="18" charset="0"/>
+                        </a:rPr>
+                        <a:t>2018</a:t>
+                      </a:r>
+                      <a:endParaRPr lang="en-IN" sz="1200" dirty="0">
+                        <a:latin typeface="Georgia" panose="02040502050405020303" pitchFamily="18" charset="0"/>
+                      </a:endParaRPr>
+                    </a:p>
+                  </a:txBody>
+                  <a:tcPr anchor="ctr"/>
+                </a:tc>
+                <a:tc>
+                  <a:txBody>
+                    <a:bodyPr/>
+                    <a:lstStyle/>
+                    <a:p>
+                      <a:pPr algn="just"/>
+                      <a:r>
+                        <a:rPr lang="en-US" sz="1200" dirty="0">
+                          <a:latin typeface="Georgia" panose="02040502050405020303" pitchFamily="18" charset="0"/>
+                        </a:rPr>
+                        <a:t>Proposed a CNN-based license plate recognition framework.</a:t>
+                      </a:r>
+                      <a:endParaRPr lang="en-IN" sz="1200" dirty="0">
+                        <a:latin typeface="Georgia" panose="02040502050405020303" pitchFamily="18" charset="0"/>
+                      </a:endParaRPr>
+                    </a:p>
+                  </a:txBody>
+                  <a:tcPr anchor="ctr"/>
+                </a:tc>
+                <a:tc>
+                  <a:txBody>
+                    <a:bodyPr/>
+                    <a:lstStyle/>
+                    <a:p>
+                      <a:pPr algn="just"/>
+                      <a:r>
+                        <a:rPr lang="en-US" sz="1200" dirty="0">
+                          <a:latin typeface="Georgia" panose="02040502050405020303" pitchFamily="18" charset="0"/>
+                        </a:rPr>
+                        <a:t>CNN models improved recognition accuracy compared to traditional machine learning methods.</a:t>
+                      </a:r>
+                      <a:endParaRPr lang="en-IN" sz="1200" dirty="0">
+                        <a:latin typeface="Georgia" panose="02040502050405020303" pitchFamily="18" charset="0"/>
+                      </a:endParaRPr>
+                    </a:p>
+                  </a:txBody>
+                  <a:tcPr anchor="ctr"/>
+                </a:tc>
+                <a:extLst>
+                  <a:ext uri="{0D108BD9-81ED-4DB2-BD59-A6C34878D82A}">
+                    <a16:rowId xmlns:a16="http://schemas.microsoft.com/office/drawing/2014/main" val="3140429723"/>
+                  </a:ext>
+                </a:extLst>
+              </a:tr>
+              <a:tr h="833737">
+                <a:tc>
+                  <a:txBody>
+                    <a:bodyPr/>
+                    <a:lstStyle/>
+                    <a:p>
+                      <a:pPr algn="ctr"/>
+                      <a:r>
+                        <a:rPr lang="en-US" sz="1200" dirty="0">
+                          <a:latin typeface="Georgia" panose="02040502050405020303" pitchFamily="18" charset="0"/>
+                        </a:rPr>
+                        <a:t>3.</a:t>
+                      </a:r>
+                      <a:endParaRPr lang="en-IN" sz="1200" dirty="0">
+                        <a:latin typeface="Georgia" panose="02040502050405020303" pitchFamily="18" charset="0"/>
+                      </a:endParaRPr>
+                    </a:p>
+                  </a:txBody>
+                  <a:tcPr anchor="ctr"/>
+                </a:tc>
+                <a:tc>
+                  <a:txBody>
+                    <a:bodyPr/>
+                    <a:lstStyle/>
+                    <a:p>
+                      <a:pPr algn="just"/>
+                      <a:r>
+                        <a:rPr lang="en-US" sz="1200" dirty="0">
+                          <a:latin typeface="Georgia" panose="02040502050405020303" pitchFamily="18" charset="0"/>
+                        </a:rPr>
+                        <a:t>Automatic License Plate Recognition System for Vehicles Using CNN [3]</a:t>
+                      </a:r>
+                      <a:endParaRPr lang="en-IN" sz="1200" dirty="0">
+                        <a:latin typeface="Georgia" panose="02040502050405020303" pitchFamily="18" charset="0"/>
+                      </a:endParaRPr>
+                    </a:p>
+                  </a:txBody>
+                  <a:tcPr anchor="ctr"/>
+                </a:tc>
+                <a:tc>
+                  <a:txBody>
+                    <a:bodyPr/>
+                    <a:lstStyle/>
+                    <a:p>
+                      <a:pPr algn="ctr"/>
+                      <a:r>
+                        <a:rPr lang="en-US" sz="1200" dirty="0">
+                          <a:latin typeface="Georgia" panose="02040502050405020303" pitchFamily="18" charset="0"/>
+                        </a:rPr>
+                        <a:t>2021</a:t>
+                      </a:r>
+                      <a:endParaRPr lang="en-IN" sz="1200" dirty="0">
+                        <a:latin typeface="Georgia" panose="02040502050405020303" pitchFamily="18" charset="0"/>
+                      </a:endParaRPr>
+                    </a:p>
+                  </a:txBody>
+                  <a:tcPr anchor="ctr"/>
+                </a:tc>
+                <a:tc>
+                  <a:txBody>
+                    <a:bodyPr/>
+                    <a:lstStyle/>
+                    <a:p>
+                      <a:pPr algn="just"/>
+                      <a:r>
+                        <a:rPr lang="en-US" sz="1200" dirty="0">
+                          <a:latin typeface="Georgia" panose="02040502050405020303" pitchFamily="18" charset="0"/>
+                        </a:rPr>
+                        <a:t>Developed an ANPR system using CNN for character recognition and preprocessing techniques.</a:t>
+                      </a:r>
+                      <a:endParaRPr lang="en-IN" sz="1200" dirty="0">
+                        <a:latin typeface="Georgia" panose="02040502050405020303" pitchFamily="18" charset="0"/>
+                      </a:endParaRPr>
+                    </a:p>
+                  </a:txBody>
+                  <a:tcPr anchor="ctr"/>
+                </a:tc>
+                <a:tc>
+                  <a:txBody>
+                    <a:bodyPr/>
+                    <a:lstStyle/>
+                    <a:p>
+                      <a:pPr algn="just"/>
+                      <a:r>
+                        <a:rPr lang="en-US" sz="1200" dirty="0">
+                          <a:latin typeface="Georgia" panose="02040502050405020303" pitchFamily="18" charset="0"/>
+                        </a:rPr>
+                        <a:t>CNN-based systems achieved good recognition accuracy but required high computational resources.</a:t>
+                      </a:r>
+                      <a:endParaRPr lang="en-IN" sz="1200" dirty="0">
+                        <a:latin typeface="Georgia" panose="02040502050405020303" pitchFamily="18" charset="0"/>
+                      </a:endParaRPr>
+                    </a:p>
+                  </a:txBody>
+                  <a:tcPr anchor="ctr"/>
+                </a:tc>
+                <a:extLst>
+                  <a:ext uri="{0D108BD9-81ED-4DB2-BD59-A6C34878D82A}">
+                    <a16:rowId xmlns:a16="http://schemas.microsoft.com/office/drawing/2014/main" val="3823724870"/>
+                  </a:ext>
+                </a:extLst>
+              </a:tr>
+              <a:tr h="833737">
+                <a:tc>
+                  <a:txBody>
+                    <a:bodyPr/>
+                    <a:lstStyle/>
+                    <a:p>
+                      <a:pPr algn="ctr"/>
+                      <a:r>
+                        <a:rPr lang="en-US" sz="1200" dirty="0">
+                          <a:latin typeface="Georgia" panose="02040502050405020303" pitchFamily="18" charset="0"/>
+                        </a:rPr>
+                        <a:t>4.</a:t>
+                      </a:r>
+                      <a:endParaRPr lang="en-IN" sz="1200" dirty="0">
+                        <a:latin typeface="Georgia" panose="02040502050405020303" pitchFamily="18" charset="0"/>
+                      </a:endParaRPr>
+                    </a:p>
+                  </a:txBody>
+                  <a:tcPr anchor="ctr"/>
+                </a:tc>
+                <a:tc>
+                  <a:txBody>
+                    <a:bodyPr/>
+                    <a:lstStyle/>
+                    <a:p>
+                      <a:pPr algn="just"/>
+                      <a:r>
+                        <a:rPr lang="en-US" sz="1200" dirty="0">
+                          <a:latin typeface="Georgia" panose="02040502050405020303" pitchFamily="18" charset="0"/>
+                        </a:rPr>
+                        <a:t>A Robust Real-Time Automatic License Plate Recognition Based on the YOLO Detector [4]</a:t>
+                      </a:r>
+                      <a:endParaRPr lang="en-IN" sz="1200" dirty="0">
+                        <a:latin typeface="Georgia" panose="02040502050405020303" pitchFamily="18" charset="0"/>
+                      </a:endParaRPr>
+                    </a:p>
+                  </a:txBody>
+                  <a:tcPr anchor="ctr"/>
+                </a:tc>
+                <a:tc>
+                  <a:txBody>
+                    <a:bodyPr/>
+                    <a:lstStyle/>
+                    <a:p>
+                      <a:pPr algn="ctr"/>
+                      <a:r>
+                        <a:rPr lang="en-US" sz="1200" dirty="0">
+                          <a:latin typeface="Georgia" panose="02040502050405020303" pitchFamily="18" charset="0"/>
+                        </a:rPr>
+                        <a:t>2018</a:t>
+                      </a:r>
+                      <a:endParaRPr lang="en-IN" sz="1200" dirty="0">
+                        <a:latin typeface="Georgia" panose="02040502050405020303" pitchFamily="18" charset="0"/>
+                      </a:endParaRPr>
+                    </a:p>
+                  </a:txBody>
+                  <a:tcPr anchor="ctr"/>
+                </a:tc>
+                <a:tc>
+                  <a:txBody>
+                    <a:bodyPr/>
+                    <a:lstStyle/>
+                    <a:p>
+                      <a:pPr algn="just"/>
+                      <a:r>
+                        <a:rPr lang="en-US" sz="1200" dirty="0">
+                          <a:latin typeface="Georgia" panose="02040502050405020303" pitchFamily="18" charset="0"/>
+                        </a:rPr>
+                        <a:t>Developed a YOLO-based ANPR system for real-time license plate detection.</a:t>
+                      </a:r>
+                      <a:endParaRPr lang="en-IN" sz="1200" dirty="0">
+                        <a:latin typeface="Georgia" panose="02040502050405020303" pitchFamily="18" charset="0"/>
+                      </a:endParaRPr>
+                    </a:p>
+                  </a:txBody>
+                  <a:tcPr anchor="ctr"/>
+                </a:tc>
+                <a:tc>
+                  <a:txBody>
+                    <a:bodyPr/>
+                    <a:lstStyle/>
+                    <a:p>
+                      <a:pPr algn="just"/>
+                      <a:r>
+                        <a:rPr lang="en-US" sz="1200" dirty="0">
+                          <a:latin typeface="Georgia" panose="02040502050405020303" pitchFamily="18" charset="0"/>
+                        </a:rPr>
+                        <a:t>YOLO significantly improved detection speed and localization accuracy in real-world scenarios.</a:t>
+                      </a:r>
+                      <a:endParaRPr lang="en-IN" sz="1200" dirty="0">
+                        <a:latin typeface="Georgia" panose="02040502050405020303" pitchFamily="18" charset="0"/>
+                      </a:endParaRPr>
+                    </a:p>
+                  </a:txBody>
+                  <a:tcPr anchor="ctr"/>
+                </a:tc>
+                <a:extLst>
+                  <a:ext uri="{0D108BD9-81ED-4DB2-BD59-A6C34878D82A}">
+                    <a16:rowId xmlns:a16="http://schemas.microsoft.com/office/drawing/2014/main" val="166168147"/>
+                  </a:ext>
+                </a:extLst>
+              </a:tr>
+              <a:tr h="966013">
+                <a:tc>
+                  <a:txBody>
+                    <a:bodyPr/>
+                    <a:lstStyle/>
+                    <a:p>
+                      <a:pPr algn="ctr"/>
+                      <a:r>
+                        <a:rPr lang="en-US" sz="1200" dirty="0">
+                          <a:latin typeface="Georgia" panose="02040502050405020303" pitchFamily="18" charset="0"/>
+                        </a:rPr>
+                        <a:t>5.</a:t>
+                      </a:r>
+                      <a:endParaRPr lang="en-IN" sz="1200" dirty="0">
+                        <a:latin typeface="Georgia" panose="02040502050405020303" pitchFamily="18" charset="0"/>
+                      </a:endParaRPr>
+                    </a:p>
+                  </a:txBody>
+                  <a:tcPr anchor="ctr"/>
+                </a:tc>
+                <a:tc>
+                  <a:txBody>
+                    <a:bodyPr/>
+                    <a:lstStyle/>
+                    <a:p>
+                      <a:pPr algn="just"/>
+                      <a:r>
+                        <a:rPr lang="en-US" sz="1200" dirty="0">
+                          <a:latin typeface="Georgia" panose="02040502050405020303" pitchFamily="18" charset="0"/>
+                        </a:rPr>
+                        <a:t>An Efficient and Layout-Independent Automatic License Plate Recognition System Based on the YOLO Detector [5]</a:t>
+                      </a:r>
+                      <a:endParaRPr lang="en-IN" sz="1200" dirty="0">
+                        <a:latin typeface="Georgia" panose="02040502050405020303" pitchFamily="18" charset="0"/>
+                      </a:endParaRPr>
+                    </a:p>
+                  </a:txBody>
+                  <a:tcPr anchor="ctr"/>
+                </a:tc>
+                <a:tc>
+                  <a:txBody>
+                    <a:bodyPr/>
+                    <a:lstStyle/>
+                    <a:p>
+                      <a:pPr algn="ctr"/>
+                      <a:r>
+                        <a:rPr lang="en-US" sz="1200" dirty="0">
+                          <a:latin typeface="Georgia" panose="02040502050405020303" pitchFamily="18" charset="0"/>
+                        </a:rPr>
+                        <a:t>2019</a:t>
+                      </a:r>
+                      <a:endParaRPr lang="en-IN" sz="1200" dirty="0">
+                        <a:latin typeface="Georgia" panose="02040502050405020303" pitchFamily="18" charset="0"/>
+                      </a:endParaRPr>
+                    </a:p>
+                  </a:txBody>
+                  <a:tcPr anchor="ctr"/>
+                </a:tc>
+                <a:tc>
+                  <a:txBody>
+                    <a:bodyPr/>
+                    <a:lstStyle/>
+                    <a:p>
+                      <a:pPr algn="just">
+                        <a:buNone/>
+                      </a:pPr>
+                      <a:r>
+                        <a:rPr lang="en-US" sz="1200" dirty="0">
+                          <a:latin typeface="Georgia" panose="02040502050405020303" pitchFamily="18" charset="0"/>
+                        </a:rPr>
+                        <a:t>Proposed a layout-independent ANPR system capable of handling multiple license plate formats.</a:t>
+                      </a:r>
+                      <a:endParaRPr lang="en-IN" sz="1200" dirty="0">
+                        <a:latin typeface="Georgia" panose="02040502050405020303" pitchFamily="18" charset="0"/>
+                      </a:endParaRPr>
+                    </a:p>
+                  </a:txBody>
+                  <a:tcPr anchor="ctr"/>
+                </a:tc>
+                <a:tc>
+                  <a:txBody>
+                    <a:bodyPr/>
+                    <a:lstStyle/>
+                    <a:p>
+                      <a:pPr algn="just"/>
+                      <a:r>
+                        <a:rPr lang="en-US" sz="1200" dirty="0">
+                          <a:latin typeface="Georgia" panose="02040502050405020303" pitchFamily="18" charset="0"/>
+                        </a:rPr>
+                        <a:t>Improved recognition accuracy across different datasets and plate layouts.</a:t>
+                      </a:r>
+                      <a:endParaRPr lang="en-IN" sz="1200" dirty="0">
+                        <a:latin typeface="Georgia" panose="02040502050405020303" pitchFamily="18" charset="0"/>
+                      </a:endParaRPr>
+                    </a:p>
+                  </a:txBody>
+                  <a:tcPr anchor="ctr"/>
+                </a:tc>
+                <a:extLst>
+                  <a:ext uri="{0D108BD9-81ED-4DB2-BD59-A6C34878D82A}">
+                    <a16:rowId xmlns:a16="http://schemas.microsoft.com/office/drawing/2014/main" val="2201428069"/>
+                  </a:ext>
+                </a:extLst>
+              </a:tr>
+            </a:tbl>
+          </a:graphicData>
+        </a:graphic>
+      </p:graphicFrame>
+      <p:sp>
+        <p:nvSpPr>
+          <p:cNvPr id="4" name="Slide Number Placeholder 3">
+            <a:extLst>
+              <a:ext uri="{FF2B5EF4-FFF2-40B4-BE49-F238E27FC236}">
+                <a16:creationId xmlns:a16="http://schemas.microsoft.com/office/drawing/2014/main" id="{BE879C9D-5DD2-8FF4-5820-6AABD996742E}"/>
               </a:ext>
             </a:extLst>
           </p:cNvPr>
@@ -7211,10 +8597,51 @@
           </a:p>
         </p:txBody>
       </p:sp>
+      <p:sp>
+        <p:nvSpPr>
+          <p:cNvPr id="3" name="TextBox 2">
+            <a:extLst>
+              <a:ext uri="{FF2B5EF4-FFF2-40B4-BE49-F238E27FC236}">
+                <a16:creationId xmlns:a16="http://schemas.microsoft.com/office/drawing/2014/main" id="{3C65CE3C-A7C6-2540-1403-4A7938DA5285}"/>
+              </a:ext>
+            </a:extLst>
+          </p:cNvPr>
+          <p:cNvSpPr txBox="1"/>
+          <p:nvPr/>
+        </p:nvSpPr>
+        <p:spPr>
+          <a:xfrm>
+            <a:off x="3047223" y="6403785"/>
+            <a:ext cx="6097554" cy="338554"/>
+          </a:xfrm>
+          <a:prstGeom prst="rect">
+            <a:avLst/>
+          </a:prstGeom>
+          <a:noFill/>
+        </p:spPr>
+        <p:txBody>
+          <a:bodyPr wrap="square">
+            <a:spAutoFit/>
+          </a:bodyPr>
+          <a:lstStyle/>
+          <a:p>
+            <a:pPr algn="ctr"/>
+            <a:r>
+              <a:rPr lang="en-US" sz="1600" dirty="0">
+                <a:latin typeface="Georgia" panose="02040502050405020303" pitchFamily="18" charset="0"/>
+              </a:rPr>
+              <a:t>Table 1 : Research Paper Findings</a:t>
+            </a:r>
+            <a:endParaRPr lang="en-IN" sz="1600" dirty="0">
+              <a:latin typeface="Georgia" panose="02040502050405020303" pitchFamily="18" charset="0"/>
+            </a:endParaRPr>
+          </a:p>
+        </p:txBody>
+      </p:sp>
     </p:spTree>
     <p:extLst>
       <p:ext uri="{BB962C8B-B14F-4D97-AF65-F5344CB8AC3E}">
-        <p14:creationId xmlns:p14="http://schemas.microsoft.com/office/powerpoint/2010/main" val="881853512"/>
+        <p14:creationId xmlns:p14="http://schemas.microsoft.com/office/powerpoint/2010/main" val="2833201553"/>
       </p:ext>
     </p:extLst>
   </p:cSld>
@@ -7246,7 +8673,7 @@
           <p:cNvPr id="2" name="Title 1">
             <a:extLst>
               <a:ext uri="{FF2B5EF4-FFF2-40B4-BE49-F238E27FC236}">
-                <a16:creationId xmlns:a16="http://schemas.microsoft.com/office/drawing/2014/main" id="{831A6FE1-A5C0-FFBA-0220-9DF1865D631C}"/>
+                <a16:creationId xmlns:a16="http://schemas.microsoft.com/office/drawing/2014/main" id="{56F384A4-74F1-2C60-9996-7DDE39B01C82}"/>
               </a:ext>
             </a:extLst>
           </p:cNvPr>
@@ -7257,12 +8684,7 @@
             <p:ph type="title"/>
           </p:nvPr>
         </p:nvSpPr>
-        <p:spPr>
-          <a:xfrm>
-            <a:off x="262467" y="341062"/>
-            <a:ext cx="11091333" cy="971272"/>
-          </a:xfrm>
-        </p:spPr>
+        <p:spPr/>
         <p:txBody>
           <a:bodyPr>
             <a:normAutofit/>
@@ -7272,12 +8694,13 @@
             <a:pPr algn="ctr"/>
             <a:r>
               <a:rPr lang="en-US" sz="3200" b="1" dirty="0">
-                <a:latin typeface="Times New Roman" panose="02020603050405020304" pitchFamily="18" charset="0"/>
-                <a:cs typeface="Times New Roman" panose="02020603050405020304" pitchFamily="18" charset="0"/>
-              </a:rPr>
-              <a:t>SOLUTION</a:t>
-            </a:r>
-            <a:endParaRPr lang="en-IN" sz="3200" dirty="0"/>
+                <a:latin typeface="Georgia" panose="02040502050405020303" pitchFamily="18" charset="0"/>
+              </a:rPr>
+              <a:t>PROBLEM STATEMENT</a:t>
+            </a:r>
+            <a:endParaRPr lang="en-IN" sz="3200" b="1" dirty="0">
+              <a:latin typeface="Georgia" panose="02040502050405020303" pitchFamily="18" charset="0"/>
+            </a:endParaRPr>
           </a:p>
         </p:txBody>
       </p:sp>
@@ -7286,7 +8709,7 @@
           <p:cNvPr id="3" name="Content Placeholder 2">
             <a:extLst>
               <a:ext uri="{FF2B5EF4-FFF2-40B4-BE49-F238E27FC236}">
-                <a16:creationId xmlns:a16="http://schemas.microsoft.com/office/drawing/2014/main" id="{8875A188-2852-FE4B-ACB3-F80D6C1EE8A3}"/>
+                <a16:creationId xmlns:a16="http://schemas.microsoft.com/office/drawing/2014/main" id="{70AEEDFB-EDA3-B395-2D69-7E56BB9A122D}"/>
               </a:ext>
             </a:extLst>
           </p:cNvPr>
@@ -7299,221 +8722,53 @@
         </p:nvSpPr>
         <p:spPr>
           <a:xfrm>
-            <a:off x="262467" y="1312334"/>
-            <a:ext cx="8348133" cy="4639733"/>
+            <a:off x="838200" y="1847850"/>
+            <a:ext cx="10515600" cy="4351338"/>
           </a:xfrm>
         </p:spPr>
         <p:txBody>
           <a:bodyPr>
-            <a:noAutofit/>
+            <a:normAutofit/>
           </a:bodyPr>
           <a:lstStyle/>
           <a:p>
-            <a:pPr marL="0" indent="0">
-              <a:buNone/>
-            </a:pPr>
-            <a:r>
-              <a:rPr lang="en-US" sz="1800" b="1" dirty="0">
-                <a:latin typeface="Times New Roman" panose="02020603050405020304" pitchFamily="18" charset="0"/>
-                <a:cs typeface="Times New Roman" panose="02020603050405020304" pitchFamily="18" charset="0"/>
-              </a:rPr>
-              <a:t>Step-by-Step Workflow:</a:t>
-            </a:r>
-            <a:endParaRPr lang="en-US" sz="1800" dirty="0">
-              <a:latin typeface="Times New Roman" panose="02020603050405020304" pitchFamily="18" charset="0"/>
-              <a:cs typeface="Times New Roman" panose="02020603050405020304" pitchFamily="18" charset="0"/>
+            <a:pPr algn="just"/>
+            <a:r>
+              <a:rPr lang="en-US" sz="2000" dirty="0">
+                <a:latin typeface="Georgia" panose="02040502050405020303" pitchFamily="18" charset="0"/>
+              </a:rPr>
+              <a:t>Vehicle entry at the college main gate is currently not monitored through an automated system, making it difficult to identify and track vehicles efficiently. The absence of a proper monitoring mechanism can reduce security and make vehicle verification more challenging, especially when a large number of vehicles enter the campus.</a:t>
+            </a:r>
+          </a:p>
+          <a:p>
+            <a:pPr algn="just"/>
+            <a:endParaRPr lang="en-US" sz="2000" dirty="0">
+              <a:latin typeface="Georgia" panose="02040502050405020303" pitchFamily="18" charset="0"/>
             </a:endParaRPr>
           </a:p>
           <a:p>
-            <a:pPr marL="342900" indent="-342900">
-              <a:buAutoNum type="arabicPeriod"/>
-            </a:pPr>
-            <a:r>
-              <a:rPr lang="en-US" sz="1800" b="1" dirty="0">
-                <a:latin typeface="Times New Roman" panose="02020603050405020304" pitchFamily="18" charset="0"/>
-                <a:cs typeface="Times New Roman" panose="02020603050405020304" pitchFamily="18" charset="0"/>
-              </a:rPr>
-              <a:t>Image/Video Capture:</a:t>
-            </a:r>
-            <a:br>
-              <a:rPr lang="en-US" sz="1800" dirty="0">
-                <a:latin typeface="Times New Roman" panose="02020603050405020304" pitchFamily="18" charset="0"/>
-                <a:cs typeface="Times New Roman" panose="02020603050405020304" pitchFamily="18" charset="0"/>
-              </a:rPr>
-            </a:br>
-            <a:r>
-              <a:rPr lang="en-US" sz="1800" dirty="0">
-                <a:latin typeface="Times New Roman" panose="02020603050405020304" pitchFamily="18" charset="0"/>
-                <a:cs typeface="Times New Roman" panose="02020603050405020304" pitchFamily="18" charset="0"/>
-              </a:rPr>
-              <a:t>Capture input from a camera installed at the college main gate for real-time monitoring.</a:t>
-            </a:r>
-          </a:p>
-          <a:p>
-            <a:pPr marL="342900" indent="-342900">
-              <a:buAutoNum type="arabicPeriod"/>
-            </a:pPr>
-            <a:r>
-              <a:rPr lang="en-US" sz="1800" b="1" dirty="0">
-                <a:latin typeface="Times New Roman" panose="02020603050405020304" pitchFamily="18" charset="0"/>
-                <a:cs typeface="Times New Roman" panose="02020603050405020304" pitchFamily="18" charset="0"/>
-              </a:rPr>
-              <a:t>License Plate Detection:</a:t>
-            </a:r>
-            <a:br>
-              <a:rPr lang="en-US" sz="1800" dirty="0">
-                <a:latin typeface="Times New Roman" panose="02020603050405020304" pitchFamily="18" charset="0"/>
-                <a:cs typeface="Times New Roman" panose="02020603050405020304" pitchFamily="18" charset="0"/>
-              </a:rPr>
-            </a:br>
-            <a:r>
-              <a:rPr lang="en-US" sz="1800" dirty="0">
-                <a:latin typeface="Times New Roman" panose="02020603050405020304" pitchFamily="18" charset="0"/>
-                <a:cs typeface="Times New Roman" panose="02020603050405020304" pitchFamily="18" charset="0"/>
-              </a:rPr>
-              <a:t>Use a trained </a:t>
-            </a:r>
-            <a:r>
-              <a:rPr lang="en-US" sz="1800" b="1" dirty="0">
-                <a:latin typeface="Times New Roman" panose="02020603050405020304" pitchFamily="18" charset="0"/>
-                <a:cs typeface="Times New Roman" panose="02020603050405020304" pitchFamily="18" charset="0"/>
-              </a:rPr>
-              <a:t>YOLOv8 deep learning model</a:t>
-            </a:r>
-            <a:r>
-              <a:rPr lang="en-US" sz="1800" dirty="0">
-                <a:latin typeface="Times New Roman" panose="02020603050405020304" pitchFamily="18" charset="0"/>
-                <a:cs typeface="Times New Roman" panose="02020603050405020304" pitchFamily="18" charset="0"/>
-              </a:rPr>
-              <a:t> to detect and localize the license plate in the frame with high accuracy.</a:t>
-            </a:r>
-          </a:p>
-          <a:p>
-            <a:pPr marL="342900" indent="-342900">
-              <a:buAutoNum type="arabicPeriod"/>
-            </a:pPr>
-            <a:r>
-              <a:rPr lang="en-US" sz="1800" b="1" dirty="0">
-                <a:latin typeface="Times New Roman" panose="02020603050405020304" pitchFamily="18" charset="0"/>
-                <a:cs typeface="Times New Roman" panose="02020603050405020304" pitchFamily="18" charset="0"/>
-              </a:rPr>
-              <a:t>Plate Region Extraction:</a:t>
-            </a:r>
-            <a:br>
-              <a:rPr lang="en-US" sz="1800" dirty="0">
-                <a:latin typeface="Times New Roman" panose="02020603050405020304" pitchFamily="18" charset="0"/>
-                <a:cs typeface="Times New Roman" panose="02020603050405020304" pitchFamily="18" charset="0"/>
-              </a:rPr>
-            </a:br>
-            <a:r>
-              <a:rPr lang="en-US" sz="1800" dirty="0">
-                <a:latin typeface="Times New Roman" panose="02020603050405020304" pitchFamily="18" charset="0"/>
-                <a:cs typeface="Times New Roman" panose="02020603050405020304" pitchFamily="18" charset="0"/>
-              </a:rPr>
-              <a:t>Crop the detected license plate region (ROI) from the image for further processing.</a:t>
-            </a:r>
-          </a:p>
-          <a:p>
-            <a:pPr marL="342900" indent="-342900">
-              <a:buAutoNum type="arabicPeriod"/>
-            </a:pPr>
-            <a:r>
-              <a:rPr lang="en-US" sz="1800" b="1" dirty="0">
-                <a:latin typeface="Times New Roman" panose="02020603050405020304" pitchFamily="18" charset="0"/>
-                <a:cs typeface="Times New Roman" panose="02020603050405020304" pitchFamily="18" charset="0"/>
-              </a:rPr>
-              <a:t>Text Recognition (OCR):</a:t>
-            </a:r>
-            <a:br>
-              <a:rPr lang="en-US" sz="1800" dirty="0">
-                <a:latin typeface="Times New Roman" panose="02020603050405020304" pitchFamily="18" charset="0"/>
-                <a:cs typeface="Times New Roman" panose="02020603050405020304" pitchFamily="18" charset="0"/>
-              </a:rPr>
-            </a:br>
-            <a:r>
-              <a:rPr lang="en-US" sz="1800" dirty="0">
-                <a:latin typeface="Times New Roman" panose="02020603050405020304" pitchFamily="18" charset="0"/>
-                <a:cs typeface="Times New Roman" panose="02020603050405020304" pitchFamily="18" charset="0"/>
-              </a:rPr>
-              <a:t>Apply </a:t>
-            </a:r>
-            <a:r>
-              <a:rPr lang="en-US" sz="1800" b="1" dirty="0">
-                <a:latin typeface="Times New Roman" panose="02020603050405020304" pitchFamily="18" charset="0"/>
-                <a:cs typeface="Times New Roman" panose="02020603050405020304" pitchFamily="18" charset="0"/>
-              </a:rPr>
-              <a:t>EasyOCR</a:t>
-            </a:r>
-            <a:r>
-              <a:rPr lang="en-US" sz="1800" dirty="0">
-                <a:latin typeface="Times New Roman" panose="02020603050405020304" pitchFamily="18" charset="0"/>
-                <a:cs typeface="Times New Roman" panose="02020603050405020304" pitchFamily="18" charset="0"/>
-              </a:rPr>
-              <a:t> to extract alphanumeric characters from the cropped license plate.</a:t>
-            </a:r>
-          </a:p>
-          <a:p>
-            <a:pPr marL="342900" indent="-342900">
-              <a:buAutoNum type="arabicPeriod"/>
-            </a:pPr>
-            <a:r>
-              <a:rPr lang="en-US" sz="1800" b="1" dirty="0">
-                <a:latin typeface="Times New Roman" panose="02020603050405020304" pitchFamily="18" charset="0"/>
-                <a:cs typeface="Times New Roman" panose="02020603050405020304" pitchFamily="18" charset="0"/>
-              </a:rPr>
-              <a:t>Text Post-Processing:</a:t>
-            </a:r>
-            <a:br>
-              <a:rPr lang="en-US" sz="1800" dirty="0">
-                <a:latin typeface="Times New Roman" panose="02020603050405020304" pitchFamily="18" charset="0"/>
-                <a:cs typeface="Times New Roman" panose="02020603050405020304" pitchFamily="18" charset="0"/>
-              </a:rPr>
-            </a:br>
-            <a:r>
-              <a:rPr lang="en-US" sz="1800" dirty="0">
-                <a:latin typeface="Times New Roman" panose="02020603050405020304" pitchFamily="18" charset="0"/>
-                <a:cs typeface="Times New Roman" panose="02020603050405020304" pitchFamily="18" charset="0"/>
-              </a:rPr>
-              <a:t>Clean and format the extracted text using regular expressions to match standard Indian license plate formats.</a:t>
-            </a:r>
-          </a:p>
-          <a:p>
-            <a:pPr marL="342900" indent="-342900">
-              <a:buAutoNum type="arabicPeriod"/>
-            </a:pPr>
-            <a:r>
-              <a:rPr lang="en-US" sz="1800" b="1" dirty="0">
-                <a:latin typeface="Times New Roman" panose="02020603050405020304" pitchFamily="18" charset="0"/>
-                <a:cs typeface="Times New Roman" panose="02020603050405020304" pitchFamily="18" charset="0"/>
-              </a:rPr>
-              <a:t>Output &amp; Logging:</a:t>
-            </a:r>
-            <a:br>
-              <a:rPr lang="en-US" sz="1800" dirty="0">
-                <a:latin typeface="Times New Roman" panose="02020603050405020304" pitchFamily="18" charset="0"/>
-                <a:cs typeface="Times New Roman" panose="02020603050405020304" pitchFamily="18" charset="0"/>
-              </a:rPr>
-            </a:br>
-            <a:r>
-              <a:rPr lang="en-US" sz="1800" dirty="0">
-                <a:latin typeface="Times New Roman" panose="02020603050405020304" pitchFamily="18" charset="0"/>
-                <a:cs typeface="Times New Roman" panose="02020603050405020304" pitchFamily="18" charset="0"/>
-              </a:rPr>
-              <a:t>Display the detected plate number and store it with timestamp for entry monitoring and record keeping at the college gate.</a:t>
-            </a:r>
-            <a:endParaRPr lang="en-IN" sz="1800" dirty="0">
-              <a:latin typeface="Times New Roman" panose="02020603050405020304" pitchFamily="18" charset="0"/>
-              <a:cs typeface="Times New Roman" panose="02020603050405020304" pitchFamily="18" charset="0"/>
+            <a:pPr algn="just"/>
+            <a:r>
+              <a:rPr lang="en-US" sz="2000" dirty="0">
+                <a:latin typeface="Georgia" panose="02040502050405020303" pitchFamily="18" charset="0"/>
+              </a:rPr>
+              <a:t>To address this issue, there is a need for an automated system capable of detecting and recognizing vehicle number plates in real time. An Automatic Number Plate Recognition (ANPR) system can help improve vehicle monitoring, support real-time surveillance, and enhance overall security at the college main gate while maintaining vehicle logs for security purposes.</a:t>
+            </a:r>
+          </a:p>
+          <a:p>
+            <a:pPr algn="just"/>
+            <a:endParaRPr lang="en-IN" sz="2000" dirty="0">
+              <a:latin typeface="Georgia" panose="02040502050405020303" pitchFamily="18" charset="0"/>
             </a:endParaRPr>
           </a:p>
         </p:txBody>
       </p:sp>
       <p:sp>
         <p:nvSpPr>
-          <p:cNvPr id="12" name="Slide Number Placeholder 11">
-            <a:extLst>
-              <a:ext uri="{FF2B5EF4-FFF2-40B4-BE49-F238E27FC236}">
-                <a16:creationId xmlns:a16="http://schemas.microsoft.com/office/drawing/2014/main" id="{6CE0228D-BC98-7980-8A03-24BC5762223F}"/>
+          <p:cNvPr id="4" name="Slide Number Placeholder 3">
+            <a:extLst>
+              <a:ext uri="{FF2B5EF4-FFF2-40B4-BE49-F238E27FC236}">
+                <a16:creationId xmlns:a16="http://schemas.microsoft.com/office/drawing/2014/main" id="{F0CB1FAC-FDC5-24E8-B0E7-F0527E0B0D63}"/>
               </a:ext>
             </a:extLst>
           </p:cNvPr>
@@ -7533,44 +8788,14 @@
               <a:rPr lang="en-IN" smtClean="0"/>
               <a:t>6</a:t>
             </a:fld>
-            <a:endParaRPr lang="en-IN" dirty="0"/>
-          </a:p>
-        </p:txBody>
-      </p:sp>
-      <p:pic>
-        <p:nvPicPr>
-          <p:cNvPr id="6" name="Picture 5">
-            <a:extLst>
-              <a:ext uri="{FF2B5EF4-FFF2-40B4-BE49-F238E27FC236}">
-                <a16:creationId xmlns:a16="http://schemas.microsoft.com/office/drawing/2014/main" id="{FAB7BC84-91AF-0EAB-7B2A-F1D09A83A77A}"/>
-              </a:ext>
-            </a:extLst>
-          </p:cNvPr>
-          <p:cNvPicPr>
-            <a:picLocks noChangeAspect="1"/>
-          </p:cNvPicPr>
-          <p:nvPr/>
-        </p:nvPicPr>
-        <p:blipFill>
-          <a:blip r:embed="rId2"/>
-          <a:stretch>
-            <a:fillRect/>
-          </a:stretch>
-        </p:blipFill>
-        <p:spPr>
-          <a:xfrm>
-            <a:off x="9086534" y="1250237"/>
-            <a:ext cx="2267266" cy="5106113"/>
-          </a:xfrm>
-          <a:prstGeom prst="rect">
-            <a:avLst/>
-          </a:prstGeom>
-        </p:spPr>
-      </p:pic>
+            <a:endParaRPr lang="en-IN"/>
+          </a:p>
+        </p:txBody>
+      </p:sp>
     </p:spTree>
     <p:extLst>
       <p:ext uri="{BB962C8B-B14F-4D97-AF65-F5344CB8AC3E}">
-        <p14:creationId xmlns:p14="http://schemas.microsoft.com/office/powerpoint/2010/main" val="3339192054"/>
+        <p14:creationId xmlns:p14="http://schemas.microsoft.com/office/powerpoint/2010/main" val="3892608611"/>
       </p:ext>
     </p:extLst>
   </p:cSld>
@@ -7602,7 +8827,7 @@
           <p:cNvPr id="2" name="Title 1">
             <a:extLst>
               <a:ext uri="{FF2B5EF4-FFF2-40B4-BE49-F238E27FC236}">
-                <a16:creationId xmlns:a16="http://schemas.microsoft.com/office/drawing/2014/main" id="{2894E09A-44BE-803B-1DA3-9D39D8208E25}"/>
+                <a16:creationId xmlns:a16="http://schemas.microsoft.com/office/drawing/2014/main" id="{831A6FE1-A5C0-FFBA-0220-9DF1865D631C}"/>
               </a:ext>
             </a:extLst>
           </p:cNvPr>
@@ -7615,8 +8840,8 @@
         </p:nvSpPr>
         <p:spPr>
           <a:xfrm>
-            <a:off x="838200" y="0"/>
-            <a:ext cx="10515600" cy="1325563"/>
+            <a:off x="550333" y="138921"/>
+            <a:ext cx="11091333" cy="971272"/>
           </a:xfrm>
         </p:spPr>
         <p:txBody>
@@ -7628,84 +8853,284 @@
             <a:pPr algn="ctr"/>
             <a:r>
               <a:rPr lang="en-US" sz="3200" b="1" dirty="0">
-                <a:latin typeface="Times New Roman" panose="02020603050405020304" pitchFamily="18" charset="0"/>
+                <a:latin typeface="Georgia" panose="02040502050405020303" pitchFamily="18" charset="0"/>
                 <a:cs typeface="Times New Roman" panose="02020603050405020304" pitchFamily="18" charset="0"/>
               </a:rPr>
-              <a:t>OUTPUT</a:t>
-            </a:r>
-            <a:endParaRPr lang="en-IN" sz="3200" b="1" dirty="0">
-              <a:latin typeface="Times New Roman" panose="02020603050405020304" pitchFamily="18" charset="0"/>
-              <a:cs typeface="Times New Roman" panose="02020603050405020304" pitchFamily="18" charset="0"/>
+              <a:t>PROPOSED METHODOLOGY</a:t>
+            </a:r>
+            <a:endParaRPr lang="en-IN" sz="3200" dirty="0">
+              <a:latin typeface="Georgia" panose="02040502050405020303" pitchFamily="18" charset="0"/>
             </a:endParaRPr>
           </a:p>
         </p:txBody>
       </p:sp>
-      <p:pic>
-        <p:nvPicPr>
-          <p:cNvPr id="6" name="Content Placeholder 5">
-            <a:extLst>
-              <a:ext uri="{FF2B5EF4-FFF2-40B4-BE49-F238E27FC236}">
-                <a16:creationId xmlns:a16="http://schemas.microsoft.com/office/drawing/2014/main" id="{2FD610C7-4C39-614D-E4E4-940002A19CE1}"/>
-              </a:ext>
-            </a:extLst>
-          </p:cNvPr>
-          <p:cNvPicPr>
-            <a:picLocks noGrp="1" noChangeAspect="1"/>
-          </p:cNvPicPr>
+      <p:sp>
+        <p:nvSpPr>
+          <p:cNvPr id="3" name="Content Placeholder 2">
+            <a:extLst>
+              <a:ext uri="{FF2B5EF4-FFF2-40B4-BE49-F238E27FC236}">
+                <a16:creationId xmlns:a16="http://schemas.microsoft.com/office/drawing/2014/main" id="{8875A188-2852-FE4B-ACB3-F80D6C1EE8A3}"/>
+              </a:ext>
+            </a:extLst>
+          </p:cNvPr>
+          <p:cNvSpPr>
+            <a:spLocks noGrp="1"/>
+          </p:cNvSpPr>
           <p:nvPr>
             <p:ph idx="1"/>
           </p:nvPr>
+        </p:nvSpPr>
+        <p:spPr>
+          <a:xfrm>
+            <a:off x="738401" y="1312334"/>
+            <a:ext cx="8348133" cy="4639733"/>
+          </a:xfrm>
+        </p:spPr>
+        <p:txBody>
+          <a:bodyPr anchor="ctr">
+            <a:noAutofit/>
+          </a:bodyPr>
+          <a:lstStyle/>
+          <a:p>
+            <a:pPr marL="0" indent="0" algn="just">
+              <a:buNone/>
+            </a:pPr>
+            <a:r>
+              <a:rPr lang="en-US" sz="1700" b="1" dirty="0">
+                <a:latin typeface="Georgia" panose="02040502050405020303" pitchFamily="18" charset="0"/>
+                <a:cs typeface="Times New Roman" panose="02020603050405020304" pitchFamily="18" charset="0"/>
+              </a:rPr>
+              <a:t>Step-by-Step Workflow:</a:t>
+            </a:r>
+            <a:endParaRPr lang="en-US" sz="1700" dirty="0">
+              <a:latin typeface="Georgia" panose="02040502050405020303" pitchFamily="18" charset="0"/>
+              <a:cs typeface="Times New Roman" panose="02020603050405020304" pitchFamily="18" charset="0"/>
+            </a:endParaRPr>
+          </a:p>
+          <a:p>
+            <a:pPr marL="342900" indent="-342900" algn="just">
+              <a:buAutoNum type="arabicPeriod"/>
+            </a:pPr>
+            <a:r>
+              <a:rPr lang="en-US" sz="1700" b="1" dirty="0">
+                <a:latin typeface="Georgia" panose="02040502050405020303" pitchFamily="18" charset="0"/>
+                <a:cs typeface="Times New Roman" panose="02020603050405020304" pitchFamily="18" charset="0"/>
+              </a:rPr>
+              <a:t>Image/Video Capture: </a:t>
+            </a:r>
+            <a:r>
+              <a:rPr lang="en-US" sz="1700" dirty="0">
+                <a:latin typeface="Georgia" panose="02040502050405020303" pitchFamily="18" charset="0"/>
+                <a:cs typeface="Times New Roman" panose="02020603050405020304" pitchFamily="18" charset="0"/>
+              </a:rPr>
+              <a:t>Capture input from a camera installed at the college main gate for real-time monitoring.</a:t>
+            </a:r>
+          </a:p>
+          <a:p>
+            <a:pPr marL="342900" indent="-342900" algn="just">
+              <a:buAutoNum type="arabicPeriod"/>
+            </a:pPr>
+            <a:r>
+              <a:rPr lang="en-US" sz="1700" b="1" dirty="0">
+                <a:latin typeface="Georgia" panose="02040502050405020303" pitchFamily="18" charset="0"/>
+                <a:cs typeface="Times New Roman" panose="02020603050405020304" pitchFamily="18" charset="0"/>
+              </a:rPr>
+              <a:t>Number Plate Detection: </a:t>
+            </a:r>
+            <a:r>
+              <a:rPr lang="en-US" sz="1700" dirty="0">
+                <a:latin typeface="Georgia" panose="02040502050405020303" pitchFamily="18" charset="0"/>
+                <a:cs typeface="Times New Roman" panose="02020603050405020304" pitchFamily="18" charset="0"/>
+              </a:rPr>
+              <a:t>Use a trained YOLOv8 deep learning model to detect and localize the number plate in the frame with high accuracy.</a:t>
+            </a:r>
+          </a:p>
+          <a:p>
+            <a:pPr marL="342900" indent="-342900" algn="just">
+              <a:buAutoNum type="arabicPeriod"/>
+            </a:pPr>
+            <a:r>
+              <a:rPr lang="en-US" sz="1700" b="1" dirty="0">
+                <a:latin typeface="Georgia" panose="02040502050405020303" pitchFamily="18" charset="0"/>
+                <a:cs typeface="Times New Roman" panose="02020603050405020304" pitchFamily="18" charset="0"/>
+              </a:rPr>
+              <a:t>Plate Region Extraction: </a:t>
+            </a:r>
+            <a:r>
+              <a:rPr lang="en-US" sz="1700" dirty="0">
+                <a:latin typeface="Georgia" panose="02040502050405020303" pitchFamily="18" charset="0"/>
+                <a:cs typeface="Times New Roman" panose="02020603050405020304" pitchFamily="18" charset="0"/>
+              </a:rPr>
+              <a:t>Crop the detected number plate region (ROI) from the image for further processing.</a:t>
+            </a:r>
+          </a:p>
+          <a:p>
+            <a:pPr marL="342900" indent="-342900" algn="just">
+              <a:buAutoNum type="arabicPeriod"/>
+            </a:pPr>
+            <a:r>
+              <a:rPr lang="en-US" sz="1700" b="1" dirty="0">
+                <a:latin typeface="Georgia" panose="02040502050405020303" pitchFamily="18" charset="0"/>
+                <a:cs typeface="Times New Roman" panose="02020603050405020304" pitchFamily="18" charset="0"/>
+              </a:rPr>
+              <a:t>Text Recognition (OCR): </a:t>
+            </a:r>
+            <a:r>
+              <a:rPr lang="en-US" sz="1700" dirty="0">
+                <a:latin typeface="Georgia" panose="02040502050405020303" pitchFamily="18" charset="0"/>
+                <a:cs typeface="Times New Roman" panose="02020603050405020304" pitchFamily="18" charset="0"/>
+              </a:rPr>
+              <a:t>Apply EasyOCR to extract alphanumeric characters from the cropped number plate.</a:t>
+            </a:r>
+          </a:p>
+          <a:p>
+            <a:pPr marL="342900" indent="-342900" algn="just">
+              <a:buAutoNum type="arabicPeriod"/>
+            </a:pPr>
+            <a:r>
+              <a:rPr lang="en-US" sz="1700" b="1" dirty="0">
+                <a:latin typeface="Georgia" panose="02040502050405020303" pitchFamily="18" charset="0"/>
+                <a:cs typeface="Times New Roman" panose="02020603050405020304" pitchFamily="18" charset="0"/>
+              </a:rPr>
+              <a:t>Text Post-Processing: </a:t>
+            </a:r>
+            <a:r>
+              <a:rPr lang="en-US" sz="1700" dirty="0">
+                <a:latin typeface="Georgia" panose="02040502050405020303" pitchFamily="18" charset="0"/>
+                <a:cs typeface="Times New Roman" panose="02020603050405020304" pitchFamily="18" charset="0"/>
+              </a:rPr>
+              <a:t>Clean and format the extracted text using regular expressions to match standard Indian number plate formats.</a:t>
+            </a:r>
+          </a:p>
+          <a:p>
+            <a:pPr marL="342900" indent="-342900" algn="just">
+              <a:buAutoNum type="arabicPeriod"/>
+            </a:pPr>
+            <a:r>
+              <a:rPr lang="en-US" sz="1700" b="1" dirty="0">
+                <a:latin typeface="Georgia" panose="02040502050405020303" pitchFamily="18" charset="0"/>
+                <a:cs typeface="Times New Roman" panose="02020603050405020304" pitchFamily="18" charset="0"/>
+              </a:rPr>
+              <a:t>Output &amp; Logging: </a:t>
+            </a:r>
+            <a:r>
+              <a:rPr lang="en-US" sz="1700" dirty="0">
+                <a:latin typeface="Georgia" panose="02040502050405020303" pitchFamily="18" charset="0"/>
+                <a:cs typeface="Times New Roman" panose="02020603050405020304" pitchFamily="18" charset="0"/>
+              </a:rPr>
+              <a:t>Display the detected plate number and store it with timestamp for entry monitoring and record keeping at the college gate.</a:t>
+            </a:r>
+            <a:endParaRPr lang="en-IN" sz="1700" dirty="0">
+              <a:latin typeface="Georgia" panose="02040502050405020303" pitchFamily="18" charset="0"/>
+              <a:cs typeface="Times New Roman" panose="02020603050405020304" pitchFamily="18" charset="0"/>
+            </a:endParaRPr>
+          </a:p>
+        </p:txBody>
+      </p:sp>
+      <p:sp>
+        <p:nvSpPr>
+          <p:cNvPr id="12" name="Slide Number Placeholder 11">
+            <a:extLst>
+              <a:ext uri="{FF2B5EF4-FFF2-40B4-BE49-F238E27FC236}">
+                <a16:creationId xmlns:a16="http://schemas.microsoft.com/office/drawing/2014/main" id="{6CE0228D-BC98-7980-8A03-24BC5762223F}"/>
+              </a:ext>
+            </a:extLst>
+          </p:cNvPr>
+          <p:cNvSpPr>
+            <a:spLocks noGrp="1"/>
+          </p:cNvSpPr>
+          <p:nvPr>
+            <p:ph type="sldNum" sz="quarter" idx="12"/>
+          </p:nvPr>
+        </p:nvSpPr>
+        <p:spPr/>
+        <p:txBody>
+          <a:bodyPr/>
+          <a:lstStyle/>
+          <a:p>
+            <a:fld id="{97C92681-5E05-4BC6-8FED-AA8D56459978}" type="slidenum">
+              <a:rPr lang="en-IN" smtClean="0"/>
+              <a:t>7</a:t>
+            </a:fld>
+            <a:endParaRPr lang="en-IN" dirty="0"/>
+          </a:p>
+        </p:txBody>
+      </p:sp>
+      <p:sp>
+        <p:nvSpPr>
+          <p:cNvPr id="4" name="TextBox 3">
+            <a:extLst>
+              <a:ext uri="{FF2B5EF4-FFF2-40B4-BE49-F238E27FC236}">
+                <a16:creationId xmlns:a16="http://schemas.microsoft.com/office/drawing/2014/main" id="{CC04EBE1-83A8-4658-929E-FAD9F2187FC6}"/>
+              </a:ext>
+            </a:extLst>
+          </p:cNvPr>
+          <p:cNvSpPr txBox="1"/>
+          <p:nvPr/>
+        </p:nvSpPr>
+        <p:spPr>
+          <a:xfrm>
+            <a:off x="9183140" y="5432576"/>
+            <a:ext cx="2090058" cy="276999"/>
+          </a:xfrm>
+          <a:prstGeom prst="rect">
+            <a:avLst/>
+          </a:prstGeom>
+          <a:noFill/>
+        </p:spPr>
+        <p:txBody>
+          <a:bodyPr wrap="square" rtlCol="0">
+            <a:spAutoFit/>
+          </a:bodyPr>
+          <a:lstStyle/>
+          <a:p>
+            <a:pPr algn="ctr"/>
+            <a:r>
+              <a:rPr lang="en-US" sz="1200" dirty="0">
+                <a:latin typeface="Georgia" panose="02040502050405020303" pitchFamily="18" charset="0"/>
+              </a:rPr>
+              <a:t>Fig. 1 : Solution Workflow </a:t>
+            </a:r>
+            <a:endParaRPr lang="en-IN" sz="1200" dirty="0">
+              <a:latin typeface="Georgia" panose="02040502050405020303" pitchFamily="18" charset="0"/>
+            </a:endParaRPr>
+          </a:p>
+        </p:txBody>
+      </p:sp>
+      <p:pic>
+        <p:nvPicPr>
+          <p:cNvPr id="7" name="Picture 6">
+            <a:extLst>
+              <a:ext uri="{FF2B5EF4-FFF2-40B4-BE49-F238E27FC236}">
+                <a16:creationId xmlns:a16="http://schemas.microsoft.com/office/drawing/2014/main" id="{D299648A-6027-0BE5-5B4D-D52C2AFD313F}"/>
+              </a:ext>
+            </a:extLst>
+          </p:cNvPr>
+          <p:cNvPicPr>
+            <a:picLocks noChangeAspect="1"/>
+          </p:cNvPicPr>
+          <p:nvPr/>
         </p:nvPicPr>
         <p:blipFill>
           <a:blip r:embed="rId2"/>
-          <a:srcRect l="20697" r="11061" b="6344"/>
           <a:stretch>
             <a:fillRect/>
           </a:stretch>
         </p:blipFill>
         <p:spPr>
           <a:xfrm>
-            <a:off x="2153919" y="1418574"/>
-            <a:ext cx="7884161" cy="5209890"/>
+            <a:off x="9366798" y="1831823"/>
+            <a:ext cx="1722743" cy="3600753"/>
           </a:xfrm>
           <a:prstGeom prst="rect">
             <a:avLst/>
           </a:prstGeom>
         </p:spPr>
       </p:pic>
-      <p:sp>
-        <p:nvSpPr>
-          <p:cNvPr id="4" name="Slide Number Placeholder 3">
-            <a:extLst>
-              <a:ext uri="{FF2B5EF4-FFF2-40B4-BE49-F238E27FC236}">
-                <a16:creationId xmlns:a16="http://schemas.microsoft.com/office/drawing/2014/main" id="{9282BEFA-92E7-A8E7-0E57-E91D95D19CBA}"/>
-              </a:ext>
-            </a:extLst>
-          </p:cNvPr>
-          <p:cNvSpPr>
-            <a:spLocks noGrp="1"/>
-          </p:cNvSpPr>
-          <p:nvPr>
-            <p:ph type="sldNum" sz="quarter" idx="12"/>
-          </p:nvPr>
-        </p:nvSpPr>
-        <p:spPr/>
-        <p:txBody>
-          <a:bodyPr/>
-          <a:lstStyle/>
-          <a:p>
-            <a:fld id="{97C92681-5E05-4BC6-8FED-AA8D56459978}" type="slidenum">
-              <a:rPr lang="en-IN" smtClean="0"/>
-              <a:t>7</a:t>
-            </a:fld>
-            <a:endParaRPr lang="en-IN"/>
-          </a:p>
-        </p:txBody>
-      </p:sp>
     </p:spTree>
     <p:extLst>
       <p:ext uri="{BB962C8B-B14F-4D97-AF65-F5344CB8AC3E}">
-        <p14:creationId xmlns:p14="http://schemas.microsoft.com/office/powerpoint/2010/main" val="1288557611"/>
+        <p14:creationId xmlns:p14="http://schemas.microsoft.com/office/powerpoint/2010/main" val="3339192054"/>
       </p:ext>
     </p:extLst>
   </p:cSld>
@@ -7737,7 +9162,7 @@
           <p:cNvPr id="2" name="Title 1">
             <a:extLst>
               <a:ext uri="{FF2B5EF4-FFF2-40B4-BE49-F238E27FC236}">
-                <a16:creationId xmlns:a16="http://schemas.microsoft.com/office/drawing/2014/main" id="{E83A98C8-530F-C870-FA69-14C14B8DAD8D}"/>
+                <a16:creationId xmlns:a16="http://schemas.microsoft.com/office/drawing/2014/main" id="{1ACFC808-9C9B-EA98-9323-C0BB41690FA5}"/>
               </a:ext>
             </a:extLst>
           </p:cNvPr>
@@ -7762,89 +9187,427 @@
           <a:p>
             <a:pPr algn="ctr"/>
             <a:r>
-              <a:rPr lang="en-US" sz="3200" b="1" dirty="0">
-                <a:latin typeface="Times New Roman" panose="02020603050405020304" pitchFamily="18" charset="0"/>
-                <a:cs typeface="Times New Roman" panose="02020603050405020304" pitchFamily="18" charset="0"/>
-              </a:rPr>
-              <a:t>MODEL PERFORMACE</a:t>
-            </a:r>
-            <a:endParaRPr lang="en-IN" sz="3200" b="1" dirty="0">
-              <a:latin typeface="Times New Roman" panose="02020603050405020304" pitchFamily="18" charset="0"/>
-              <a:cs typeface="Times New Roman" panose="02020603050405020304" pitchFamily="18" charset="0"/>
-            </a:endParaRPr>
-          </a:p>
-        </p:txBody>
-      </p:sp>
-      <p:sp>
-        <p:nvSpPr>
-          <p:cNvPr id="3" name="Content Placeholder 2">
-            <a:extLst>
-              <a:ext uri="{FF2B5EF4-FFF2-40B4-BE49-F238E27FC236}">
-                <a16:creationId xmlns:a16="http://schemas.microsoft.com/office/drawing/2014/main" id="{18D8C821-EC45-FD40-DAC9-E31BE3E501C4}"/>
-              </a:ext>
-            </a:extLst>
-          </p:cNvPr>
-          <p:cNvSpPr>
-            <a:spLocks noGrp="1"/>
-          </p:cNvSpPr>
+              <a:rPr lang="en-IN" sz="3200" b="1" dirty="0">
+                <a:latin typeface="Georgia" panose="02040502050405020303" pitchFamily="18" charset="0"/>
+              </a:rPr>
+              <a:t>DATASET DESCRIPTION</a:t>
+            </a:r>
+          </a:p>
+        </p:txBody>
+      </p:sp>
+      <p:graphicFrame>
+        <p:nvGraphicFramePr>
+          <p:cNvPr id="5" name="Content Placeholder 4">
+            <a:extLst>
+              <a:ext uri="{FF2B5EF4-FFF2-40B4-BE49-F238E27FC236}">
+                <a16:creationId xmlns:a16="http://schemas.microsoft.com/office/drawing/2014/main" id="{B19166C1-9F63-73C2-F6B8-A77CFFF1CA8B}"/>
+              </a:ext>
+            </a:extLst>
+          </p:cNvPr>
+          <p:cNvGraphicFramePr>
+            <a:graphicFrameLocks noGrp="1"/>
+          </p:cNvGraphicFramePr>
           <p:nvPr>
             <p:ph idx="1"/>
+            <p:extLst>
+              <p:ext uri="{D42A27DB-BD31-4B8C-83A1-F6EECF244321}">
+                <p14:modId xmlns:p14="http://schemas.microsoft.com/office/powerpoint/2010/main" val="2730897288"/>
+              </p:ext>
+            </p:extLst>
           </p:nvPr>
-        </p:nvSpPr>
-        <p:spPr/>
-        <p:txBody>
-          <a:bodyPr/>
-          <a:lstStyle/>
-          <a:p>
-            <a:pPr marL="0" indent="0">
-              <a:buNone/>
-            </a:pPr>
-            <a:endParaRPr lang="en-US" dirty="0">
-              <a:latin typeface="Times New Roman" panose="02020603050405020304" pitchFamily="18" charset="0"/>
-              <a:cs typeface="Times New Roman" panose="02020603050405020304" pitchFamily="18" charset="0"/>
-            </a:endParaRPr>
-          </a:p>
-          <a:p>
-            <a:pPr marL="0" indent="0">
-              <a:buNone/>
-            </a:pPr>
-            <a:endParaRPr lang="en-US" dirty="0">
-              <a:latin typeface="Times New Roman" panose="02020603050405020304" pitchFamily="18" charset="0"/>
-              <a:cs typeface="Times New Roman" panose="02020603050405020304" pitchFamily="18" charset="0"/>
-            </a:endParaRPr>
-          </a:p>
-          <a:p>
-            <a:pPr marL="0" indent="0">
-              <a:buNone/>
-            </a:pPr>
-            <a:endParaRPr lang="en-US" dirty="0">
-              <a:latin typeface="Times New Roman" panose="02020603050405020304" pitchFamily="18" charset="0"/>
-              <a:cs typeface="Times New Roman" panose="02020603050405020304" pitchFamily="18" charset="0"/>
-            </a:endParaRPr>
-          </a:p>
-          <a:p>
-            <a:pPr marL="0" indent="0">
-              <a:buNone/>
-            </a:pPr>
-            <a:endParaRPr lang="en-US" dirty="0">
-              <a:latin typeface="Times New Roman" panose="02020603050405020304" pitchFamily="18" charset="0"/>
-              <a:cs typeface="Times New Roman" panose="02020603050405020304" pitchFamily="18" charset="0"/>
-            </a:endParaRPr>
-          </a:p>
-          <a:p>
-            <a:pPr marL="0" indent="0">
-              <a:buNone/>
-            </a:pPr>
-            <a:endParaRPr lang="en-US" dirty="0"/>
-          </a:p>
-        </p:txBody>
-      </p:sp>
+        </p:nvGraphicFramePr>
+        <p:xfrm>
+          <a:off x="783381" y="2059355"/>
+          <a:ext cx="10625236" cy="3381619"/>
+        </p:xfrm>
+        <a:graphic>
+          <a:graphicData uri="http://schemas.openxmlformats.org/drawingml/2006/table">
+            <a:tbl>
+              <a:tblPr firstRow="1" bandRow="1">
+                <a:tableStyleId>{8799B23B-EC83-4686-B30A-512413B5E67A}</a:tableStyleId>
+              </a:tblPr>
+              <a:tblGrid>
+                <a:gridCol w="5312618">
+                  <a:extLst>
+                    <a:ext uri="{9D8B030D-6E8A-4147-A177-3AD203B41FA5}">
+                      <a16:colId xmlns:a16="http://schemas.microsoft.com/office/drawing/2014/main" val="913252187"/>
+                    </a:ext>
+                  </a:extLst>
+                </a:gridCol>
+                <a:gridCol w="5312618">
+                  <a:extLst>
+                    <a:ext uri="{9D8B030D-6E8A-4147-A177-3AD203B41FA5}">
+                      <a16:colId xmlns:a16="http://schemas.microsoft.com/office/drawing/2014/main" val="3308392713"/>
+                    </a:ext>
+                  </a:extLst>
+                </a:gridCol>
+              </a:tblGrid>
+              <a:tr h="447821">
+                <a:tc>
+                  <a:txBody>
+                    <a:bodyPr/>
+                    <a:lstStyle/>
+                    <a:p>
+                      <a:pPr algn="ctr"/>
+                      <a:r>
+                        <a:rPr lang="en-US" sz="2000" dirty="0">
+                          <a:latin typeface="Georgia" panose="02040502050405020303" pitchFamily="18" charset="0"/>
+                        </a:rPr>
+                        <a:t>Parameter</a:t>
+                      </a:r>
+                      <a:endParaRPr lang="en-IN" sz="1800" dirty="0">
+                        <a:latin typeface="Georgia" panose="02040502050405020303" pitchFamily="18" charset="0"/>
+                      </a:endParaRPr>
+                    </a:p>
+                  </a:txBody>
+                  <a:tcPr anchor="ctr"/>
+                </a:tc>
+                <a:tc>
+                  <a:txBody>
+                    <a:bodyPr/>
+                    <a:lstStyle/>
+                    <a:p>
+                      <a:pPr algn="ctr"/>
+                      <a:r>
+                        <a:rPr lang="en-US" sz="2000" dirty="0">
+                          <a:latin typeface="Georgia" panose="02040502050405020303" pitchFamily="18" charset="0"/>
+                        </a:rPr>
+                        <a:t>Description</a:t>
+                      </a:r>
+                      <a:endParaRPr lang="en-IN" sz="1800" dirty="0">
+                        <a:latin typeface="Georgia" panose="02040502050405020303" pitchFamily="18" charset="0"/>
+                      </a:endParaRPr>
+                    </a:p>
+                  </a:txBody>
+                  <a:tcPr anchor="ctr"/>
+                </a:tc>
+                <a:extLst>
+                  <a:ext uri="{0D108BD9-81ED-4DB2-BD59-A6C34878D82A}">
+                    <a16:rowId xmlns:a16="http://schemas.microsoft.com/office/drawing/2014/main" val="555358249"/>
+                  </a:ext>
+                </a:extLst>
+              </a:tr>
+              <a:tr h="419114">
+                <a:tc>
+                  <a:txBody>
+                    <a:bodyPr/>
+                    <a:lstStyle/>
+                    <a:p>
+                      <a:pPr algn="l"/>
+                      <a:r>
+                        <a:rPr lang="en-US" sz="1600" dirty="0">
+                          <a:latin typeface="Georgia" panose="02040502050405020303" pitchFamily="18" charset="0"/>
+                        </a:rPr>
+                        <a:t>Size</a:t>
+                      </a:r>
+                      <a:endParaRPr lang="en-IN" sz="1600" dirty="0">
+                        <a:latin typeface="Georgia" panose="02040502050405020303" pitchFamily="18" charset="0"/>
+                      </a:endParaRPr>
+                    </a:p>
+                  </a:txBody>
+                  <a:tcPr anchor="ctr"/>
+                </a:tc>
+                <a:tc>
+                  <a:txBody>
+                    <a:bodyPr/>
+                    <a:lstStyle/>
+                    <a:p>
+                      <a:r>
+                        <a:rPr lang="en-US" sz="1600" dirty="0">
+                          <a:latin typeface="Georgia" panose="02040502050405020303" pitchFamily="18" charset="0"/>
+                        </a:rPr>
+                        <a:t>~4000 Images</a:t>
+                      </a:r>
+                      <a:endParaRPr lang="en-IN" sz="1600" dirty="0">
+                        <a:latin typeface="Georgia" panose="02040502050405020303" pitchFamily="18" charset="0"/>
+                      </a:endParaRPr>
+                    </a:p>
+                  </a:txBody>
+                  <a:tcPr anchor="ctr"/>
+                </a:tc>
+                <a:extLst>
+                  <a:ext uri="{0D108BD9-81ED-4DB2-BD59-A6C34878D82A}">
+                    <a16:rowId xmlns:a16="http://schemas.microsoft.com/office/drawing/2014/main" val="3162647141"/>
+                  </a:ext>
+                </a:extLst>
+              </a:tr>
+              <a:tr h="419114">
+                <a:tc>
+                  <a:txBody>
+                    <a:bodyPr/>
+                    <a:lstStyle/>
+                    <a:p>
+                      <a:pPr algn="l"/>
+                      <a:r>
+                        <a:rPr lang="en-US" sz="1600" dirty="0">
+                          <a:latin typeface="Georgia" panose="02040502050405020303" pitchFamily="18" charset="0"/>
+                        </a:rPr>
+                        <a:t>Image Resolution</a:t>
+                      </a:r>
+                      <a:endParaRPr lang="en-IN" sz="1600" dirty="0">
+                        <a:latin typeface="Georgia" panose="02040502050405020303" pitchFamily="18" charset="0"/>
+                      </a:endParaRPr>
+                    </a:p>
+                  </a:txBody>
+                  <a:tcPr anchor="ctr"/>
+                </a:tc>
+                <a:tc>
+                  <a:txBody>
+                    <a:bodyPr/>
+                    <a:lstStyle/>
+                    <a:p>
+                      <a:r>
+                        <a:rPr lang="en-US" sz="1600" dirty="0">
+                          <a:latin typeface="Georgia" panose="02040502050405020303" pitchFamily="18" charset="0"/>
+                        </a:rPr>
+                        <a:t>640 X 640</a:t>
+                      </a:r>
+                      <a:endParaRPr lang="en-IN" sz="1600" dirty="0">
+                        <a:latin typeface="Georgia" panose="02040502050405020303" pitchFamily="18" charset="0"/>
+                      </a:endParaRPr>
+                    </a:p>
+                  </a:txBody>
+                  <a:tcPr anchor="ctr"/>
+                </a:tc>
+                <a:extLst>
+                  <a:ext uri="{0D108BD9-81ED-4DB2-BD59-A6C34878D82A}">
+                    <a16:rowId xmlns:a16="http://schemas.microsoft.com/office/drawing/2014/main" val="2063034386"/>
+                  </a:ext>
+                </a:extLst>
+              </a:tr>
+              <a:tr h="419114">
+                <a:tc>
+                  <a:txBody>
+                    <a:bodyPr/>
+                    <a:lstStyle/>
+                    <a:p>
+                      <a:pPr algn="l"/>
+                      <a:r>
+                        <a:rPr lang="en-US" sz="1600" dirty="0">
+                          <a:latin typeface="Georgia" panose="02040502050405020303" pitchFamily="18" charset="0"/>
+                        </a:rPr>
+                        <a:t>Annotation Format</a:t>
+                      </a:r>
+                      <a:endParaRPr lang="en-IN" sz="1600" dirty="0">
+                        <a:latin typeface="Georgia" panose="02040502050405020303" pitchFamily="18" charset="0"/>
+                      </a:endParaRPr>
+                    </a:p>
+                  </a:txBody>
+                  <a:tcPr anchor="ctr"/>
+                </a:tc>
+                <a:tc>
+                  <a:txBody>
+                    <a:bodyPr/>
+                    <a:lstStyle/>
+                    <a:p>
+                      <a:r>
+                        <a:rPr lang="en-US" sz="1600" dirty="0">
+                          <a:latin typeface="Georgia" panose="02040502050405020303" pitchFamily="18" charset="0"/>
+                        </a:rPr>
+                        <a:t>YOLO</a:t>
+                      </a:r>
+                      <a:endParaRPr lang="en-IN" sz="1600" dirty="0">
+                        <a:latin typeface="Georgia" panose="02040502050405020303" pitchFamily="18" charset="0"/>
+                      </a:endParaRPr>
+                    </a:p>
+                  </a:txBody>
+                  <a:tcPr anchor="ctr"/>
+                </a:tc>
+                <a:extLst>
+                  <a:ext uri="{0D108BD9-81ED-4DB2-BD59-A6C34878D82A}">
+                    <a16:rowId xmlns:a16="http://schemas.microsoft.com/office/drawing/2014/main" val="1787909251"/>
+                  </a:ext>
+                </a:extLst>
+              </a:tr>
+              <a:tr h="419114">
+                <a:tc>
+                  <a:txBody>
+                    <a:bodyPr/>
+                    <a:lstStyle/>
+                    <a:p>
+                      <a:pPr algn="l"/>
+                      <a:r>
+                        <a:rPr lang="en-US" sz="1600" dirty="0">
+                          <a:latin typeface="Georgia" panose="02040502050405020303" pitchFamily="18" charset="0"/>
+                        </a:rPr>
+                        <a:t>Training Set</a:t>
+                      </a:r>
+                      <a:endParaRPr lang="en-IN" sz="1600" dirty="0">
+                        <a:latin typeface="Georgia" panose="02040502050405020303" pitchFamily="18" charset="0"/>
+                      </a:endParaRPr>
+                    </a:p>
+                  </a:txBody>
+                  <a:tcPr anchor="ctr"/>
+                </a:tc>
+                <a:tc>
+                  <a:txBody>
+                    <a:bodyPr/>
+                    <a:lstStyle/>
+                    <a:p>
+                      <a:pPr>
+                        <a:buNone/>
+                      </a:pPr>
+                      <a:r>
+                        <a:rPr lang="en-US" sz="1600" dirty="0">
+                          <a:latin typeface="Georgia" panose="02040502050405020303" pitchFamily="18" charset="0"/>
+                        </a:rPr>
+                        <a:t>3430 Images</a:t>
+                      </a:r>
+                      <a:endParaRPr lang="en-IN" sz="1600" dirty="0">
+                        <a:latin typeface="Georgia" panose="02040502050405020303" pitchFamily="18" charset="0"/>
+                      </a:endParaRPr>
+                    </a:p>
+                  </a:txBody>
+                  <a:tcPr anchor="ctr"/>
+                </a:tc>
+                <a:extLst>
+                  <a:ext uri="{0D108BD9-81ED-4DB2-BD59-A6C34878D82A}">
+                    <a16:rowId xmlns:a16="http://schemas.microsoft.com/office/drawing/2014/main" val="2062881435"/>
+                  </a:ext>
+                </a:extLst>
+              </a:tr>
+              <a:tr h="419114">
+                <a:tc>
+                  <a:txBody>
+                    <a:bodyPr/>
+                    <a:lstStyle/>
+                    <a:p>
+                      <a:pPr algn="l"/>
+                      <a:r>
+                        <a:rPr lang="en-US" sz="1600" dirty="0">
+                          <a:latin typeface="Georgia" panose="02040502050405020303" pitchFamily="18" charset="0"/>
+                        </a:rPr>
+                        <a:t>Validation Set</a:t>
+                      </a:r>
+                      <a:endParaRPr lang="en-IN" sz="1600" dirty="0">
+                        <a:latin typeface="Georgia" panose="02040502050405020303" pitchFamily="18" charset="0"/>
+                      </a:endParaRPr>
+                    </a:p>
+                  </a:txBody>
+                  <a:tcPr anchor="ctr"/>
+                </a:tc>
+                <a:tc>
+                  <a:txBody>
+                    <a:bodyPr/>
+                    <a:lstStyle/>
+                    <a:p>
+                      <a:r>
+                        <a:rPr lang="en-US" sz="1600" dirty="0">
+                          <a:latin typeface="Georgia" panose="02040502050405020303" pitchFamily="18" charset="0"/>
+                        </a:rPr>
+                        <a:t>330 Images</a:t>
+                      </a:r>
+                      <a:endParaRPr lang="en-IN" sz="1600" dirty="0">
+                        <a:latin typeface="Georgia" panose="02040502050405020303" pitchFamily="18" charset="0"/>
+                      </a:endParaRPr>
+                    </a:p>
+                  </a:txBody>
+                  <a:tcPr anchor="ctr"/>
+                </a:tc>
+                <a:extLst>
+                  <a:ext uri="{0D108BD9-81ED-4DB2-BD59-A6C34878D82A}">
+                    <a16:rowId xmlns:a16="http://schemas.microsoft.com/office/drawing/2014/main" val="1436796313"/>
+                  </a:ext>
+                </a:extLst>
+              </a:tr>
+              <a:tr h="419114">
+                <a:tc>
+                  <a:txBody>
+                    <a:bodyPr/>
+                    <a:lstStyle/>
+                    <a:p>
+                      <a:pPr algn="l"/>
+                      <a:r>
+                        <a:rPr lang="en-US" sz="1600" dirty="0">
+                          <a:latin typeface="Georgia" panose="02040502050405020303" pitchFamily="18" charset="0"/>
+                        </a:rPr>
+                        <a:t>Test Set</a:t>
+                      </a:r>
+                      <a:endParaRPr lang="en-IN" sz="1600" dirty="0">
+                        <a:latin typeface="Georgia" panose="02040502050405020303" pitchFamily="18" charset="0"/>
+                      </a:endParaRPr>
+                    </a:p>
+                  </a:txBody>
+                  <a:tcPr anchor="ctr"/>
+                </a:tc>
+                <a:tc>
+                  <a:txBody>
+                    <a:bodyPr/>
+                    <a:lstStyle/>
+                    <a:p>
+                      <a:r>
+                        <a:rPr lang="en-US" sz="1600" dirty="0">
+                          <a:latin typeface="Georgia" panose="02040502050405020303" pitchFamily="18" charset="0"/>
+                        </a:rPr>
+                        <a:t>164 Images</a:t>
+                      </a:r>
+                      <a:endParaRPr lang="en-IN" sz="1600" dirty="0">
+                        <a:latin typeface="Georgia" panose="02040502050405020303" pitchFamily="18" charset="0"/>
+                      </a:endParaRPr>
+                    </a:p>
+                  </a:txBody>
+                  <a:tcPr anchor="ctr"/>
+                </a:tc>
+                <a:extLst>
+                  <a:ext uri="{0D108BD9-81ED-4DB2-BD59-A6C34878D82A}">
+                    <a16:rowId xmlns:a16="http://schemas.microsoft.com/office/drawing/2014/main" val="308773512"/>
+                  </a:ext>
+                </a:extLst>
+              </a:tr>
+              <a:tr h="419114">
+                <a:tc>
+                  <a:txBody>
+                    <a:bodyPr/>
+                    <a:lstStyle/>
+                    <a:p>
+                      <a:pPr algn="l"/>
+                      <a:r>
+                        <a:rPr lang="en-US" sz="1600" dirty="0">
+                          <a:latin typeface="Georgia" panose="02040502050405020303" pitchFamily="18" charset="0"/>
+                        </a:rPr>
+                        <a:t>Preprocessing</a:t>
+                      </a:r>
+                      <a:endParaRPr lang="en-IN" sz="1600" dirty="0">
+                        <a:latin typeface="Georgia" panose="02040502050405020303" pitchFamily="18" charset="0"/>
+                      </a:endParaRPr>
+                    </a:p>
+                  </a:txBody>
+                  <a:tcPr anchor="ctr"/>
+                </a:tc>
+                <a:tc>
+                  <a:txBody>
+                    <a:bodyPr/>
+                    <a:lstStyle/>
+                    <a:p>
+                      <a:r>
+                        <a:rPr lang="en-US" sz="1600" dirty="0">
+                          <a:latin typeface="Georgia" panose="02040502050405020303" pitchFamily="18" charset="0"/>
+                        </a:rPr>
+                        <a:t>Auto Orientation, Brightness Adjustment</a:t>
+                      </a:r>
+                      <a:endParaRPr lang="en-IN" sz="1600" dirty="0">
+                        <a:latin typeface="Georgia" panose="02040502050405020303" pitchFamily="18" charset="0"/>
+                      </a:endParaRPr>
+                    </a:p>
+                  </a:txBody>
+                  <a:tcPr anchor="ctr"/>
+                </a:tc>
+                <a:extLst>
+                  <a:ext uri="{0D108BD9-81ED-4DB2-BD59-A6C34878D82A}">
+                    <a16:rowId xmlns:a16="http://schemas.microsoft.com/office/drawing/2014/main" val="2994439592"/>
+                  </a:ext>
+                </a:extLst>
+              </a:tr>
+            </a:tbl>
+          </a:graphicData>
+        </a:graphic>
+      </p:graphicFrame>
       <p:sp>
         <p:nvSpPr>
           <p:cNvPr id="4" name="Slide Number Placeholder 3">
             <a:extLst>
               <a:ext uri="{FF2B5EF4-FFF2-40B4-BE49-F238E27FC236}">
-                <a16:creationId xmlns:a16="http://schemas.microsoft.com/office/drawing/2014/main" id="{DE0612F1-7F00-556B-CBAF-6B403B8F5F80}"/>
+                <a16:creationId xmlns:a16="http://schemas.microsoft.com/office/drawing/2014/main" id="{E7C573B4-B425-AD71-24AE-6C9B67B9B8BA}"/>
               </a:ext>
             </a:extLst>
           </p:cNvPr>
@@ -7868,70 +9631,108 @@
           </a:p>
         </p:txBody>
       </p:sp>
-      <p:pic>
-        <p:nvPicPr>
-          <p:cNvPr id="7" name="Picture 6">
-            <a:extLst>
-              <a:ext uri="{FF2B5EF4-FFF2-40B4-BE49-F238E27FC236}">
-                <a16:creationId xmlns:a16="http://schemas.microsoft.com/office/drawing/2014/main" id="{02FC5918-D592-4D59-E8BA-BE4787140D16}"/>
-              </a:ext>
-            </a:extLst>
-          </p:cNvPr>
-          <p:cNvPicPr>
-            <a:picLocks noChangeAspect="1"/>
-          </p:cNvPicPr>
+      <p:sp>
+        <p:nvSpPr>
+          <p:cNvPr id="3" name="TextBox 2">
+            <a:extLst>
+              <a:ext uri="{FF2B5EF4-FFF2-40B4-BE49-F238E27FC236}">
+                <a16:creationId xmlns:a16="http://schemas.microsoft.com/office/drawing/2014/main" id="{C4D9357D-FE37-0963-684F-05FB237209CC}"/>
+              </a:ext>
+            </a:extLst>
+          </p:cNvPr>
+          <p:cNvSpPr txBox="1"/>
           <p:nvPr/>
-        </p:nvPicPr>
-        <p:blipFill>
-          <a:blip r:embed="rId2"/>
-          <a:stretch>
-            <a:fillRect/>
-          </a:stretch>
-        </p:blipFill>
+        </p:nvSpPr>
         <p:spPr>
           <a:xfrm>
-            <a:off x="1118115" y="5552903"/>
-            <a:ext cx="9955763" cy="713754"/>
+            <a:off x="1663959" y="1410864"/>
+            <a:ext cx="8864081" cy="369332"/>
           </a:xfrm>
           <a:prstGeom prst="rect">
             <a:avLst/>
           </a:prstGeom>
+          <a:noFill/>
         </p:spPr>
-      </p:pic>
-      <p:pic>
-        <p:nvPicPr>
-          <p:cNvPr id="9" name="Picture 8">
-            <a:extLst>
-              <a:ext uri="{FF2B5EF4-FFF2-40B4-BE49-F238E27FC236}">
-                <a16:creationId xmlns:a16="http://schemas.microsoft.com/office/drawing/2014/main" id="{777A9C3A-1DEC-C4DB-3730-5137FC8F93A1}"/>
-              </a:ext>
-            </a:extLst>
-          </p:cNvPr>
-          <p:cNvPicPr>
-            <a:picLocks noChangeAspect="1"/>
-          </p:cNvPicPr>
+        <p:txBody>
+          <a:bodyPr wrap="square" rtlCol="0">
+            <a:spAutoFit/>
+          </a:bodyPr>
+          <a:lstStyle/>
+          <a:p>
+            <a:pPr algn="ctr"/>
+            <a:r>
+              <a:rPr lang="en-US" dirty="0">
+                <a:latin typeface="Georgia" panose="02040502050405020303" pitchFamily="18" charset="0"/>
+              </a:rPr>
+              <a:t>Dataset</a:t>
+            </a:r>
+            <a:r>
+              <a:rPr lang="en-IN" dirty="0">
+                <a:latin typeface="Georgia" panose="02040502050405020303" pitchFamily="18" charset="0"/>
+              </a:rPr>
+              <a:t> : </a:t>
+            </a:r>
+            <a:r>
+              <a:rPr lang="en-US" dirty="0">
+                <a:latin typeface="Georgia" panose="02040502050405020303" pitchFamily="18" charset="0"/>
+                <a:hlinkClick r:id="rId2"/>
+              </a:rPr>
+              <a:t>Indian License Plate Dataset</a:t>
+            </a:r>
+            <a:r>
+              <a:rPr lang="en-IN" dirty="0">
+                <a:latin typeface="Georgia" panose="02040502050405020303" pitchFamily="18" charset="0"/>
+              </a:rPr>
+              <a:t> </a:t>
+            </a:r>
+          </a:p>
+        </p:txBody>
+      </p:sp>
+      <p:sp>
+        <p:nvSpPr>
+          <p:cNvPr id="8" name="TextBox 7">
+            <a:extLst>
+              <a:ext uri="{FF2B5EF4-FFF2-40B4-BE49-F238E27FC236}">
+                <a16:creationId xmlns:a16="http://schemas.microsoft.com/office/drawing/2014/main" id="{EBB8CB87-3DF6-FF33-8624-CBFE051E5FF5}"/>
+              </a:ext>
+            </a:extLst>
+          </p:cNvPr>
+          <p:cNvSpPr txBox="1"/>
           <p:nvPr/>
-        </p:nvPicPr>
-        <p:blipFill>
-          <a:blip r:embed="rId3"/>
-          <a:stretch>
-            <a:fillRect/>
-          </a:stretch>
-        </p:blipFill>
+        </p:nvSpPr>
         <p:spPr>
           <a:xfrm>
-            <a:off x="3427470" y="1462088"/>
-            <a:ext cx="5337055" cy="3972543"/>
+            <a:off x="3047222" y="5529330"/>
+            <a:ext cx="6097554" cy="338554"/>
           </a:xfrm>
           <a:prstGeom prst="rect">
             <a:avLst/>
           </a:prstGeom>
+          <a:noFill/>
         </p:spPr>
-      </p:pic>
+        <p:txBody>
+          <a:bodyPr wrap="square">
+            <a:spAutoFit/>
+          </a:bodyPr>
+          <a:lstStyle/>
+          <a:p>
+            <a:pPr algn="ctr"/>
+            <a:r>
+              <a:rPr lang="en-US" sz="1600" dirty="0">
+                <a:latin typeface="Georgia" panose="02040502050405020303" pitchFamily="18" charset="0"/>
+              </a:rPr>
+              <a:t>Table 2 : Dataset Description</a:t>
+            </a:r>
+            <a:endParaRPr lang="en-IN" sz="1600" dirty="0">
+              <a:latin typeface="Georgia" panose="02040502050405020303" pitchFamily="18" charset="0"/>
+            </a:endParaRPr>
+          </a:p>
+        </p:txBody>
+      </p:sp>
     </p:spTree>
     <p:extLst>
       <p:ext uri="{BB962C8B-B14F-4D97-AF65-F5344CB8AC3E}">
-        <p14:creationId xmlns:p14="http://schemas.microsoft.com/office/powerpoint/2010/main" val="3864434690"/>
+        <p14:creationId xmlns:p14="http://schemas.microsoft.com/office/powerpoint/2010/main" val="3132778601"/>
       </p:ext>
     </p:extLst>
   </p:cSld>
@@ -7976,7 +9777,7 @@
         </p:nvSpPr>
         <p:spPr>
           <a:xfrm>
-            <a:off x="452453" y="233616"/>
+            <a:off x="452453" y="336252"/>
             <a:ext cx="11287094" cy="1016064"/>
           </a:xfrm>
         </p:spPr>
@@ -7989,300 +9790,10 @@
             <a:pPr algn="ctr"/>
             <a:r>
               <a:rPr lang="en-IN" sz="3200" b="1" dirty="0">
-                <a:latin typeface="Times New Roman" panose="02020603050405020304" pitchFamily="18" charset="0"/>
+                <a:latin typeface="Georgia" panose="02040502050405020303" pitchFamily="18" charset="0"/>
                 <a:cs typeface="Times New Roman" panose="02020603050405020304" pitchFamily="18" charset="0"/>
               </a:rPr>
               <a:t>TECHNOLOGY STACK</a:t>
-            </a:r>
-          </a:p>
-        </p:txBody>
-      </p:sp>
-      <p:sp>
-        <p:nvSpPr>
-          <p:cNvPr id="4" name="Rectangle 1">
-            <a:extLst>
-              <a:ext uri="{FF2B5EF4-FFF2-40B4-BE49-F238E27FC236}">
-                <a16:creationId xmlns:a16="http://schemas.microsoft.com/office/drawing/2014/main" id="{3C8B7DD7-B02C-315D-6611-EE88E1C5F7C5}"/>
-              </a:ext>
-            </a:extLst>
-          </p:cNvPr>
-          <p:cNvSpPr>
-            <a:spLocks noGrp="1" noChangeArrowheads="1"/>
-          </p:cNvSpPr>
-          <p:nvPr>
-            <p:ph idx="1"/>
-          </p:nvPr>
-        </p:nvSpPr>
-        <p:spPr bwMode="auto">
-          <a:xfrm>
-            <a:off x="922686" y="1372318"/>
-            <a:ext cx="10346623" cy="5349157"/>
-          </a:xfrm>
-          <a:prstGeom prst="rect">
-            <a:avLst/>
-          </a:prstGeom>
-          <a:noFill/>
-          <a:ln>
-            <a:noFill/>
-          </a:ln>
-          <a:effectLst/>
-          <a:extLst>
-            <a:ext uri="{909E8E84-426E-40DD-AFC4-6F175D3DCCD1}">
-              <a14:hiddenFill xmlns:a14="http://schemas.microsoft.com/office/drawing/2010/main">
-                <a:solidFill>
-                  <a:schemeClr val="accent1"/>
-                </a:solidFill>
-              </a14:hiddenFill>
-            </a:ext>
-            <a:ext uri="{91240B29-F687-4F45-9708-019B960494DF}">
-              <a14:hiddenLine xmlns:a14="http://schemas.microsoft.com/office/drawing/2010/main" w="9525">
-                <a:solidFill>
-                  <a:schemeClr val="tx1"/>
-                </a:solidFill>
-                <a:miter lim="800000"/>
-                <a:headEnd/>
-                <a:tailEnd/>
-              </a14:hiddenLine>
-            </a:ext>
-            <a:ext uri="{AF507438-7753-43E0-B8FC-AC1667EBCBE1}">
-              <a14:hiddenEffects xmlns:a14="http://schemas.microsoft.com/office/drawing/2010/main">
-                <a:effectLst>
-                  <a:outerShdw dist="35921" dir="2700000" algn="ctr" rotWithShape="0">
-                    <a:schemeClr val="bg2"/>
-                  </a:outerShdw>
-                </a:effectLst>
-              </a14:hiddenEffects>
-            </a:ext>
-          </a:extLst>
-        </p:spPr>
-        <p:txBody>
-          <a:bodyPr vert="horz" wrap="square" lIns="91440" tIns="45720" rIns="91440" bIns="45720" numCol="1" anchor="ctr" anchorCtr="0" compatLnSpc="1">
-            <a:prstTxWarp prst="textNoShape">
-              <a:avLst/>
-            </a:prstTxWarp>
-            <a:spAutoFit/>
-          </a:bodyPr>
-          <a:lstStyle/>
-          <a:p>
-            <a:r>
-              <a:rPr lang="en-IN" sz="1800" b="1" dirty="0">
-                <a:latin typeface="Times New Roman" panose="02020603050405020304" pitchFamily="18" charset="0"/>
-                <a:cs typeface="Times New Roman" panose="02020603050405020304" pitchFamily="18" charset="0"/>
-              </a:rPr>
-              <a:t>Programming Language:</a:t>
-            </a:r>
-            <a:br>
-              <a:rPr lang="en-IN" sz="1800" dirty="0">
-                <a:latin typeface="Times New Roman" panose="02020603050405020304" pitchFamily="18" charset="0"/>
-                <a:cs typeface="Times New Roman" panose="02020603050405020304" pitchFamily="18" charset="0"/>
-              </a:rPr>
-            </a:br>
-            <a:r>
-              <a:rPr lang="en-IN" sz="1800" dirty="0">
-                <a:latin typeface="Times New Roman" panose="02020603050405020304" pitchFamily="18" charset="0"/>
-                <a:cs typeface="Times New Roman" panose="02020603050405020304" pitchFamily="18" charset="0"/>
-              </a:rPr>
-              <a:t>Python — used for implementing computer vision and deep learning models.</a:t>
-            </a:r>
-            <a:br>
-              <a:rPr lang="en-IN" sz="1800" dirty="0">
-                <a:latin typeface="Times New Roman" panose="02020603050405020304" pitchFamily="18" charset="0"/>
-                <a:cs typeface="Times New Roman" panose="02020603050405020304" pitchFamily="18" charset="0"/>
-              </a:rPr>
-            </a:br>
-            <a:endParaRPr lang="en-IN" sz="1800" dirty="0">
-              <a:latin typeface="Times New Roman" panose="02020603050405020304" pitchFamily="18" charset="0"/>
-              <a:cs typeface="Times New Roman" panose="02020603050405020304" pitchFamily="18" charset="0"/>
-            </a:endParaRPr>
-          </a:p>
-          <a:p>
-            <a:r>
-              <a:rPr lang="en-IN" sz="1800" b="1" dirty="0">
-                <a:latin typeface="Times New Roman" panose="02020603050405020304" pitchFamily="18" charset="0"/>
-                <a:cs typeface="Times New Roman" panose="02020603050405020304" pitchFamily="18" charset="0"/>
-              </a:rPr>
-              <a:t>Computer Vision:</a:t>
-            </a:r>
-            <a:br>
-              <a:rPr lang="en-IN" sz="1800" dirty="0">
-                <a:latin typeface="Times New Roman" panose="02020603050405020304" pitchFamily="18" charset="0"/>
-                <a:cs typeface="Times New Roman" panose="02020603050405020304" pitchFamily="18" charset="0"/>
-              </a:rPr>
-            </a:br>
-            <a:r>
-              <a:rPr lang="en-IN" sz="1800" dirty="0">
-                <a:latin typeface="Times New Roman" panose="02020603050405020304" pitchFamily="18" charset="0"/>
-                <a:cs typeface="Times New Roman" panose="02020603050405020304" pitchFamily="18" charset="0"/>
-              </a:rPr>
-              <a:t>OpenCV — used for image handling, preprocessing, and visualization of detection results.</a:t>
-            </a:r>
-            <a:br>
-              <a:rPr lang="en-IN" sz="1800" dirty="0">
-                <a:latin typeface="Times New Roman" panose="02020603050405020304" pitchFamily="18" charset="0"/>
-                <a:cs typeface="Times New Roman" panose="02020603050405020304" pitchFamily="18" charset="0"/>
-              </a:rPr>
-            </a:br>
-            <a:endParaRPr lang="en-IN" sz="1800" dirty="0">
-              <a:latin typeface="Times New Roman" panose="02020603050405020304" pitchFamily="18" charset="0"/>
-              <a:cs typeface="Times New Roman" panose="02020603050405020304" pitchFamily="18" charset="0"/>
-            </a:endParaRPr>
-          </a:p>
-          <a:p>
-            <a:r>
-              <a:rPr lang="en-IN" sz="1800" b="1" dirty="0">
-                <a:latin typeface="Times New Roman" panose="02020603050405020304" pitchFamily="18" charset="0"/>
-                <a:cs typeface="Times New Roman" panose="02020603050405020304" pitchFamily="18" charset="0"/>
-              </a:rPr>
-              <a:t>Deep Learning Model:</a:t>
-            </a:r>
-            <a:br>
-              <a:rPr lang="en-IN" sz="1800" dirty="0">
-                <a:latin typeface="Times New Roman" panose="02020603050405020304" pitchFamily="18" charset="0"/>
-                <a:cs typeface="Times New Roman" panose="02020603050405020304" pitchFamily="18" charset="0"/>
-              </a:rPr>
-            </a:br>
-            <a:r>
-              <a:rPr lang="en-IN" sz="1800" dirty="0">
-                <a:latin typeface="Times New Roman" panose="02020603050405020304" pitchFamily="18" charset="0"/>
-                <a:cs typeface="Times New Roman" panose="02020603050405020304" pitchFamily="18" charset="0"/>
-              </a:rPr>
-              <a:t>YOLOv8 (</a:t>
-            </a:r>
-            <a:r>
-              <a:rPr lang="en-IN" sz="1800" dirty="0" err="1">
-                <a:latin typeface="Times New Roman" panose="02020603050405020304" pitchFamily="18" charset="0"/>
-                <a:cs typeface="Times New Roman" panose="02020603050405020304" pitchFamily="18" charset="0"/>
-              </a:rPr>
-              <a:t>Ultralytics</a:t>
-            </a:r>
-            <a:r>
-              <a:rPr lang="en-IN" sz="1800" dirty="0">
-                <a:latin typeface="Times New Roman" panose="02020603050405020304" pitchFamily="18" charset="0"/>
-                <a:cs typeface="Times New Roman" panose="02020603050405020304" pitchFamily="18" charset="0"/>
-              </a:rPr>
-              <a:t>) — used for real-time license plate detection with high accuracy.</a:t>
-            </a:r>
-          </a:p>
-          <a:p>
-            <a:pPr marL="0" indent="0">
-              <a:buNone/>
-            </a:pPr>
-            <a:r>
-              <a:rPr lang="en-IN" sz="1800" dirty="0">
-                <a:latin typeface="Times New Roman" panose="02020603050405020304" pitchFamily="18" charset="0"/>
-                <a:cs typeface="Times New Roman" panose="02020603050405020304" pitchFamily="18" charset="0"/>
-              </a:rPr>
-              <a:t>    </a:t>
-            </a:r>
-            <a:r>
-              <a:rPr lang="en-IN" sz="1800" dirty="0" err="1">
-                <a:latin typeface="Times New Roman" panose="02020603050405020304" pitchFamily="18" charset="0"/>
-                <a:cs typeface="Times New Roman" panose="02020603050405020304" pitchFamily="18" charset="0"/>
-              </a:rPr>
-              <a:t>PyTorch</a:t>
-            </a:r>
-            <a:r>
-              <a:rPr lang="en-IN" sz="1800" dirty="0">
-                <a:latin typeface="Times New Roman" panose="02020603050405020304" pitchFamily="18" charset="0"/>
-                <a:cs typeface="Times New Roman" panose="02020603050405020304" pitchFamily="18" charset="0"/>
-              </a:rPr>
-              <a:t> — backend framework used by YOLOv8 for model training and inference.</a:t>
-            </a:r>
-            <a:br>
-              <a:rPr lang="en-IN" sz="1800" dirty="0">
-                <a:latin typeface="Times New Roman" panose="02020603050405020304" pitchFamily="18" charset="0"/>
-                <a:cs typeface="Times New Roman" panose="02020603050405020304" pitchFamily="18" charset="0"/>
-              </a:rPr>
-            </a:br>
-            <a:endParaRPr lang="en-IN" sz="1800" dirty="0">
-              <a:latin typeface="Times New Roman" panose="02020603050405020304" pitchFamily="18" charset="0"/>
-              <a:cs typeface="Times New Roman" panose="02020603050405020304" pitchFamily="18" charset="0"/>
-            </a:endParaRPr>
-          </a:p>
-          <a:p>
-            <a:r>
-              <a:rPr lang="en-IN" sz="1800" b="1" dirty="0">
-                <a:latin typeface="Times New Roman" panose="02020603050405020304" pitchFamily="18" charset="0"/>
-                <a:cs typeface="Times New Roman" panose="02020603050405020304" pitchFamily="18" charset="0"/>
-              </a:rPr>
-              <a:t>OCR (Text Recognition):</a:t>
-            </a:r>
-            <a:br>
-              <a:rPr lang="en-IN" sz="1800" dirty="0">
-                <a:latin typeface="Times New Roman" panose="02020603050405020304" pitchFamily="18" charset="0"/>
-                <a:cs typeface="Times New Roman" panose="02020603050405020304" pitchFamily="18" charset="0"/>
-              </a:rPr>
-            </a:br>
-            <a:r>
-              <a:rPr lang="en-IN" sz="1800" dirty="0">
-                <a:latin typeface="Times New Roman" panose="02020603050405020304" pitchFamily="18" charset="0"/>
-                <a:cs typeface="Times New Roman" panose="02020603050405020304" pitchFamily="18" charset="0"/>
-              </a:rPr>
-              <a:t>EasyOCR — used to extract alphanumeric text from detected license plates.</a:t>
-            </a:r>
-            <a:br>
-              <a:rPr lang="en-IN" sz="1800" dirty="0">
-                <a:latin typeface="Times New Roman" panose="02020603050405020304" pitchFamily="18" charset="0"/>
-                <a:cs typeface="Times New Roman" panose="02020603050405020304" pitchFamily="18" charset="0"/>
-              </a:rPr>
-            </a:br>
-            <a:endParaRPr lang="en-IN" sz="1800" dirty="0">
-              <a:latin typeface="Times New Roman" panose="02020603050405020304" pitchFamily="18" charset="0"/>
-              <a:cs typeface="Times New Roman" panose="02020603050405020304" pitchFamily="18" charset="0"/>
-            </a:endParaRPr>
-          </a:p>
-          <a:p>
-            <a:r>
-              <a:rPr lang="en-IN" sz="1800" b="1" dirty="0">
-                <a:latin typeface="Times New Roman" panose="02020603050405020304" pitchFamily="18" charset="0"/>
-                <a:cs typeface="Times New Roman" panose="02020603050405020304" pitchFamily="18" charset="0"/>
-              </a:rPr>
-              <a:t>Hardware:</a:t>
-            </a:r>
-            <a:br>
-              <a:rPr lang="en-IN" sz="1800" dirty="0">
-                <a:latin typeface="Times New Roman" panose="02020603050405020304" pitchFamily="18" charset="0"/>
-                <a:cs typeface="Times New Roman" panose="02020603050405020304" pitchFamily="18" charset="0"/>
-              </a:rPr>
-            </a:br>
-            <a:r>
-              <a:rPr lang="en-IN" sz="1800" dirty="0">
-                <a:latin typeface="Times New Roman" panose="02020603050405020304" pitchFamily="18" charset="0"/>
-                <a:cs typeface="Times New Roman" panose="02020603050405020304" pitchFamily="18" charset="0"/>
-              </a:rPr>
-              <a:t>Strong GPU for faster training, inference and for capturing real-time video feed at the college gate.</a:t>
-            </a:r>
-            <a:br>
-              <a:rPr lang="en-IN" sz="1800" dirty="0">
-                <a:latin typeface="Times New Roman" panose="02020603050405020304" pitchFamily="18" charset="0"/>
-                <a:cs typeface="Times New Roman" panose="02020603050405020304" pitchFamily="18" charset="0"/>
-              </a:rPr>
-            </a:br>
-            <a:endParaRPr lang="en-IN" sz="1800" dirty="0">
-              <a:latin typeface="Times New Roman" panose="02020603050405020304" pitchFamily="18" charset="0"/>
-              <a:cs typeface="Times New Roman" panose="02020603050405020304" pitchFamily="18" charset="0"/>
-            </a:endParaRPr>
-          </a:p>
-          <a:p>
-            <a:r>
-              <a:rPr lang="en-IN" sz="1800" b="1" dirty="0">
-                <a:latin typeface="Times New Roman" panose="02020603050405020304" pitchFamily="18" charset="0"/>
-                <a:cs typeface="Times New Roman" panose="02020603050405020304" pitchFamily="18" charset="0"/>
-              </a:rPr>
-              <a:t>Development Environment:</a:t>
-            </a:r>
-            <a:br>
-              <a:rPr lang="en-IN" sz="1800" dirty="0">
-                <a:latin typeface="Times New Roman" panose="02020603050405020304" pitchFamily="18" charset="0"/>
-                <a:cs typeface="Times New Roman" panose="02020603050405020304" pitchFamily="18" charset="0"/>
-              </a:rPr>
-            </a:br>
-            <a:r>
-              <a:rPr lang="en-IN" sz="1800" dirty="0">
-                <a:latin typeface="Times New Roman" panose="02020603050405020304" pitchFamily="18" charset="0"/>
-                <a:cs typeface="Times New Roman" panose="02020603050405020304" pitchFamily="18" charset="0"/>
-              </a:rPr>
-              <a:t>VS Code — used for coding and debugging.</a:t>
             </a:r>
           </a:p>
         </p:txBody>
@@ -8313,6 +9824,427 @@
               <a:t>9</a:t>
             </a:fld>
             <a:endParaRPr lang="en-IN"/>
+          </a:p>
+        </p:txBody>
+      </p:sp>
+      <p:graphicFrame>
+        <p:nvGraphicFramePr>
+          <p:cNvPr id="3" name="Table 2">
+            <a:extLst>
+              <a:ext uri="{FF2B5EF4-FFF2-40B4-BE49-F238E27FC236}">
+                <a16:creationId xmlns:a16="http://schemas.microsoft.com/office/drawing/2014/main" id="{70A1E227-F99D-9CF9-1AFE-8401C8A17635}"/>
+              </a:ext>
+            </a:extLst>
+          </p:cNvPr>
+          <p:cNvGraphicFramePr>
+            <a:graphicFrameLocks noGrp="1"/>
+          </p:cNvGraphicFramePr>
+          <p:nvPr>
+            <p:extLst>
+              <p:ext uri="{D42A27DB-BD31-4B8C-83A1-F6EECF244321}">
+                <p14:modId xmlns:p14="http://schemas.microsoft.com/office/powerpoint/2010/main" val="2556558290"/>
+              </p:ext>
+            </p:extLst>
+          </p:nvPr>
+        </p:nvGraphicFramePr>
+        <p:xfrm>
+          <a:off x="1583742" y="1697452"/>
+          <a:ext cx="9024516" cy="3463096"/>
+        </p:xfrm>
+        <a:graphic>
+          <a:graphicData uri="http://schemas.openxmlformats.org/drawingml/2006/table">
+            <a:tbl>
+              <a:tblPr firstRow="1" bandRow="1">
+                <a:tableStyleId>{8799B23B-EC83-4686-B30A-512413B5E67A}</a:tableStyleId>
+              </a:tblPr>
+              <a:tblGrid>
+                <a:gridCol w="4512258">
+                  <a:extLst>
+                    <a:ext uri="{9D8B030D-6E8A-4147-A177-3AD203B41FA5}">
+                      <a16:colId xmlns:a16="http://schemas.microsoft.com/office/drawing/2014/main" val="340233316"/>
+                    </a:ext>
+                  </a:extLst>
+                </a:gridCol>
+                <a:gridCol w="4512258">
+                  <a:extLst>
+                    <a:ext uri="{9D8B030D-6E8A-4147-A177-3AD203B41FA5}">
+                      <a16:colId xmlns:a16="http://schemas.microsoft.com/office/drawing/2014/main" val="2675222696"/>
+                    </a:ext>
+                  </a:extLst>
+                </a:gridCol>
+              </a:tblGrid>
+              <a:tr h="432887">
+                <a:tc>
+                  <a:txBody>
+                    <a:bodyPr/>
+                    <a:lstStyle/>
+                    <a:p>
+                      <a:pPr algn="l"/>
+                      <a:r>
+                        <a:rPr lang="en-US" sz="2000" dirty="0">
+                          <a:latin typeface="Georgia" panose="02040502050405020303" pitchFamily="18" charset="0"/>
+                        </a:rPr>
+                        <a:t>Category</a:t>
+                      </a:r>
+                      <a:endParaRPr lang="en-IN" sz="2000" dirty="0">
+                        <a:latin typeface="Georgia" panose="02040502050405020303" pitchFamily="18" charset="0"/>
+                      </a:endParaRPr>
+                    </a:p>
+                  </a:txBody>
+                  <a:tcPr anchor="ctr"/>
+                </a:tc>
+                <a:tc>
+                  <a:txBody>
+                    <a:bodyPr/>
+                    <a:lstStyle/>
+                    <a:p>
+                      <a:r>
+                        <a:rPr lang="en-US" sz="2000" dirty="0">
+                          <a:latin typeface="Georgia" panose="02040502050405020303" pitchFamily="18" charset="0"/>
+                        </a:rPr>
+                        <a:t>Technologies Used</a:t>
+                      </a:r>
+                      <a:endParaRPr lang="en-IN" sz="2000" dirty="0">
+                        <a:latin typeface="Georgia" panose="02040502050405020303" pitchFamily="18" charset="0"/>
+                      </a:endParaRPr>
+                    </a:p>
+                  </a:txBody>
+                  <a:tcPr anchor="ctr"/>
+                </a:tc>
+                <a:extLst>
+                  <a:ext uri="{0D108BD9-81ED-4DB2-BD59-A6C34878D82A}">
+                    <a16:rowId xmlns:a16="http://schemas.microsoft.com/office/drawing/2014/main" val="1742888175"/>
+                  </a:ext>
+                </a:extLst>
+              </a:tr>
+              <a:tr h="432887">
+                <a:tc>
+                  <a:txBody>
+                    <a:bodyPr/>
+                    <a:lstStyle/>
+                    <a:p>
+                      <a:r>
+                        <a:rPr lang="en-US" sz="1600" dirty="0">
+                          <a:latin typeface="Georgia" panose="02040502050405020303" pitchFamily="18" charset="0"/>
+                        </a:rPr>
+                        <a:t>Programming Language</a:t>
+                      </a:r>
+                    </a:p>
+                  </a:txBody>
+                  <a:tcPr anchor="ctr"/>
+                </a:tc>
+                <a:tc>
+                  <a:txBody>
+                    <a:bodyPr/>
+                    <a:lstStyle/>
+                    <a:p>
+                      <a:r>
+                        <a:rPr lang="en-US" sz="1600" dirty="0">
+                          <a:latin typeface="Georgia" panose="02040502050405020303" pitchFamily="18" charset="0"/>
+                        </a:rPr>
+                        <a:t>Python</a:t>
+                      </a:r>
+                      <a:endParaRPr lang="en-IN" sz="1600" dirty="0">
+                        <a:latin typeface="Georgia" panose="02040502050405020303" pitchFamily="18" charset="0"/>
+                      </a:endParaRPr>
+                    </a:p>
+                  </a:txBody>
+                  <a:tcPr anchor="ctr"/>
+                </a:tc>
+                <a:extLst>
+                  <a:ext uri="{0D108BD9-81ED-4DB2-BD59-A6C34878D82A}">
+                    <a16:rowId xmlns:a16="http://schemas.microsoft.com/office/drawing/2014/main" val="3182211140"/>
+                  </a:ext>
+                </a:extLst>
+              </a:tr>
+              <a:tr h="432887">
+                <a:tc>
+                  <a:txBody>
+                    <a:bodyPr/>
+                    <a:lstStyle/>
+                    <a:p>
+                      <a:r>
+                        <a:rPr lang="en-IN" sz="1600" dirty="0">
+                          <a:latin typeface="Georgia" panose="02040502050405020303" pitchFamily="18" charset="0"/>
+                        </a:rPr>
+                        <a:t>Deep Learning Model</a:t>
+                      </a:r>
+                    </a:p>
+                  </a:txBody>
+                  <a:tcPr anchor="ctr"/>
+                </a:tc>
+                <a:tc>
+                  <a:txBody>
+                    <a:bodyPr/>
+                    <a:lstStyle/>
+                    <a:p>
+                      <a:r>
+                        <a:rPr lang="en-IN" sz="1600" dirty="0">
+                          <a:latin typeface="Georgia" panose="02040502050405020303" pitchFamily="18" charset="0"/>
+                        </a:rPr>
+                        <a:t>YOLOv8 (Ultralytics), PyTorch</a:t>
+                      </a:r>
+                    </a:p>
+                  </a:txBody>
+                  <a:tcPr anchor="ctr"/>
+                </a:tc>
+                <a:extLst>
+                  <a:ext uri="{0D108BD9-81ED-4DB2-BD59-A6C34878D82A}">
+                    <a16:rowId xmlns:a16="http://schemas.microsoft.com/office/drawing/2014/main" val="3303268808"/>
+                  </a:ext>
+                </a:extLst>
+              </a:tr>
+              <a:tr h="432887">
+                <a:tc>
+                  <a:txBody>
+                    <a:bodyPr/>
+                    <a:lstStyle/>
+                    <a:p>
+                      <a:r>
+                        <a:rPr lang="en-IN" sz="1600" dirty="0">
+                          <a:latin typeface="Georgia" panose="02040502050405020303" pitchFamily="18" charset="0"/>
+                        </a:rPr>
+                        <a:t>OCR (Text Recognition)</a:t>
+                      </a:r>
+                    </a:p>
+                  </a:txBody>
+                  <a:tcPr anchor="ctr"/>
+                </a:tc>
+                <a:tc>
+                  <a:txBody>
+                    <a:bodyPr/>
+                    <a:lstStyle/>
+                    <a:p>
+                      <a:pPr>
+                        <a:buNone/>
+                      </a:pPr>
+                      <a:r>
+                        <a:rPr lang="en-US" sz="1600" dirty="0">
+                          <a:latin typeface="Georgia" panose="02040502050405020303" pitchFamily="18" charset="0"/>
+                        </a:rPr>
+                        <a:t>EasyOCR</a:t>
+                      </a:r>
+                      <a:endParaRPr lang="en-IN" sz="1600" dirty="0">
+                        <a:latin typeface="Georgia" panose="02040502050405020303" pitchFamily="18" charset="0"/>
+                      </a:endParaRPr>
+                    </a:p>
+                  </a:txBody>
+                  <a:tcPr anchor="ctr"/>
+                </a:tc>
+                <a:extLst>
+                  <a:ext uri="{0D108BD9-81ED-4DB2-BD59-A6C34878D82A}">
+                    <a16:rowId xmlns:a16="http://schemas.microsoft.com/office/drawing/2014/main" val="3323830933"/>
+                  </a:ext>
+                </a:extLst>
+              </a:tr>
+              <a:tr h="432887">
+                <a:tc>
+                  <a:txBody>
+                    <a:bodyPr/>
+                    <a:lstStyle/>
+                    <a:p>
+                      <a:r>
+                        <a:rPr lang="en-US" sz="1600" dirty="0">
+                          <a:latin typeface="Georgia" panose="02040502050405020303" pitchFamily="18" charset="0"/>
+                        </a:rPr>
+                        <a:t>Computer</a:t>
+                      </a:r>
+                      <a:r>
+                        <a:rPr lang="en-IN" sz="1600" dirty="0">
+                          <a:latin typeface="Georgia" panose="02040502050405020303" pitchFamily="18" charset="0"/>
+                        </a:rPr>
+                        <a:t> Vision</a:t>
+                      </a:r>
+                    </a:p>
+                  </a:txBody>
+                  <a:tcPr anchor="ctr"/>
+                </a:tc>
+                <a:tc>
+                  <a:txBody>
+                    <a:bodyPr/>
+                    <a:lstStyle/>
+                    <a:p>
+                      <a:r>
+                        <a:rPr lang="en-US" sz="1600" dirty="0">
+                          <a:latin typeface="Georgia" panose="02040502050405020303" pitchFamily="18" charset="0"/>
+                        </a:rPr>
+                        <a:t>OpenCV</a:t>
+                      </a:r>
+                      <a:endParaRPr lang="en-IN" sz="1600" dirty="0">
+                        <a:latin typeface="Georgia" panose="02040502050405020303" pitchFamily="18" charset="0"/>
+                      </a:endParaRPr>
+                    </a:p>
+                  </a:txBody>
+                  <a:tcPr anchor="ctr"/>
+                </a:tc>
+                <a:extLst>
+                  <a:ext uri="{0D108BD9-81ED-4DB2-BD59-A6C34878D82A}">
+                    <a16:rowId xmlns:a16="http://schemas.microsoft.com/office/drawing/2014/main" val="260906860"/>
+                  </a:ext>
+                </a:extLst>
+              </a:tr>
+              <a:tr h="432887">
+                <a:tc>
+                  <a:txBody>
+                    <a:bodyPr/>
+                    <a:lstStyle/>
+                    <a:p>
+                      <a:r>
+                        <a:rPr lang="en-IN" sz="1600" dirty="0">
+                          <a:latin typeface="Georgia" panose="02040502050405020303" pitchFamily="18" charset="0"/>
+                        </a:rPr>
+                        <a:t>Web Framework</a:t>
+                      </a:r>
+                    </a:p>
+                  </a:txBody>
+                  <a:tcPr anchor="ctr"/>
+                </a:tc>
+                <a:tc>
+                  <a:txBody>
+                    <a:bodyPr/>
+                    <a:lstStyle/>
+                    <a:p>
+                      <a:r>
+                        <a:rPr lang="en-US" sz="1600" dirty="0">
+                          <a:latin typeface="Georgia" panose="02040502050405020303" pitchFamily="18" charset="0"/>
+                        </a:rPr>
+                        <a:t>Flask</a:t>
+                      </a:r>
+                      <a:endParaRPr lang="en-IN" sz="1600" dirty="0">
+                        <a:latin typeface="Georgia" panose="02040502050405020303" pitchFamily="18" charset="0"/>
+                      </a:endParaRPr>
+                    </a:p>
+                  </a:txBody>
+                  <a:tcPr anchor="ctr"/>
+                </a:tc>
+                <a:extLst>
+                  <a:ext uri="{0D108BD9-81ED-4DB2-BD59-A6C34878D82A}">
+                    <a16:rowId xmlns:a16="http://schemas.microsoft.com/office/drawing/2014/main" val="2624782099"/>
+                  </a:ext>
+                </a:extLst>
+              </a:tr>
+              <a:tr h="432887">
+                <a:tc>
+                  <a:txBody>
+                    <a:bodyPr/>
+                    <a:lstStyle/>
+                    <a:p>
+                      <a:r>
+                        <a:rPr lang="en-IN" sz="1600" dirty="0">
+                          <a:latin typeface="Georgia" panose="02040502050405020303" pitchFamily="18" charset="0"/>
+                        </a:rPr>
+                        <a:t>Data Processing</a:t>
+                      </a:r>
+                    </a:p>
+                  </a:txBody>
+                  <a:tcPr anchor="ctr"/>
+                </a:tc>
+                <a:tc>
+                  <a:txBody>
+                    <a:bodyPr/>
+                    <a:lstStyle/>
+                    <a:p>
+                      <a:r>
+                        <a:rPr lang="en-US" sz="1600" dirty="0">
+                          <a:latin typeface="Georgia" panose="02040502050405020303" pitchFamily="18" charset="0"/>
+                        </a:rPr>
+                        <a:t>NumPy, Pandas</a:t>
+                      </a:r>
+                      <a:endParaRPr lang="en-IN" sz="1600" dirty="0">
+                        <a:latin typeface="Georgia" panose="02040502050405020303" pitchFamily="18" charset="0"/>
+                      </a:endParaRPr>
+                    </a:p>
+                  </a:txBody>
+                  <a:tcPr anchor="ctr"/>
+                </a:tc>
+                <a:extLst>
+                  <a:ext uri="{0D108BD9-81ED-4DB2-BD59-A6C34878D82A}">
+                    <a16:rowId xmlns:a16="http://schemas.microsoft.com/office/drawing/2014/main" val="3108768471"/>
+                  </a:ext>
+                </a:extLst>
+              </a:tr>
+              <a:tr h="432887">
+                <a:tc>
+                  <a:txBody>
+                    <a:bodyPr/>
+                    <a:lstStyle/>
+                    <a:p>
+                      <a:r>
+                        <a:rPr lang="en-IN" sz="1600" dirty="0">
+                          <a:latin typeface="Georgia" panose="02040502050405020303" pitchFamily="18" charset="0"/>
+                        </a:rPr>
+                        <a:t>Development Environment</a:t>
+                      </a:r>
+                    </a:p>
+                  </a:txBody>
+                  <a:tcPr anchor="ctr"/>
+                </a:tc>
+                <a:tc>
+                  <a:txBody>
+                    <a:bodyPr/>
+                    <a:lstStyle/>
+                    <a:p>
+                      <a:r>
+                        <a:rPr lang="en-US" sz="1600" dirty="0">
+                          <a:latin typeface="Georgia" panose="02040502050405020303" pitchFamily="18" charset="0"/>
+                        </a:rPr>
+                        <a:t>VS Code</a:t>
+                      </a:r>
+                      <a:endParaRPr lang="en-IN" sz="1600" dirty="0">
+                        <a:latin typeface="Georgia" panose="02040502050405020303" pitchFamily="18" charset="0"/>
+                      </a:endParaRPr>
+                    </a:p>
+                  </a:txBody>
+                  <a:tcPr anchor="ctr"/>
+                </a:tc>
+                <a:extLst>
+                  <a:ext uri="{0D108BD9-81ED-4DB2-BD59-A6C34878D82A}">
+                    <a16:rowId xmlns:a16="http://schemas.microsoft.com/office/drawing/2014/main" val="3583291478"/>
+                  </a:ext>
+                </a:extLst>
+              </a:tr>
+            </a:tbl>
+          </a:graphicData>
+        </a:graphic>
+      </p:graphicFrame>
+      <p:sp>
+        <p:nvSpPr>
+          <p:cNvPr id="4" name="TextBox 3">
+            <a:extLst>
+              <a:ext uri="{FF2B5EF4-FFF2-40B4-BE49-F238E27FC236}">
+                <a16:creationId xmlns:a16="http://schemas.microsoft.com/office/drawing/2014/main" id="{1F46F9D9-74BD-490D-E5D8-7B04DDEC4B04}"/>
+              </a:ext>
+            </a:extLst>
+          </p:cNvPr>
+          <p:cNvSpPr txBox="1"/>
+          <p:nvPr/>
+        </p:nvSpPr>
+        <p:spPr>
+          <a:xfrm>
+            <a:off x="3047223" y="5250618"/>
+            <a:ext cx="6097554" cy="338554"/>
+          </a:xfrm>
+          <a:prstGeom prst="rect">
+            <a:avLst/>
+          </a:prstGeom>
+          <a:noFill/>
+        </p:spPr>
+        <p:txBody>
+          <a:bodyPr wrap="square">
+            <a:spAutoFit/>
+          </a:bodyPr>
+          <a:lstStyle/>
+          <a:p>
+            <a:pPr algn="ctr"/>
+            <a:r>
+              <a:rPr lang="en-US" sz="1600" dirty="0">
+                <a:latin typeface="Georgia" panose="02040502050405020303" pitchFamily="18" charset="0"/>
+              </a:rPr>
+              <a:t>Table 3 : Technology Stack</a:t>
+            </a:r>
+            <a:endParaRPr lang="en-IN" sz="1600" dirty="0">
+              <a:latin typeface="Georgia" panose="02040502050405020303" pitchFamily="18" charset="0"/>
+            </a:endParaRPr>
           </a:p>
         </p:txBody>
       </p:sp>
